--- a/janchevski_scalable_2025_private.pptx
+++ b/janchevski_scalable_2025_private.pptx
@@ -5,10 +5,10 @@
     <p:sldMasterId id="2147483660" r:id="rId4"/>
   </p:sldMasterIdLst>
   <p:notesMasterIdLst>
-    <p:notesMasterId r:id="rId32"/>
+    <p:notesMasterId r:id="rId40"/>
   </p:notesMasterIdLst>
   <p:handoutMasterIdLst>
-    <p:handoutMasterId r:id="rId33"/>
+    <p:handoutMasterId r:id="rId41"/>
   </p:handoutMasterIdLst>
   <p:sldIdLst>
     <p:sldId id="256" r:id="rId5"/>
@@ -35,9 +35,17 @@
     <p:sldId id="271" r:id="rId26"/>
     <p:sldId id="272" r:id="rId27"/>
     <p:sldId id="273" r:id="rId28"/>
-    <p:sldId id="278" r:id="rId29"/>
-    <p:sldId id="279" r:id="rId30"/>
-    <p:sldId id="274" r:id="rId31"/>
+    <p:sldId id="283" r:id="rId29"/>
+    <p:sldId id="286" r:id="rId30"/>
+    <p:sldId id="284" r:id="rId31"/>
+    <p:sldId id="285" r:id="rId32"/>
+    <p:sldId id="287" r:id="rId33"/>
+    <p:sldId id="288" r:id="rId34"/>
+    <p:sldId id="289" r:id="rId35"/>
+    <p:sldId id="290" r:id="rId36"/>
+    <p:sldId id="278" r:id="rId37"/>
+    <p:sldId id="279" r:id="rId38"/>
+    <p:sldId id="274" r:id="rId39"/>
   </p:sldIdLst>
   <p:sldSz cx="9144000" cy="5143500" type="screen16x9"/>
   <p:notesSz cx="6858000" cy="9144000"/>
@@ -244,7 +252,7 @@
               <a:rPr lang="fr-CH" smtClean="0">
                 <a:latin typeface="Arial" panose="020B0604020202020204" pitchFamily="34" charset="0"/>
               </a:rPr>
-              <a:t>03.10.25</a:t>
+              <a:t>04.10.2025</a:t>
             </a:fld>
             <a:endParaRPr lang="fr-CH" dirty="0">
               <a:latin typeface="Arial" panose="020B0604020202020204" pitchFamily="34" charset="0"/>
@@ -422,7 +430,7 @@
             <a:fld id="{F8103E42-5239-1A40-AD33-3EE7E9DDF5FD}" type="datetimeFigureOut">
               <a:rPr lang="fr-FR" smtClean="0"/>
               <a:pPr/>
-              <a:t>03/10/2025</a:t>
+              <a:t>04/10/2025</a:t>
             </a:fld>
             <a:endParaRPr lang="fr-FR" dirty="0"/>
           </a:p>
@@ -2419,16 +2427,6 @@
               <a:t>Future work could include the integration with more powerful foundation models, such as graph transformers, and could also aim to evaluate COINs on larger and less standardized public knowledge bases, where scalability is critical.</a:t>
             </a:r>
           </a:p>
-          <a:p>
-            <a:endParaRPr lang="en-US" dirty="0"/>
-          </a:p>
-          <a:p>
-            <a:r>
-              <a:rPr lang="en-US" dirty="0"/>
-              <a:t>We also provide a public release of our implementation.</a:t>
-            </a:r>
-            <a:endParaRPr lang="en-GB" dirty="0"/>
-          </a:p>
         </p:txBody>
       </p:sp>
       <p:sp>
@@ -2469,6 +2467,963 @@
 </file>
 
 <file path=ppt/notesSlides/notesSlide25.xml><?xml version="1.0" encoding="utf-8"?>
+<p:notes xmlns:a="http://schemas.openxmlformats.org/drawingml/2006/main" xmlns:r="http://schemas.openxmlformats.org/officeDocument/2006/relationships" xmlns:p="http://schemas.openxmlformats.org/presentationml/2006/main">
+  <p:cSld>
+    <p:spTree>
+      <p:nvGrpSpPr>
+        <p:cNvPr id="1" name="">
+          <a:extLst>
+            <a:ext uri="{FF2B5EF4-FFF2-40B4-BE49-F238E27FC236}">
+              <a16:creationId xmlns:a16="http://schemas.microsoft.com/office/drawing/2014/main" id="{F39DF230-077B-FC1A-20C0-E3389C706511}"/>
+            </a:ext>
+          </a:extLst>
+        </p:cNvPr>
+        <p:cNvGrpSpPr/>
+        <p:nvPr/>
+      </p:nvGrpSpPr>
+      <p:grpSpPr>
+        <a:xfrm>
+          <a:off x="0" y="0"/>
+          <a:ext cx="0" cy="0"/>
+          <a:chOff x="0" y="0"/>
+          <a:chExt cx="0" cy="0"/>
+        </a:xfrm>
+      </p:grpSpPr>
+      <p:sp>
+        <p:nvSpPr>
+          <p:cNvPr id="2" name="Slide Image Placeholder 1">
+            <a:extLst>
+              <a:ext uri="{FF2B5EF4-FFF2-40B4-BE49-F238E27FC236}">
+                <a16:creationId xmlns:a16="http://schemas.microsoft.com/office/drawing/2014/main" id="{B5A34493-6B29-A657-9265-47AEB688A555}"/>
+              </a:ext>
+            </a:extLst>
+          </p:cNvPr>
+          <p:cNvSpPr>
+            <a:spLocks noGrp="1" noRot="1" noChangeAspect="1"/>
+          </p:cNvSpPr>
+          <p:nvPr>
+            <p:ph type="sldImg"/>
+          </p:nvPr>
+        </p:nvSpPr>
+        <p:spPr/>
+      </p:sp>
+      <p:sp>
+        <p:nvSpPr>
+          <p:cNvPr id="3" name="Notes Placeholder 2">
+            <a:extLst>
+              <a:ext uri="{FF2B5EF4-FFF2-40B4-BE49-F238E27FC236}">
+                <a16:creationId xmlns:a16="http://schemas.microsoft.com/office/drawing/2014/main" id="{FC7F9F13-DE3F-B16B-6832-FA71FED4E0A8}"/>
+              </a:ext>
+            </a:extLst>
+          </p:cNvPr>
+          <p:cNvSpPr>
+            <a:spLocks noGrp="1"/>
+          </p:cNvSpPr>
+          <p:nvPr>
+            <p:ph type="body" idx="1"/>
+          </p:nvPr>
+        </p:nvSpPr>
+        <p:spPr/>
+        <p:txBody>
+          <a:bodyPr/>
+          <a:lstStyle/>
+          <a:p>
+            <a:endParaRPr lang="en-US" dirty="0"/>
+          </a:p>
+        </p:txBody>
+      </p:sp>
+      <p:sp>
+        <p:nvSpPr>
+          <p:cNvPr id="4" name="Slide Number Placeholder 3">
+            <a:extLst>
+              <a:ext uri="{FF2B5EF4-FFF2-40B4-BE49-F238E27FC236}">
+                <a16:creationId xmlns:a16="http://schemas.microsoft.com/office/drawing/2014/main" id="{0362D671-05BE-1CB1-147C-76FEEA81CF2E}"/>
+              </a:ext>
+            </a:extLst>
+          </p:cNvPr>
+          <p:cNvSpPr>
+            <a:spLocks noGrp="1"/>
+          </p:cNvSpPr>
+          <p:nvPr>
+            <p:ph type="sldNum" sz="quarter" idx="5"/>
+          </p:nvPr>
+        </p:nvSpPr>
+        <p:spPr/>
+        <p:txBody>
+          <a:bodyPr/>
+          <a:lstStyle/>
+          <a:p>
+            <a:fld id="{4CF50783-AAED-1941-8BCC-9F6140F0A6B1}" type="slidenum">
+              <a:rPr lang="fr-FR" smtClean="0"/>
+              <a:pPr/>
+              <a:t>25</a:t>
+            </a:fld>
+            <a:endParaRPr lang="fr-FR" dirty="0"/>
+          </a:p>
+        </p:txBody>
+      </p:sp>
+    </p:spTree>
+    <p:extLst>
+      <p:ext uri="{BB962C8B-B14F-4D97-AF65-F5344CB8AC3E}">
+        <p14:creationId xmlns:p14="http://schemas.microsoft.com/office/powerpoint/2010/main" val="4034205343"/>
+      </p:ext>
+    </p:extLst>
+  </p:cSld>
+  <p:clrMapOvr>
+    <a:masterClrMapping/>
+  </p:clrMapOvr>
+</p:notes>
+</file>
+
+<file path=ppt/notesSlides/notesSlide26.xml><?xml version="1.0" encoding="utf-8"?>
+<p:notes xmlns:a="http://schemas.openxmlformats.org/drawingml/2006/main" xmlns:r="http://schemas.openxmlformats.org/officeDocument/2006/relationships" xmlns:p="http://schemas.openxmlformats.org/presentationml/2006/main">
+  <p:cSld>
+    <p:spTree>
+      <p:nvGrpSpPr>
+        <p:cNvPr id="1" name="">
+          <a:extLst>
+            <a:ext uri="{FF2B5EF4-FFF2-40B4-BE49-F238E27FC236}">
+              <a16:creationId xmlns:a16="http://schemas.microsoft.com/office/drawing/2014/main" id="{40C8FA51-6AC1-0E77-3D5C-8EDCDD518A30}"/>
+            </a:ext>
+          </a:extLst>
+        </p:cNvPr>
+        <p:cNvGrpSpPr/>
+        <p:nvPr/>
+      </p:nvGrpSpPr>
+      <p:grpSpPr>
+        <a:xfrm>
+          <a:off x="0" y="0"/>
+          <a:ext cx="0" cy="0"/>
+          <a:chOff x="0" y="0"/>
+          <a:chExt cx="0" cy="0"/>
+        </a:xfrm>
+      </p:grpSpPr>
+      <p:sp>
+        <p:nvSpPr>
+          <p:cNvPr id="2" name="Slide Image Placeholder 1">
+            <a:extLst>
+              <a:ext uri="{FF2B5EF4-FFF2-40B4-BE49-F238E27FC236}">
+                <a16:creationId xmlns:a16="http://schemas.microsoft.com/office/drawing/2014/main" id="{20D377E6-44FD-845E-E5A8-9E67E6387ED0}"/>
+              </a:ext>
+            </a:extLst>
+          </p:cNvPr>
+          <p:cNvSpPr>
+            <a:spLocks noGrp="1" noRot="1" noChangeAspect="1"/>
+          </p:cNvSpPr>
+          <p:nvPr>
+            <p:ph type="sldImg"/>
+          </p:nvPr>
+        </p:nvSpPr>
+        <p:spPr/>
+      </p:sp>
+      <p:sp>
+        <p:nvSpPr>
+          <p:cNvPr id="3" name="Notes Placeholder 2">
+            <a:extLst>
+              <a:ext uri="{FF2B5EF4-FFF2-40B4-BE49-F238E27FC236}">
+                <a16:creationId xmlns:a16="http://schemas.microsoft.com/office/drawing/2014/main" id="{869D41ED-19BD-D8FB-639E-52316FC73AB4}"/>
+              </a:ext>
+            </a:extLst>
+          </p:cNvPr>
+          <p:cNvSpPr>
+            <a:spLocks noGrp="1"/>
+          </p:cNvSpPr>
+          <p:nvPr>
+            <p:ph type="body" idx="1"/>
+          </p:nvPr>
+        </p:nvSpPr>
+        <p:spPr/>
+        <p:txBody>
+          <a:bodyPr/>
+          <a:lstStyle/>
+          <a:p>
+            <a:endParaRPr lang="en-US" dirty="0"/>
+          </a:p>
+        </p:txBody>
+      </p:sp>
+      <p:sp>
+        <p:nvSpPr>
+          <p:cNvPr id="4" name="Slide Number Placeholder 3">
+            <a:extLst>
+              <a:ext uri="{FF2B5EF4-FFF2-40B4-BE49-F238E27FC236}">
+                <a16:creationId xmlns:a16="http://schemas.microsoft.com/office/drawing/2014/main" id="{144CF6CE-FA3F-DED4-1EA8-EDDE046E97ED}"/>
+              </a:ext>
+            </a:extLst>
+          </p:cNvPr>
+          <p:cNvSpPr>
+            <a:spLocks noGrp="1"/>
+          </p:cNvSpPr>
+          <p:nvPr>
+            <p:ph type="sldNum" sz="quarter" idx="5"/>
+          </p:nvPr>
+        </p:nvSpPr>
+        <p:spPr/>
+        <p:txBody>
+          <a:bodyPr/>
+          <a:lstStyle/>
+          <a:p>
+            <a:fld id="{4CF50783-AAED-1941-8BCC-9F6140F0A6B1}" type="slidenum">
+              <a:rPr lang="fr-FR" smtClean="0"/>
+              <a:pPr/>
+              <a:t>26</a:t>
+            </a:fld>
+            <a:endParaRPr lang="fr-FR" dirty="0"/>
+          </a:p>
+        </p:txBody>
+      </p:sp>
+    </p:spTree>
+    <p:extLst>
+      <p:ext uri="{BB962C8B-B14F-4D97-AF65-F5344CB8AC3E}">
+        <p14:creationId xmlns:p14="http://schemas.microsoft.com/office/powerpoint/2010/main" val="3290625951"/>
+      </p:ext>
+    </p:extLst>
+  </p:cSld>
+  <p:clrMapOvr>
+    <a:masterClrMapping/>
+  </p:clrMapOvr>
+</p:notes>
+</file>
+
+<file path=ppt/notesSlides/notesSlide27.xml><?xml version="1.0" encoding="utf-8"?>
+<p:notes xmlns:a="http://schemas.openxmlformats.org/drawingml/2006/main" xmlns:r="http://schemas.openxmlformats.org/officeDocument/2006/relationships" xmlns:p="http://schemas.openxmlformats.org/presentationml/2006/main">
+  <p:cSld>
+    <p:spTree>
+      <p:nvGrpSpPr>
+        <p:cNvPr id="1" name="">
+          <a:extLst>
+            <a:ext uri="{FF2B5EF4-FFF2-40B4-BE49-F238E27FC236}">
+              <a16:creationId xmlns:a16="http://schemas.microsoft.com/office/drawing/2014/main" id="{82F3F261-B3EF-40E8-37BB-13AD94C4CE73}"/>
+            </a:ext>
+          </a:extLst>
+        </p:cNvPr>
+        <p:cNvGrpSpPr/>
+        <p:nvPr/>
+      </p:nvGrpSpPr>
+      <p:grpSpPr>
+        <a:xfrm>
+          <a:off x="0" y="0"/>
+          <a:ext cx="0" cy="0"/>
+          <a:chOff x="0" y="0"/>
+          <a:chExt cx="0" cy="0"/>
+        </a:xfrm>
+      </p:grpSpPr>
+      <p:sp>
+        <p:nvSpPr>
+          <p:cNvPr id="2" name="Slide Image Placeholder 1">
+            <a:extLst>
+              <a:ext uri="{FF2B5EF4-FFF2-40B4-BE49-F238E27FC236}">
+                <a16:creationId xmlns:a16="http://schemas.microsoft.com/office/drawing/2014/main" id="{E9F7108A-8045-3626-EBBF-EA176D547476}"/>
+              </a:ext>
+            </a:extLst>
+          </p:cNvPr>
+          <p:cNvSpPr>
+            <a:spLocks noGrp="1" noRot="1" noChangeAspect="1"/>
+          </p:cNvSpPr>
+          <p:nvPr>
+            <p:ph type="sldImg"/>
+          </p:nvPr>
+        </p:nvSpPr>
+        <p:spPr/>
+      </p:sp>
+      <p:sp>
+        <p:nvSpPr>
+          <p:cNvPr id="3" name="Notes Placeholder 2">
+            <a:extLst>
+              <a:ext uri="{FF2B5EF4-FFF2-40B4-BE49-F238E27FC236}">
+                <a16:creationId xmlns:a16="http://schemas.microsoft.com/office/drawing/2014/main" id="{39F1237A-FF50-7F38-26C8-805DF60D8648}"/>
+              </a:ext>
+            </a:extLst>
+          </p:cNvPr>
+          <p:cNvSpPr>
+            <a:spLocks noGrp="1"/>
+          </p:cNvSpPr>
+          <p:nvPr>
+            <p:ph type="body" idx="1"/>
+          </p:nvPr>
+        </p:nvSpPr>
+        <p:spPr/>
+        <p:txBody>
+          <a:bodyPr/>
+          <a:lstStyle/>
+          <a:p>
+            <a:endParaRPr lang="en-US" dirty="0"/>
+          </a:p>
+        </p:txBody>
+      </p:sp>
+      <p:sp>
+        <p:nvSpPr>
+          <p:cNvPr id="4" name="Slide Number Placeholder 3">
+            <a:extLst>
+              <a:ext uri="{FF2B5EF4-FFF2-40B4-BE49-F238E27FC236}">
+                <a16:creationId xmlns:a16="http://schemas.microsoft.com/office/drawing/2014/main" id="{40035E30-99A5-C91D-9058-B6BC0765E4DB}"/>
+              </a:ext>
+            </a:extLst>
+          </p:cNvPr>
+          <p:cNvSpPr>
+            <a:spLocks noGrp="1"/>
+          </p:cNvSpPr>
+          <p:nvPr>
+            <p:ph type="sldNum" sz="quarter" idx="5"/>
+          </p:nvPr>
+        </p:nvSpPr>
+        <p:spPr/>
+        <p:txBody>
+          <a:bodyPr/>
+          <a:lstStyle/>
+          <a:p>
+            <a:fld id="{4CF50783-AAED-1941-8BCC-9F6140F0A6B1}" type="slidenum">
+              <a:rPr lang="fr-FR" smtClean="0"/>
+              <a:pPr/>
+              <a:t>27</a:t>
+            </a:fld>
+            <a:endParaRPr lang="fr-FR" dirty="0"/>
+          </a:p>
+        </p:txBody>
+      </p:sp>
+    </p:spTree>
+    <p:extLst>
+      <p:ext uri="{BB962C8B-B14F-4D97-AF65-F5344CB8AC3E}">
+        <p14:creationId xmlns:p14="http://schemas.microsoft.com/office/powerpoint/2010/main" val="24922358"/>
+      </p:ext>
+    </p:extLst>
+  </p:cSld>
+  <p:clrMapOvr>
+    <a:masterClrMapping/>
+  </p:clrMapOvr>
+</p:notes>
+</file>
+
+<file path=ppt/notesSlides/notesSlide28.xml><?xml version="1.0" encoding="utf-8"?>
+<p:notes xmlns:a="http://schemas.openxmlformats.org/drawingml/2006/main" xmlns:r="http://schemas.openxmlformats.org/officeDocument/2006/relationships" xmlns:p="http://schemas.openxmlformats.org/presentationml/2006/main">
+  <p:cSld>
+    <p:spTree>
+      <p:nvGrpSpPr>
+        <p:cNvPr id="1" name="">
+          <a:extLst>
+            <a:ext uri="{FF2B5EF4-FFF2-40B4-BE49-F238E27FC236}">
+              <a16:creationId xmlns:a16="http://schemas.microsoft.com/office/drawing/2014/main" id="{E1DAEA30-9B46-43D4-EE0D-54740049209F}"/>
+            </a:ext>
+          </a:extLst>
+        </p:cNvPr>
+        <p:cNvGrpSpPr/>
+        <p:nvPr/>
+      </p:nvGrpSpPr>
+      <p:grpSpPr>
+        <a:xfrm>
+          <a:off x="0" y="0"/>
+          <a:ext cx="0" cy="0"/>
+          <a:chOff x="0" y="0"/>
+          <a:chExt cx="0" cy="0"/>
+        </a:xfrm>
+      </p:grpSpPr>
+      <p:sp>
+        <p:nvSpPr>
+          <p:cNvPr id="2" name="Slide Image Placeholder 1">
+            <a:extLst>
+              <a:ext uri="{FF2B5EF4-FFF2-40B4-BE49-F238E27FC236}">
+                <a16:creationId xmlns:a16="http://schemas.microsoft.com/office/drawing/2014/main" id="{68FC8DE3-2FD8-4800-D7C8-71ABD8F187A7}"/>
+              </a:ext>
+            </a:extLst>
+          </p:cNvPr>
+          <p:cNvSpPr>
+            <a:spLocks noGrp="1" noRot="1" noChangeAspect="1"/>
+          </p:cNvSpPr>
+          <p:nvPr>
+            <p:ph type="sldImg"/>
+          </p:nvPr>
+        </p:nvSpPr>
+        <p:spPr/>
+      </p:sp>
+      <p:sp>
+        <p:nvSpPr>
+          <p:cNvPr id="3" name="Notes Placeholder 2">
+            <a:extLst>
+              <a:ext uri="{FF2B5EF4-FFF2-40B4-BE49-F238E27FC236}">
+                <a16:creationId xmlns:a16="http://schemas.microsoft.com/office/drawing/2014/main" id="{BD12C3E8-FABA-83DB-5572-E01F8C246DA1}"/>
+              </a:ext>
+            </a:extLst>
+          </p:cNvPr>
+          <p:cNvSpPr>
+            <a:spLocks noGrp="1"/>
+          </p:cNvSpPr>
+          <p:nvPr>
+            <p:ph type="body" idx="1"/>
+          </p:nvPr>
+        </p:nvSpPr>
+        <p:spPr/>
+        <p:txBody>
+          <a:bodyPr/>
+          <a:lstStyle/>
+          <a:p>
+            <a:endParaRPr lang="en-US" dirty="0"/>
+          </a:p>
+        </p:txBody>
+      </p:sp>
+      <p:sp>
+        <p:nvSpPr>
+          <p:cNvPr id="4" name="Slide Number Placeholder 3">
+            <a:extLst>
+              <a:ext uri="{FF2B5EF4-FFF2-40B4-BE49-F238E27FC236}">
+                <a16:creationId xmlns:a16="http://schemas.microsoft.com/office/drawing/2014/main" id="{BF85BD41-7F1B-3A39-73D8-DD4841255727}"/>
+              </a:ext>
+            </a:extLst>
+          </p:cNvPr>
+          <p:cNvSpPr>
+            <a:spLocks noGrp="1"/>
+          </p:cNvSpPr>
+          <p:nvPr>
+            <p:ph type="sldNum" sz="quarter" idx="5"/>
+          </p:nvPr>
+        </p:nvSpPr>
+        <p:spPr/>
+        <p:txBody>
+          <a:bodyPr/>
+          <a:lstStyle/>
+          <a:p>
+            <a:fld id="{4CF50783-AAED-1941-8BCC-9F6140F0A6B1}" type="slidenum">
+              <a:rPr lang="fr-FR" smtClean="0"/>
+              <a:pPr/>
+              <a:t>28</a:t>
+            </a:fld>
+            <a:endParaRPr lang="fr-FR" dirty="0"/>
+          </a:p>
+        </p:txBody>
+      </p:sp>
+    </p:spTree>
+    <p:extLst>
+      <p:ext uri="{BB962C8B-B14F-4D97-AF65-F5344CB8AC3E}">
+        <p14:creationId xmlns:p14="http://schemas.microsoft.com/office/powerpoint/2010/main" val="2740868036"/>
+      </p:ext>
+    </p:extLst>
+  </p:cSld>
+  <p:clrMapOvr>
+    <a:masterClrMapping/>
+  </p:clrMapOvr>
+</p:notes>
+</file>
+
+<file path=ppt/notesSlides/notesSlide29.xml><?xml version="1.0" encoding="utf-8"?>
+<p:notes xmlns:a="http://schemas.openxmlformats.org/drawingml/2006/main" xmlns:r="http://schemas.openxmlformats.org/officeDocument/2006/relationships" xmlns:p="http://schemas.openxmlformats.org/presentationml/2006/main">
+  <p:cSld>
+    <p:spTree>
+      <p:nvGrpSpPr>
+        <p:cNvPr id="1" name="">
+          <a:extLst>
+            <a:ext uri="{FF2B5EF4-FFF2-40B4-BE49-F238E27FC236}">
+              <a16:creationId xmlns:a16="http://schemas.microsoft.com/office/drawing/2014/main" id="{9CEB1719-C36F-AB38-912D-C19257F35E48}"/>
+            </a:ext>
+          </a:extLst>
+        </p:cNvPr>
+        <p:cNvGrpSpPr/>
+        <p:nvPr/>
+      </p:nvGrpSpPr>
+      <p:grpSpPr>
+        <a:xfrm>
+          <a:off x="0" y="0"/>
+          <a:ext cx="0" cy="0"/>
+          <a:chOff x="0" y="0"/>
+          <a:chExt cx="0" cy="0"/>
+        </a:xfrm>
+      </p:grpSpPr>
+      <p:sp>
+        <p:nvSpPr>
+          <p:cNvPr id="2" name="Slide Image Placeholder 1">
+            <a:extLst>
+              <a:ext uri="{FF2B5EF4-FFF2-40B4-BE49-F238E27FC236}">
+                <a16:creationId xmlns:a16="http://schemas.microsoft.com/office/drawing/2014/main" id="{214BD0B5-EF7A-D259-4656-1B8C48A0C582}"/>
+              </a:ext>
+            </a:extLst>
+          </p:cNvPr>
+          <p:cNvSpPr>
+            <a:spLocks noGrp="1" noRot="1" noChangeAspect="1"/>
+          </p:cNvSpPr>
+          <p:nvPr>
+            <p:ph type="sldImg"/>
+          </p:nvPr>
+        </p:nvSpPr>
+        <p:spPr/>
+      </p:sp>
+      <p:sp>
+        <p:nvSpPr>
+          <p:cNvPr id="3" name="Notes Placeholder 2">
+            <a:extLst>
+              <a:ext uri="{FF2B5EF4-FFF2-40B4-BE49-F238E27FC236}">
+                <a16:creationId xmlns:a16="http://schemas.microsoft.com/office/drawing/2014/main" id="{FD6937C5-AC27-5CC2-37FB-87917E2615AC}"/>
+              </a:ext>
+            </a:extLst>
+          </p:cNvPr>
+          <p:cNvSpPr>
+            <a:spLocks noGrp="1"/>
+          </p:cNvSpPr>
+          <p:nvPr>
+            <p:ph type="body" idx="1"/>
+          </p:nvPr>
+        </p:nvSpPr>
+        <p:spPr/>
+        <p:txBody>
+          <a:bodyPr/>
+          <a:lstStyle/>
+          <a:p>
+            <a:endParaRPr lang="en-US" dirty="0"/>
+          </a:p>
+        </p:txBody>
+      </p:sp>
+      <p:sp>
+        <p:nvSpPr>
+          <p:cNvPr id="4" name="Slide Number Placeholder 3">
+            <a:extLst>
+              <a:ext uri="{FF2B5EF4-FFF2-40B4-BE49-F238E27FC236}">
+                <a16:creationId xmlns:a16="http://schemas.microsoft.com/office/drawing/2014/main" id="{57DF06E8-4B68-E286-D52B-4747FE9DAF9B}"/>
+              </a:ext>
+            </a:extLst>
+          </p:cNvPr>
+          <p:cNvSpPr>
+            <a:spLocks noGrp="1"/>
+          </p:cNvSpPr>
+          <p:nvPr>
+            <p:ph type="sldNum" sz="quarter" idx="5"/>
+          </p:nvPr>
+        </p:nvSpPr>
+        <p:spPr/>
+        <p:txBody>
+          <a:bodyPr/>
+          <a:lstStyle/>
+          <a:p>
+            <a:fld id="{4CF50783-AAED-1941-8BCC-9F6140F0A6B1}" type="slidenum">
+              <a:rPr lang="fr-FR" smtClean="0"/>
+              <a:pPr/>
+              <a:t>29</a:t>
+            </a:fld>
+            <a:endParaRPr lang="fr-FR" dirty="0"/>
+          </a:p>
+        </p:txBody>
+      </p:sp>
+    </p:spTree>
+    <p:extLst>
+      <p:ext uri="{BB962C8B-B14F-4D97-AF65-F5344CB8AC3E}">
+        <p14:creationId xmlns:p14="http://schemas.microsoft.com/office/powerpoint/2010/main" val="2613298649"/>
+      </p:ext>
+    </p:extLst>
+  </p:cSld>
+  <p:clrMapOvr>
+    <a:masterClrMapping/>
+  </p:clrMapOvr>
+</p:notes>
+</file>
+
+<file path=ppt/notesSlides/notesSlide3.xml><?xml version="1.0" encoding="utf-8"?>
+<p:notes xmlns:a="http://schemas.openxmlformats.org/drawingml/2006/main" xmlns:r="http://schemas.openxmlformats.org/officeDocument/2006/relationships" xmlns:p="http://schemas.openxmlformats.org/presentationml/2006/main">
+  <p:cSld>
+    <p:spTree>
+      <p:nvGrpSpPr>
+        <p:cNvPr id="1" name=""/>
+        <p:cNvGrpSpPr/>
+        <p:nvPr/>
+      </p:nvGrpSpPr>
+      <p:grpSpPr>
+        <a:xfrm>
+          <a:off x="0" y="0"/>
+          <a:ext cx="0" cy="0"/>
+          <a:chOff x="0" y="0"/>
+          <a:chExt cx="0" cy="0"/>
+        </a:xfrm>
+      </p:grpSpPr>
+      <p:sp>
+        <p:nvSpPr>
+          <p:cNvPr id="2" name="Slide Image Placeholder 1"/>
+          <p:cNvSpPr>
+            <a:spLocks noGrp="1" noRot="1" noChangeAspect="1"/>
+          </p:cNvSpPr>
+          <p:nvPr>
+            <p:ph type="sldImg"/>
+          </p:nvPr>
+        </p:nvSpPr>
+        <p:spPr/>
+      </p:sp>
+      <p:sp>
+        <p:nvSpPr>
+          <p:cNvPr id="3" name="Notes Placeholder 2"/>
+          <p:cNvSpPr>
+            <a:spLocks noGrp="1"/>
+          </p:cNvSpPr>
+          <p:nvPr>
+            <p:ph type="body" idx="1"/>
+          </p:nvPr>
+        </p:nvSpPr>
+        <p:spPr/>
+        <p:txBody>
+          <a:bodyPr/>
+          <a:lstStyle/>
+          <a:p>
+            <a:endParaRPr lang="en-GB" dirty="0"/>
+          </a:p>
+        </p:txBody>
+      </p:sp>
+      <p:sp>
+        <p:nvSpPr>
+          <p:cNvPr id="4" name="Slide Number Placeholder 3"/>
+          <p:cNvSpPr>
+            <a:spLocks noGrp="1"/>
+          </p:cNvSpPr>
+          <p:nvPr>
+            <p:ph type="sldNum" sz="quarter" idx="5"/>
+          </p:nvPr>
+        </p:nvSpPr>
+        <p:spPr/>
+        <p:txBody>
+          <a:bodyPr/>
+          <a:lstStyle/>
+          <a:p>
+            <a:fld id="{4CF50783-AAED-1941-8BCC-9F6140F0A6B1}" type="slidenum">
+              <a:rPr lang="fr-FR" smtClean="0"/>
+              <a:pPr/>
+              <a:t>3</a:t>
+            </a:fld>
+            <a:endParaRPr lang="fr-FR" dirty="0"/>
+          </a:p>
+        </p:txBody>
+      </p:sp>
+    </p:spTree>
+    <p:extLst>
+      <p:ext uri="{BB962C8B-B14F-4D97-AF65-F5344CB8AC3E}">
+        <p14:creationId xmlns:p14="http://schemas.microsoft.com/office/powerpoint/2010/main" val="766585120"/>
+      </p:ext>
+    </p:extLst>
+  </p:cSld>
+  <p:clrMapOvr>
+    <a:masterClrMapping/>
+  </p:clrMapOvr>
+</p:notes>
+</file>
+
+<file path=ppt/notesSlides/notesSlide30.xml><?xml version="1.0" encoding="utf-8"?>
+<p:notes xmlns:a="http://schemas.openxmlformats.org/drawingml/2006/main" xmlns:r="http://schemas.openxmlformats.org/officeDocument/2006/relationships" xmlns:p="http://schemas.openxmlformats.org/presentationml/2006/main">
+  <p:cSld>
+    <p:spTree>
+      <p:nvGrpSpPr>
+        <p:cNvPr id="1" name="">
+          <a:extLst>
+            <a:ext uri="{FF2B5EF4-FFF2-40B4-BE49-F238E27FC236}">
+              <a16:creationId xmlns:a16="http://schemas.microsoft.com/office/drawing/2014/main" id="{D395C868-E573-8B38-0553-D2C0A3A7C423}"/>
+            </a:ext>
+          </a:extLst>
+        </p:cNvPr>
+        <p:cNvGrpSpPr/>
+        <p:nvPr/>
+      </p:nvGrpSpPr>
+      <p:grpSpPr>
+        <a:xfrm>
+          <a:off x="0" y="0"/>
+          <a:ext cx="0" cy="0"/>
+          <a:chOff x="0" y="0"/>
+          <a:chExt cx="0" cy="0"/>
+        </a:xfrm>
+      </p:grpSpPr>
+      <p:sp>
+        <p:nvSpPr>
+          <p:cNvPr id="2" name="Slide Image Placeholder 1">
+            <a:extLst>
+              <a:ext uri="{FF2B5EF4-FFF2-40B4-BE49-F238E27FC236}">
+                <a16:creationId xmlns:a16="http://schemas.microsoft.com/office/drawing/2014/main" id="{31E0BDB1-B68D-8EC0-76AE-6F720C0D6467}"/>
+              </a:ext>
+            </a:extLst>
+          </p:cNvPr>
+          <p:cNvSpPr>
+            <a:spLocks noGrp="1" noRot="1" noChangeAspect="1"/>
+          </p:cNvSpPr>
+          <p:nvPr>
+            <p:ph type="sldImg"/>
+          </p:nvPr>
+        </p:nvSpPr>
+        <p:spPr/>
+      </p:sp>
+      <p:sp>
+        <p:nvSpPr>
+          <p:cNvPr id="3" name="Notes Placeholder 2">
+            <a:extLst>
+              <a:ext uri="{FF2B5EF4-FFF2-40B4-BE49-F238E27FC236}">
+                <a16:creationId xmlns:a16="http://schemas.microsoft.com/office/drawing/2014/main" id="{B4E801D1-D6A5-3AC7-58E0-6A851A7B89ED}"/>
+              </a:ext>
+            </a:extLst>
+          </p:cNvPr>
+          <p:cNvSpPr>
+            <a:spLocks noGrp="1"/>
+          </p:cNvSpPr>
+          <p:nvPr>
+            <p:ph type="body" idx="1"/>
+          </p:nvPr>
+        </p:nvSpPr>
+        <p:spPr/>
+        <p:txBody>
+          <a:bodyPr/>
+          <a:lstStyle/>
+          <a:p>
+            <a:endParaRPr lang="en-US" dirty="0"/>
+          </a:p>
+        </p:txBody>
+      </p:sp>
+      <p:sp>
+        <p:nvSpPr>
+          <p:cNvPr id="4" name="Slide Number Placeholder 3">
+            <a:extLst>
+              <a:ext uri="{FF2B5EF4-FFF2-40B4-BE49-F238E27FC236}">
+                <a16:creationId xmlns:a16="http://schemas.microsoft.com/office/drawing/2014/main" id="{52780CFA-BDF4-3F42-22D1-E4A96A2D8D3E}"/>
+              </a:ext>
+            </a:extLst>
+          </p:cNvPr>
+          <p:cNvSpPr>
+            <a:spLocks noGrp="1"/>
+          </p:cNvSpPr>
+          <p:nvPr>
+            <p:ph type="sldNum" sz="quarter" idx="5"/>
+          </p:nvPr>
+        </p:nvSpPr>
+        <p:spPr/>
+        <p:txBody>
+          <a:bodyPr/>
+          <a:lstStyle/>
+          <a:p>
+            <a:fld id="{4CF50783-AAED-1941-8BCC-9F6140F0A6B1}" type="slidenum">
+              <a:rPr lang="fr-FR" smtClean="0"/>
+              <a:pPr/>
+              <a:t>30</a:t>
+            </a:fld>
+            <a:endParaRPr lang="fr-FR" dirty="0"/>
+          </a:p>
+        </p:txBody>
+      </p:sp>
+    </p:spTree>
+    <p:extLst>
+      <p:ext uri="{BB962C8B-B14F-4D97-AF65-F5344CB8AC3E}">
+        <p14:creationId xmlns:p14="http://schemas.microsoft.com/office/powerpoint/2010/main" val="842893056"/>
+      </p:ext>
+    </p:extLst>
+  </p:cSld>
+  <p:clrMapOvr>
+    <a:masterClrMapping/>
+  </p:clrMapOvr>
+</p:notes>
+</file>
+
+<file path=ppt/notesSlides/notesSlide31.xml><?xml version="1.0" encoding="utf-8"?>
+<p:notes xmlns:a="http://schemas.openxmlformats.org/drawingml/2006/main" xmlns:r="http://schemas.openxmlformats.org/officeDocument/2006/relationships" xmlns:p="http://schemas.openxmlformats.org/presentationml/2006/main">
+  <p:cSld>
+    <p:spTree>
+      <p:nvGrpSpPr>
+        <p:cNvPr id="1" name="">
+          <a:extLst>
+            <a:ext uri="{FF2B5EF4-FFF2-40B4-BE49-F238E27FC236}">
+              <a16:creationId xmlns:a16="http://schemas.microsoft.com/office/drawing/2014/main" id="{62C6C415-9334-EF28-CE08-1B2AB5211F0D}"/>
+            </a:ext>
+          </a:extLst>
+        </p:cNvPr>
+        <p:cNvGrpSpPr/>
+        <p:nvPr/>
+      </p:nvGrpSpPr>
+      <p:grpSpPr>
+        <a:xfrm>
+          <a:off x="0" y="0"/>
+          <a:ext cx="0" cy="0"/>
+          <a:chOff x="0" y="0"/>
+          <a:chExt cx="0" cy="0"/>
+        </a:xfrm>
+      </p:grpSpPr>
+      <p:sp>
+        <p:nvSpPr>
+          <p:cNvPr id="2" name="Slide Image Placeholder 1">
+            <a:extLst>
+              <a:ext uri="{FF2B5EF4-FFF2-40B4-BE49-F238E27FC236}">
+                <a16:creationId xmlns:a16="http://schemas.microsoft.com/office/drawing/2014/main" id="{C7430DA6-1D4C-F34C-3F27-2E6AC43F9A6B}"/>
+              </a:ext>
+            </a:extLst>
+          </p:cNvPr>
+          <p:cNvSpPr>
+            <a:spLocks noGrp="1" noRot="1" noChangeAspect="1"/>
+          </p:cNvSpPr>
+          <p:nvPr>
+            <p:ph type="sldImg"/>
+          </p:nvPr>
+        </p:nvSpPr>
+        <p:spPr/>
+      </p:sp>
+      <p:sp>
+        <p:nvSpPr>
+          <p:cNvPr id="3" name="Notes Placeholder 2">
+            <a:extLst>
+              <a:ext uri="{FF2B5EF4-FFF2-40B4-BE49-F238E27FC236}">
+                <a16:creationId xmlns:a16="http://schemas.microsoft.com/office/drawing/2014/main" id="{388F456B-4465-60D7-5897-3FB1746B9FA7}"/>
+              </a:ext>
+            </a:extLst>
+          </p:cNvPr>
+          <p:cNvSpPr>
+            <a:spLocks noGrp="1"/>
+          </p:cNvSpPr>
+          <p:nvPr>
+            <p:ph type="body" idx="1"/>
+          </p:nvPr>
+        </p:nvSpPr>
+        <p:spPr/>
+        <p:txBody>
+          <a:bodyPr/>
+          <a:lstStyle/>
+          <a:p>
+            <a:endParaRPr lang="en-US" dirty="0"/>
+          </a:p>
+        </p:txBody>
+      </p:sp>
+      <p:sp>
+        <p:nvSpPr>
+          <p:cNvPr id="4" name="Slide Number Placeholder 3">
+            <a:extLst>
+              <a:ext uri="{FF2B5EF4-FFF2-40B4-BE49-F238E27FC236}">
+                <a16:creationId xmlns:a16="http://schemas.microsoft.com/office/drawing/2014/main" id="{C038AA1F-8293-B612-C26D-38602FC15600}"/>
+              </a:ext>
+            </a:extLst>
+          </p:cNvPr>
+          <p:cNvSpPr>
+            <a:spLocks noGrp="1"/>
+          </p:cNvSpPr>
+          <p:nvPr>
+            <p:ph type="sldNum" sz="quarter" idx="5"/>
+          </p:nvPr>
+        </p:nvSpPr>
+        <p:spPr/>
+        <p:txBody>
+          <a:bodyPr/>
+          <a:lstStyle/>
+          <a:p>
+            <a:fld id="{4CF50783-AAED-1941-8BCC-9F6140F0A6B1}" type="slidenum">
+              <a:rPr lang="fr-FR" smtClean="0"/>
+              <a:pPr/>
+              <a:t>31</a:t>
+            </a:fld>
+            <a:endParaRPr lang="fr-FR" dirty="0"/>
+          </a:p>
+        </p:txBody>
+      </p:sp>
+    </p:spTree>
+    <p:extLst>
+      <p:ext uri="{BB962C8B-B14F-4D97-AF65-F5344CB8AC3E}">
+        <p14:creationId xmlns:p14="http://schemas.microsoft.com/office/powerpoint/2010/main" val="2949415744"/>
+      </p:ext>
+    </p:extLst>
+  </p:cSld>
+  <p:clrMapOvr>
+    <a:masterClrMapping/>
+  </p:clrMapOvr>
+</p:notes>
+</file>
+
+<file path=ppt/notesSlides/notesSlide32.xml><?xml version="1.0" encoding="utf-8"?>
+<p:notes xmlns:a="http://schemas.openxmlformats.org/drawingml/2006/main" xmlns:r="http://schemas.openxmlformats.org/officeDocument/2006/relationships" xmlns:p="http://schemas.openxmlformats.org/presentationml/2006/main">
+  <p:cSld>
+    <p:spTree>
+      <p:nvGrpSpPr>
+        <p:cNvPr id="1" name="">
+          <a:extLst>
+            <a:ext uri="{FF2B5EF4-FFF2-40B4-BE49-F238E27FC236}">
+              <a16:creationId xmlns:a16="http://schemas.microsoft.com/office/drawing/2014/main" id="{6531CCA4-5911-BD84-0A6C-3E4791D7EC5B}"/>
+            </a:ext>
+          </a:extLst>
+        </p:cNvPr>
+        <p:cNvGrpSpPr/>
+        <p:nvPr/>
+      </p:nvGrpSpPr>
+      <p:grpSpPr>
+        <a:xfrm>
+          <a:off x="0" y="0"/>
+          <a:ext cx="0" cy="0"/>
+          <a:chOff x="0" y="0"/>
+          <a:chExt cx="0" cy="0"/>
+        </a:xfrm>
+      </p:grpSpPr>
+      <p:sp>
+        <p:nvSpPr>
+          <p:cNvPr id="2" name="Slide Image Placeholder 1">
+            <a:extLst>
+              <a:ext uri="{FF2B5EF4-FFF2-40B4-BE49-F238E27FC236}">
+                <a16:creationId xmlns:a16="http://schemas.microsoft.com/office/drawing/2014/main" id="{7BE6E7CD-7DBE-6914-D2A5-26F80119130E}"/>
+              </a:ext>
+            </a:extLst>
+          </p:cNvPr>
+          <p:cNvSpPr>
+            <a:spLocks noGrp="1" noRot="1" noChangeAspect="1"/>
+          </p:cNvSpPr>
+          <p:nvPr>
+            <p:ph type="sldImg"/>
+          </p:nvPr>
+        </p:nvSpPr>
+        <p:spPr/>
+      </p:sp>
+      <p:sp>
+        <p:nvSpPr>
+          <p:cNvPr id="3" name="Notes Placeholder 2">
+            <a:extLst>
+              <a:ext uri="{FF2B5EF4-FFF2-40B4-BE49-F238E27FC236}">
+                <a16:creationId xmlns:a16="http://schemas.microsoft.com/office/drawing/2014/main" id="{42FA6603-71CC-3998-D7B1-47AE9919EBDD}"/>
+              </a:ext>
+            </a:extLst>
+          </p:cNvPr>
+          <p:cNvSpPr>
+            <a:spLocks noGrp="1"/>
+          </p:cNvSpPr>
+          <p:nvPr>
+            <p:ph type="body" idx="1"/>
+          </p:nvPr>
+        </p:nvSpPr>
+        <p:spPr/>
+        <p:txBody>
+          <a:bodyPr/>
+          <a:lstStyle/>
+          <a:p>
+            <a:endParaRPr lang="en-US" dirty="0"/>
+          </a:p>
+        </p:txBody>
+      </p:sp>
+      <p:sp>
+        <p:nvSpPr>
+          <p:cNvPr id="4" name="Slide Number Placeholder 3">
+            <a:extLst>
+              <a:ext uri="{FF2B5EF4-FFF2-40B4-BE49-F238E27FC236}">
+                <a16:creationId xmlns:a16="http://schemas.microsoft.com/office/drawing/2014/main" id="{7159B170-07CC-F7CC-71B2-F789A65CFC75}"/>
+              </a:ext>
+            </a:extLst>
+          </p:cNvPr>
+          <p:cNvSpPr>
+            <a:spLocks noGrp="1"/>
+          </p:cNvSpPr>
+          <p:nvPr>
+            <p:ph type="sldNum" sz="quarter" idx="5"/>
+          </p:nvPr>
+        </p:nvSpPr>
+        <p:spPr/>
+        <p:txBody>
+          <a:bodyPr/>
+          <a:lstStyle/>
+          <a:p>
+            <a:fld id="{4CF50783-AAED-1941-8BCC-9F6140F0A6B1}" type="slidenum">
+              <a:rPr lang="fr-FR" smtClean="0"/>
+              <a:pPr/>
+              <a:t>32</a:t>
+            </a:fld>
+            <a:endParaRPr lang="fr-FR" dirty="0"/>
+          </a:p>
+        </p:txBody>
+      </p:sp>
+    </p:spTree>
+    <p:extLst>
+      <p:ext uri="{BB962C8B-B14F-4D97-AF65-F5344CB8AC3E}">
+        <p14:creationId xmlns:p14="http://schemas.microsoft.com/office/powerpoint/2010/main" val="2772309587"/>
+      </p:ext>
+    </p:extLst>
+  </p:cSld>
+  <p:clrMapOvr>
+    <a:masterClrMapping/>
+  </p:clrMapOvr>
+</p:notes>
+</file>
+
+<file path=ppt/notesSlides/notesSlide33.xml><?xml version="1.0" encoding="utf-8"?>
 <p:notes xmlns:a="http://schemas.openxmlformats.org/drawingml/2006/main" xmlns:r="http://schemas.openxmlformats.org/officeDocument/2006/relationships" xmlns:p="http://schemas.openxmlformats.org/presentationml/2006/main">
   <p:cSld>
     <p:spTree>
@@ -2558,7 +3513,7 @@
             <a:fld id="{4CF50783-AAED-1941-8BCC-9F6140F0A6B1}" type="slidenum">
               <a:rPr lang="fr-FR" smtClean="0"/>
               <a:pPr/>
-              <a:t>25</a:t>
+              <a:t>33</a:t>
             </a:fld>
             <a:endParaRPr lang="fr-FR" dirty="0"/>
           </a:p>
@@ -2577,7 +3532,7 @@
 </p:notes>
 </file>
 
-<file path=ppt/notesSlides/notesSlide26.xml><?xml version="1.0" encoding="utf-8"?>
+<file path=ppt/notesSlides/notesSlide34.xml><?xml version="1.0" encoding="utf-8"?>
 <p:notes xmlns:a="http://schemas.openxmlformats.org/drawingml/2006/main" xmlns:r="http://schemas.openxmlformats.org/officeDocument/2006/relationships" xmlns:p="http://schemas.openxmlformats.org/presentationml/2006/main">
   <p:cSld>
     <p:spTree>
@@ -2667,7 +3622,7 @@
             <a:fld id="{4CF50783-AAED-1941-8BCC-9F6140F0A6B1}" type="slidenum">
               <a:rPr lang="fr-FR" smtClean="0"/>
               <a:pPr/>
-              <a:t>26</a:t>
+              <a:t>34</a:t>
             </a:fld>
             <a:endParaRPr lang="fr-FR" dirty="0"/>
           </a:p>
@@ -2686,7 +3641,7 @@
 </p:notes>
 </file>
 
-<file path=ppt/notesSlides/notesSlide27.xml><?xml version="1.0" encoding="utf-8"?>
+<file path=ppt/notesSlides/notesSlide35.xml><?xml version="1.0" encoding="utf-8"?>
 <p:notes xmlns:a="http://schemas.openxmlformats.org/drawingml/2006/main" xmlns:r="http://schemas.openxmlformats.org/officeDocument/2006/relationships" xmlns:p="http://schemas.openxmlformats.org/presentationml/2006/main">
   <p:cSld>
     <p:spTree>
@@ -2756,7 +3711,7 @@
             <a:fld id="{4CF50783-AAED-1941-8BCC-9F6140F0A6B1}" type="slidenum">
               <a:rPr lang="fr-FR" smtClean="0"/>
               <a:pPr/>
-              <a:t>27</a:t>
+              <a:t>35</a:t>
             </a:fld>
             <a:endParaRPr lang="fr-FR" dirty="0"/>
           </a:p>
@@ -2766,91 +3721,6 @@
     <p:extLst>
       <p:ext uri="{BB962C8B-B14F-4D97-AF65-F5344CB8AC3E}">
         <p14:creationId xmlns:p14="http://schemas.microsoft.com/office/powerpoint/2010/main" val="212690647"/>
-      </p:ext>
-    </p:extLst>
-  </p:cSld>
-  <p:clrMapOvr>
-    <a:masterClrMapping/>
-  </p:clrMapOvr>
-</p:notes>
-</file>
-
-<file path=ppt/notesSlides/notesSlide3.xml><?xml version="1.0" encoding="utf-8"?>
-<p:notes xmlns:a="http://schemas.openxmlformats.org/drawingml/2006/main" xmlns:r="http://schemas.openxmlformats.org/officeDocument/2006/relationships" xmlns:p="http://schemas.openxmlformats.org/presentationml/2006/main">
-  <p:cSld>
-    <p:spTree>
-      <p:nvGrpSpPr>
-        <p:cNvPr id="1" name=""/>
-        <p:cNvGrpSpPr/>
-        <p:nvPr/>
-      </p:nvGrpSpPr>
-      <p:grpSpPr>
-        <a:xfrm>
-          <a:off x="0" y="0"/>
-          <a:ext cx="0" cy="0"/>
-          <a:chOff x="0" y="0"/>
-          <a:chExt cx="0" cy="0"/>
-        </a:xfrm>
-      </p:grpSpPr>
-      <p:sp>
-        <p:nvSpPr>
-          <p:cNvPr id="2" name="Slide Image Placeholder 1"/>
-          <p:cNvSpPr>
-            <a:spLocks noGrp="1" noRot="1" noChangeAspect="1"/>
-          </p:cNvSpPr>
-          <p:nvPr>
-            <p:ph type="sldImg"/>
-          </p:nvPr>
-        </p:nvSpPr>
-        <p:spPr/>
-      </p:sp>
-      <p:sp>
-        <p:nvSpPr>
-          <p:cNvPr id="3" name="Notes Placeholder 2"/>
-          <p:cNvSpPr>
-            <a:spLocks noGrp="1"/>
-          </p:cNvSpPr>
-          <p:nvPr>
-            <p:ph type="body" idx="1"/>
-          </p:nvPr>
-        </p:nvSpPr>
-        <p:spPr/>
-        <p:txBody>
-          <a:bodyPr/>
-          <a:lstStyle/>
-          <a:p>
-            <a:endParaRPr lang="en-GB" dirty="0"/>
-          </a:p>
-        </p:txBody>
-      </p:sp>
-      <p:sp>
-        <p:nvSpPr>
-          <p:cNvPr id="4" name="Slide Number Placeholder 3"/>
-          <p:cNvSpPr>
-            <a:spLocks noGrp="1"/>
-          </p:cNvSpPr>
-          <p:nvPr>
-            <p:ph type="sldNum" sz="quarter" idx="5"/>
-          </p:nvPr>
-        </p:nvSpPr>
-        <p:spPr/>
-        <p:txBody>
-          <a:bodyPr/>
-          <a:lstStyle/>
-          <a:p>
-            <a:fld id="{4CF50783-AAED-1941-8BCC-9F6140F0A6B1}" type="slidenum">
-              <a:rPr lang="fr-FR" smtClean="0"/>
-              <a:pPr/>
-              <a:t>3</a:t>
-            </a:fld>
-            <a:endParaRPr lang="fr-FR" dirty="0"/>
-          </a:p>
-        </p:txBody>
-      </p:sp>
-    </p:spTree>
-    <p:extLst>
-      <p:ext uri="{BB962C8B-B14F-4D97-AF65-F5344CB8AC3E}">
-        <p14:creationId xmlns:p14="http://schemas.microsoft.com/office/powerpoint/2010/main" val="766585120"/>
       </p:ext>
     </p:extLst>
   </p:cSld>
@@ -13218,8 +14088,8 @@
           <a:chExt cx="0" cy="0"/>
         </a:xfrm>
       </p:grpSpPr>
-      <mc:AlternateContent xmlns:mc="http://schemas.openxmlformats.org/markup-compatibility/2006" xmlns:a14="http://schemas.microsoft.com/office/drawing/2010/main">
-        <mc:Choice Requires="a14">
+      <mc:AlternateContent xmlns:mc="http://schemas.openxmlformats.org/markup-compatibility/2006">
+        <mc:Choice xmlns:a14="http://schemas.microsoft.com/office/drawing/2010/main" Requires="a14">
           <p:sp>
             <p:nvSpPr>
               <p:cNvPr id="9" name="Content Placeholder 8">
@@ -13243,6 +14113,12 @@
               </a:bodyPr>
               <a:lstStyle/>
               <a:p>
+                <a:r>
+                  <a:rPr lang="en-US" dirty="0">
+                    <a:latin typeface="+mj-lt"/>
+                  </a:rPr>
+                  <a:t>(COINs) </a:t>
+                </a:r>
                 <a:r>
                   <a:rPr lang="en-US" i="1" dirty="0">
                     <a:latin typeface="+mj-lt"/>
@@ -14482,7 +15358,7 @@
             </p:txBody>
           </p:sp>
         </mc:Choice>
-        <mc:Fallback xmlns="">
+        <mc:Fallback>
           <p:sp>
             <p:nvSpPr>
               <p:cNvPr id="9" name="Content Placeholder 8">
@@ -22150,27 +23026,6 @@
               <a:t>Larger non-standard public knowledge bases</a:t>
             </a:r>
           </a:p>
-          <a:p>
-            <a:r>
-              <a:rPr lang="en-US" dirty="0">
-                <a:latin typeface="+mj-lt"/>
-              </a:rPr>
-              <a:t>Code is publicly available:</a:t>
-            </a:r>
-          </a:p>
-          <a:p>
-            <a:pPr lvl="1"/>
-            <a:r>
-              <a:rPr lang="en-US" dirty="0">
-                <a:latin typeface="+mj-lt"/>
-                <a:hlinkClick r:id="rId3"/>
-              </a:rPr>
-              <a:t>github.com/LIONS-EPFL/coins-ict-innovations-2025</a:t>
-            </a:r>
-            <a:endParaRPr lang="en-GB" dirty="0">
-              <a:latin typeface="+mj-lt"/>
-            </a:endParaRPr>
-          </a:p>
         </p:txBody>
       </p:sp>
     </p:spTree>
@@ -22629,110 +23484,6 @@
                                           <p:spTgt spid="3">
                                             <p:txEl>
                                               <p:pRg st="7" end="7"/>
-                                            </p:txEl>
-                                          </p:spTgt>
-                                        </p:tgtEl>
-                                      </p:cBhvr>
-                                    </p:animEffect>
-                                  </p:childTnLst>
-                                </p:cTn>
-                              </p:par>
-                            </p:childTnLst>
-                          </p:cTn>
-                        </p:par>
-                      </p:childTnLst>
-                    </p:cTn>
-                  </p:par>
-                  <p:par>
-                    <p:cTn id="39" fill="hold">
-                      <p:stCondLst>
-                        <p:cond delay="indefinite"/>
-                      </p:stCondLst>
-                      <p:childTnLst>
-                        <p:par>
-                          <p:cTn id="40" fill="hold">
-                            <p:stCondLst>
-                              <p:cond delay="0"/>
-                            </p:stCondLst>
-                            <p:childTnLst>
-                              <p:par>
-                                <p:cTn id="41" presetID="14" presetClass="entr" presetSubtype="10" fill="hold" nodeType="clickEffect">
-                                  <p:stCondLst>
-                                    <p:cond delay="0"/>
-                                  </p:stCondLst>
-                                  <p:childTnLst>
-                                    <p:set>
-                                      <p:cBhvr>
-                                        <p:cTn id="42" dur="1" fill="hold">
-                                          <p:stCondLst>
-                                            <p:cond delay="0"/>
-                                          </p:stCondLst>
-                                        </p:cTn>
-                                        <p:tgtEl>
-                                          <p:spTgt spid="3">
-                                            <p:txEl>
-                                              <p:pRg st="8" end="8"/>
-                                            </p:txEl>
-                                          </p:spTgt>
-                                        </p:tgtEl>
-                                        <p:attrNameLst>
-                                          <p:attrName>style.visibility</p:attrName>
-                                        </p:attrNameLst>
-                                      </p:cBhvr>
-                                      <p:to>
-                                        <p:strVal val="visible"/>
-                                      </p:to>
-                                    </p:set>
-                                    <p:animEffect transition="in" filter="randombar(horizontal)">
-                                      <p:cBhvr>
-                                        <p:cTn id="43" dur="500"/>
-                                        <p:tgtEl>
-                                          <p:spTgt spid="3">
-                                            <p:txEl>
-                                              <p:pRg st="8" end="8"/>
-                                            </p:txEl>
-                                          </p:spTgt>
-                                        </p:tgtEl>
-                                      </p:cBhvr>
-                                    </p:animEffect>
-                                  </p:childTnLst>
-                                </p:cTn>
-                              </p:par>
-                              <p:par>
-                                <p:cTn id="44" presetID="14" presetClass="entr" presetSubtype="10" fill="hold" nodeType="withEffect">
-                                  <p:stCondLst>
-                                    <p:cond delay="0"/>
-                                  </p:stCondLst>
-                                  <p:childTnLst>
-                                    <p:set>
-                                      <p:cBhvr>
-                                        <p:cTn id="45" dur="1" fill="hold">
-                                          <p:stCondLst>
-                                            <p:cond delay="0"/>
-                                          </p:stCondLst>
-                                        </p:cTn>
-                                        <p:tgtEl>
-                                          <p:spTgt spid="3">
-                                            <p:txEl>
-                                              <p:pRg st="9" end="9"/>
-                                            </p:txEl>
-                                          </p:spTgt>
-                                        </p:tgtEl>
-                                        <p:attrNameLst>
-                                          <p:attrName>style.visibility</p:attrName>
-                                        </p:attrNameLst>
-                                      </p:cBhvr>
-                                      <p:to>
-                                        <p:strVal val="visible"/>
-                                      </p:to>
-                                    </p:set>
-                                    <p:animEffect transition="in" filter="randombar(horizontal)">
-                                      <p:cBhvr>
-                                        <p:cTn id="46" dur="500"/>
-                                        <p:tgtEl>
-                                          <p:spTgt spid="3">
-                                            <p:txEl>
-                                              <p:pRg st="9" end="9"/>
                                             </p:txEl>
                                           </p:spTgt>
                                         </p:tgtEl>
@@ -22780,6 +23531,7400 @@
         <p:cNvPr id="1" name="">
           <a:extLst>
             <a:ext uri="{FF2B5EF4-FFF2-40B4-BE49-F238E27FC236}">
+              <a16:creationId xmlns:a16="http://schemas.microsoft.com/office/drawing/2014/main" id="{A8002073-8438-A969-719E-055D70512F76}"/>
+            </a:ext>
+          </a:extLst>
+        </p:cNvPr>
+        <p:cNvGrpSpPr/>
+        <p:nvPr/>
+      </p:nvGrpSpPr>
+      <p:grpSpPr>
+        <a:xfrm>
+          <a:off x="0" y="0"/>
+          <a:ext cx="0" cy="0"/>
+          <a:chOff x="0" y="0"/>
+          <a:chExt cx="0" cy="0"/>
+        </a:xfrm>
+      </p:grpSpPr>
+      <p:sp>
+        <p:nvSpPr>
+          <p:cNvPr id="8" name="Title 7">
+            <a:extLst>
+              <a:ext uri="{FF2B5EF4-FFF2-40B4-BE49-F238E27FC236}">
+                <a16:creationId xmlns:a16="http://schemas.microsoft.com/office/drawing/2014/main" id="{4666B6DA-7DAD-8E37-207B-AECF04FF129C}"/>
+              </a:ext>
+            </a:extLst>
+          </p:cNvPr>
+          <p:cNvSpPr>
+            <a:spLocks noGrp="1"/>
+          </p:cNvSpPr>
+          <p:nvPr>
+            <p:ph type="title"/>
+          </p:nvPr>
+        </p:nvSpPr>
+        <p:spPr>
+          <a:xfrm>
+            <a:off x="904875" y="131032"/>
+            <a:ext cx="7726363" cy="1072753"/>
+          </a:xfrm>
+        </p:spPr>
+        <p:txBody>
+          <a:bodyPr>
+            <a:normAutofit/>
+          </a:bodyPr>
+          <a:lstStyle/>
+          <a:p>
+            <a:r>
+              <a:rPr lang="en-US" dirty="0"/>
+              <a:t>*3.1   Distributed extension</a:t>
+            </a:r>
+            <a:br>
+              <a:rPr lang="en-US" dirty="0"/>
+            </a:br>
+            <a:r>
+              <a:rPr lang="en-US" sz="2400" b="0" i="1" dirty="0"/>
+              <a:t>Idea</a:t>
+            </a:r>
+            <a:endParaRPr lang="en-GB" sz="2400" b="0" i="1" dirty="0"/>
+          </a:p>
+        </p:txBody>
+      </p:sp>
+      <p:sp>
+        <p:nvSpPr>
+          <p:cNvPr id="5" name="Date Placeholder 4">
+            <a:extLst>
+              <a:ext uri="{FF2B5EF4-FFF2-40B4-BE49-F238E27FC236}">
+                <a16:creationId xmlns:a16="http://schemas.microsoft.com/office/drawing/2014/main" id="{3F097AF7-90DC-8B8F-F25C-9807AB709A1F}"/>
+              </a:ext>
+            </a:extLst>
+          </p:cNvPr>
+          <p:cNvSpPr>
+            <a:spLocks noGrp="1"/>
+          </p:cNvSpPr>
+          <p:nvPr>
+            <p:ph type="dt" sz="half" idx="10"/>
+          </p:nvPr>
+        </p:nvSpPr>
+        <p:spPr/>
+        <p:txBody>
+          <a:bodyPr/>
+          <a:lstStyle/>
+          <a:p>
+            <a:r>
+              <a:rPr lang="en-US" sz="600" dirty="0">
+                <a:latin typeface="+mj-lt"/>
+              </a:rPr>
+              <a:t>EDIC PhD Private Defense / Scalable Methods for Knowledge Graph Reasoning and Generation</a:t>
+            </a:r>
+          </a:p>
+        </p:txBody>
+      </p:sp>
+      <p:sp>
+        <p:nvSpPr>
+          <p:cNvPr id="6" name="Footer Placeholder 5">
+            <a:extLst>
+              <a:ext uri="{FF2B5EF4-FFF2-40B4-BE49-F238E27FC236}">
+                <a16:creationId xmlns:a16="http://schemas.microsoft.com/office/drawing/2014/main" id="{34BA05B8-029C-5548-06CF-4C7FBAAFF643}"/>
+              </a:ext>
+            </a:extLst>
+          </p:cNvPr>
+          <p:cNvSpPr>
+            <a:spLocks noGrp="1"/>
+          </p:cNvSpPr>
+          <p:nvPr>
+            <p:ph type="ftr" sz="quarter" idx="11"/>
+          </p:nvPr>
+        </p:nvSpPr>
+        <p:spPr/>
+        <p:txBody>
+          <a:bodyPr/>
+          <a:lstStyle/>
+          <a:p>
+            <a:r>
+              <a:rPr lang="fr-FR" dirty="0">
+                <a:latin typeface="+mj-lt"/>
+              </a:rPr>
+              <a:t>Andrej Janchevski, EPFL STI IEM LIONS, Lausanne, </a:t>
+            </a:r>
+            <a:r>
+              <a:rPr lang="fr-FR" dirty="0" err="1">
+                <a:latin typeface="+mj-lt"/>
+              </a:rPr>
+              <a:t>Switzerland</a:t>
+            </a:r>
+            <a:r>
+              <a:rPr lang="fr-FR" dirty="0">
+                <a:latin typeface="+mj-lt"/>
+              </a:rPr>
+              <a:t> </a:t>
+            </a:r>
+          </a:p>
+        </p:txBody>
+      </p:sp>
+      <p:sp>
+        <p:nvSpPr>
+          <p:cNvPr id="7" name="Slide Number Placeholder 6">
+            <a:extLst>
+              <a:ext uri="{FF2B5EF4-FFF2-40B4-BE49-F238E27FC236}">
+                <a16:creationId xmlns:a16="http://schemas.microsoft.com/office/drawing/2014/main" id="{240B5D2A-46C3-1163-BB7A-20EB1BE42B6D}"/>
+              </a:ext>
+            </a:extLst>
+          </p:cNvPr>
+          <p:cNvSpPr>
+            <a:spLocks noGrp="1"/>
+          </p:cNvSpPr>
+          <p:nvPr>
+            <p:ph type="sldNum" sz="quarter" idx="12"/>
+          </p:nvPr>
+        </p:nvSpPr>
+        <p:spPr/>
+        <p:txBody>
+          <a:bodyPr/>
+          <a:lstStyle/>
+          <a:p>
+            <a:fld id="{E1E1CD7C-2161-7D43-862E-CE4C333CD873}" type="slidenum">
+              <a:rPr lang="fr-FR" smtClean="0"/>
+              <a:pPr/>
+              <a:t>25</a:t>
+            </a:fld>
+            <a:endParaRPr lang="fr-FR" dirty="0"/>
+          </a:p>
+        </p:txBody>
+      </p:sp>
+      <mc:AlternateContent xmlns:mc="http://schemas.openxmlformats.org/markup-compatibility/2006">
+        <mc:Choice xmlns:a14="http://schemas.microsoft.com/office/drawing/2010/main" Requires="a14">
+          <p:sp>
+            <p:nvSpPr>
+              <p:cNvPr id="3" name="Content Placeholder 2">
+                <a:extLst>
+                  <a:ext uri="{FF2B5EF4-FFF2-40B4-BE49-F238E27FC236}">
+                    <a16:creationId xmlns:a16="http://schemas.microsoft.com/office/drawing/2014/main" id="{1027F43F-5DB2-9221-A682-466FFB71E2CE}"/>
+                  </a:ext>
+                </a:extLst>
+              </p:cNvPr>
+              <p:cNvSpPr>
+                <a:spLocks noGrp="1"/>
+              </p:cNvSpPr>
+              <p:nvPr>
+                <p:ph idx="1"/>
+              </p:nvPr>
+            </p:nvSpPr>
+            <p:spPr/>
+            <p:txBody>
+              <a:bodyPr>
+                <a:normAutofit/>
+              </a:bodyPr>
+              <a:lstStyle/>
+              <a:p>
+                <a:r>
+                  <a:rPr lang="en-US" dirty="0">
+                    <a:latin typeface="+mj-lt"/>
+                  </a:rPr>
+                  <a:t>Scalability still possible beyond a single machine</a:t>
+                </a:r>
+              </a:p>
+              <a:p>
+                <a:r>
+                  <a:rPr lang="en-US" dirty="0">
+                    <a:latin typeface="+mj-lt"/>
+                  </a:rPr>
+                  <a:t>Previous work - data &amp; model parallelism scaling only linearly with compute</a:t>
+                </a:r>
+              </a:p>
+              <a:p>
+                <a:r>
+                  <a:rPr lang="en-US" dirty="0">
+                    <a:latin typeface="+mj-lt"/>
+                  </a:rPr>
+                  <a:t>Distributed COINs</a:t>
+                </a:r>
+              </a:p>
+              <a:p>
+                <a:pPr lvl="1"/>
+                <a:r>
+                  <a:rPr lang="en-US" dirty="0">
+                    <a:latin typeface="+mj-lt"/>
+                  </a:rPr>
+                  <a:t>Partial model parallelism for additional scalability benefits</a:t>
+                </a:r>
+              </a:p>
+              <a:p>
+                <a:pPr lvl="1"/>
+                <a:r>
+                  <a:rPr lang="en-US" dirty="0">
+                    <a:latin typeface="+mj-lt"/>
+                  </a:rPr>
+                  <a:t>Step II sub-models are completely independent, but must wait for Step I results</a:t>
+                </a:r>
+              </a:p>
+              <a:p>
+                <a:pPr lvl="1"/>
+                <a:r>
+                  <a:rPr lang="en-US" dirty="0">
+                    <a:latin typeface="+mj-lt"/>
+                  </a:rPr>
+                  <a:t>Assumption: given set of machines </a:t>
+                </a:r>
+                <a14:m>
+                  <m:oMath xmlns:m="http://schemas.openxmlformats.org/officeDocument/2006/math">
+                    <m:r>
+                      <a:rPr lang="en-US" b="0" i="1" smtClean="0">
+                        <a:latin typeface="Cambria Math" panose="02040503050406030204" pitchFamily="18" charset="0"/>
+                      </a:rPr>
+                      <m:t>𝑈</m:t>
+                    </m:r>
+                  </m:oMath>
+                </a14:m>
+                <a:endParaRPr lang="en-US" dirty="0">
+                  <a:latin typeface="+mj-lt"/>
+                </a:endParaRPr>
+              </a:p>
+              <a:p>
+                <a:pPr lvl="1"/>
+                <a:r>
+                  <a:rPr lang="en-US" dirty="0">
+                    <a:latin typeface="+mj-lt"/>
+                  </a:rPr>
+                  <a:t>Assign Step I and aggregation steps to a </a:t>
+                </a:r>
+                <a:r>
+                  <a:rPr lang="en-US" i="1" dirty="0">
+                    <a:latin typeface="+mj-lt"/>
+                  </a:rPr>
+                  <a:t>leader</a:t>
+                </a:r>
+                <a:r>
+                  <a:rPr lang="en-US" dirty="0">
+                    <a:latin typeface="+mj-lt"/>
+                  </a:rPr>
+                  <a:t> node </a:t>
+                </a:r>
+                <a14:m>
+                  <m:oMath xmlns:m="http://schemas.openxmlformats.org/officeDocument/2006/math">
+                    <m:sSup>
+                      <m:sSupPr>
+                        <m:ctrlPr>
+                          <a:rPr lang="en-US" b="0" i="1" smtClean="0">
+                            <a:latin typeface="Cambria Math" panose="02040503050406030204" pitchFamily="18" charset="0"/>
+                          </a:rPr>
+                        </m:ctrlPr>
+                      </m:sSupPr>
+                      <m:e>
+                        <m:r>
+                          <a:rPr lang="en-US">
+                            <a:latin typeface="Cambria Math" panose="02040503050406030204" pitchFamily="18" charset="0"/>
+                          </a:rPr>
+                          <m:t>𝑢</m:t>
+                        </m:r>
+                      </m:e>
+                      <m:sup>
+                        <m:r>
+                          <a:rPr lang="en-US" b="0" i="1" smtClean="0">
+                            <a:latin typeface="Cambria Math" panose="02040503050406030204" pitchFamily="18" charset="0"/>
+                          </a:rPr>
+                          <m:t>∗</m:t>
+                        </m:r>
+                      </m:sup>
+                    </m:sSup>
+                    <m:r>
+                      <a:rPr lang="en-US" b="0" i="1" smtClean="0">
+                        <a:latin typeface="Cambria Math" panose="02040503050406030204" pitchFamily="18" charset="0"/>
+                      </a:rPr>
+                      <m:t>∈</m:t>
+                    </m:r>
+                    <m:r>
+                      <a:rPr lang="en-US" i="1">
+                        <a:latin typeface="Cambria Math" panose="02040503050406030204" pitchFamily="18" charset="0"/>
+                      </a:rPr>
+                      <m:t>𝑈</m:t>
+                    </m:r>
+                  </m:oMath>
+                </a14:m>
+                <a:endParaRPr lang="en-US" dirty="0">
+                  <a:latin typeface="+mj-lt"/>
+                </a:endParaRPr>
+              </a:p>
+              <a:p>
+                <a:pPr lvl="1"/>
+                <a:r>
+                  <a:rPr lang="en-US" dirty="0">
+                    <a:latin typeface="+mj-lt"/>
+                  </a:rPr>
+                  <a:t>Pre-compute optimal </a:t>
+                </a:r>
+                <a:r>
+                  <a:rPr lang="en-US" i="1" dirty="0">
+                    <a:latin typeface="+mj-lt"/>
+                  </a:rPr>
+                  <a:t>follower</a:t>
+                </a:r>
+                <a:r>
+                  <a:rPr lang="en-US" dirty="0">
+                    <a:latin typeface="+mj-lt"/>
+                  </a:rPr>
+                  <a:t> machine assignment for Step II models</a:t>
+                </a:r>
+              </a:p>
+              <a:p>
+                <a:pPr lvl="1"/>
+                <a:r>
+                  <a:rPr lang="en-US" dirty="0">
+                    <a:latin typeface="+mj-lt"/>
+                  </a:rPr>
+                  <a:t>Leader async sends Step II input, sync waits for Step II output</a:t>
+                </a:r>
+              </a:p>
+            </p:txBody>
+          </p:sp>
+        </mc:Choice>
+        <mc:Fallback>
+          <p:sp>
+            <p:nvSpPr>
+              <p:cNvPr id="3" name="Content Placeholder 2">
+                <a:extLst>
+                  <a:ext uri="{FF2B5EF4-FFF2-40B4-BE49-F238E27FC236}">
+                    <a16:creationId xmlns:a16="http://schemas.microsoft.com/office/drawing/2014/main" id="{1027F43F-5DB2-9221-A682-466FFB71E2CE}"/>
+                  </a:ext>
+                </a:extLst>
+              </p:cNvPr>
+              <p:cNvSpPr>
+                <a:spLocks noGrp="1" noRot="1" noChangeAspect="1" noMove="1" noResize="1" noEditPoints="1" noAdjustHandles="1" noChangeArrowheads="1" noChangeShapeType="1" noTextEdit="1"/>
+              </p:cNvSpPr>
+              <p:nvPr>
+                <p:ph idx="1"/>
+              </p:nvPr>
+            </p:nvSpPr>
+            <p:spPr>
+              <a:blipFill>
+                <a:blip r:embed="rId3"/>
+                <a:stretch>
+                  <a:fillRect t="-1802"/>
+                </a:stretch>
+              </a:blipFill>
+            </p:spPr>
+            <p:txBody>
+              <a:bodyPr/>
+              <a:lstStyle/>
+              <a:p>
+                <a:r>
+                  <a:rPr lang="en-GB">
+                    <a:noFill/>
+                  </a:rPr>
+                  <a:t> </a:t>
+                </a:r>
+              </a:p>
+            </p:txBody>
+          </p:sp>
+        </mc:Fallback>
+      </mc:AlternateContent>
+    </p:spTree>
+    <p:extLst>
+      <p:ext uri="{BB962C8B-B14F-4D97-AF65-F5344CB8AC3E}">
+        <p14:creationId xmlns:p14="http://schemas.microsoft.com/office/powerpoint/2010/main" val="1018666199"/>
+      </p:ext>
+    </p:extLst>
+  </p:cSld>
+  <p:clrMapOvr>
+    <a:masterClrMapping/>
+  </p:clrMapOvr>
+  <p:timing>
+    <p:tnLst>
+      <p:par>
+        <p:cTn id="1" dur="indefinite" restart="never" nodeType="tmRoot">
+          <p:childTnLst>
+            <p:seq concurrent="1" nextAc="seek">
+              <p:cTn id="2" dur="indefinite" nodeType="mainSeq">
+                <p:childTnLst>
+                  <p:par>
+                    <p:cTn id="3" fill="hold">
+                      <p:stCondLst>
+                        <p:cond delay="indefinite"/>
+                      </p:stCondLst>
+                      <p:childTnLst>
+                        <p:par>
+                          <p:cTn id="4" fill="hold">
+                            <p:stCondLst>
+                              <p:cond delay="0"/>
+                            </p:stCondLst>
+                            <p:childTnLst>
+                              <p:par>
+                                <p:cTn id="5" presetID="14" presetClass="entr" presetSubtype="10" fill="hold" nodeType="clickEffect">
+                                  <p:stCondLst>
+                                    <p:cond delay="0"/>
+                                  </p:stCondLst>
+                                  <p:childTnLst>
+                                    <p:set>
+                                      <p:cBhvr>
+                                        <p:cTn id="6" dur="1" fill="hold">
+                                          <p:stCondLst>
+                                            <p:cond delay="0"/>
+                                          </p:stCondLst>
+                                        </p:cTn>
+                                        <p:tgtEl>
+                                          <p:spTgt spid="3">
+                                            <p:txEl>
+                                              <p:pRg st="0" end="0"/>
+                                            </p:txEl>
+                                          </p:spTgt>
+                                        </p:tgtEl>
+                                        <p:attrNameLst>
+                                          <p:attrName>style.visibility</p:attrName>
+                                        </p:attrNameLst>
+                                      </p:cBhvr>
+                                      <p:to>
+                                        <p:strVal val="visible"/>
+                                      </p:to>
+                                    </p:set>
+                                    <p:animEffect transition="in" filter="randombar(horizontal)">
+                                      <p:cBhvr>
+                                        <p:cTn id="7" dur="500"/>
+                                        <p:tgtEl>
+                                          <p:spTgt spid="3">
+                                            <p:txEl>
+                                              <p:pRg st="0" end="0"/>
+                                            </p:txEl>
+                                          </p:spTgt>
+                                        </p:tgtEl>
+                                      </p:cBhvr>
+                                    </p:animEffect>
+                                  </p:childTnLst>
+                                </p:cTn>
+                              </p:par>
+                            </p:childTnLst>
+                          </p:cTn>
+                        </p:par>
+                      </p:childTnLst>
+                    </p:cTn>
+                  </p:par>
+                  <p:par>
+                    <p:cTn id="8" fill="hold">
+                      <p:stCondLst>
+                        <p:cond delay="indefinite"/>
+                      </p:stCondLst>
+                      <p:childTnLst>
+                        <p:par>
+                          <p:cTn id="9" fill="hold">
+                            <p:stCondLst>
+                              <p:cond delay="0"/>
+                            </p:stCondLst>
+                            <p:childTnLst>
+                              <p:par>
+                                <p:cTn id="10" presetID="14" presetClass="entr" presetSubtype="10" fill="hold" nodeType="clickEffect">
+                                  <p:stCondLst>
+                                    <p:cond delay="0"/>
+                                  </p:stCondLst>
+                                  <p:childTnLst>
+                                    <p:set>
+                                      <p:cBhvr>
+                                        <p:cTn id="11" dur="1" fill="hold">
+                                          <p:stCondLst>
+                                            <p:cond delay="0"/>
+                                          </p:stCondLst>
+                                        </p:cTn>
+                                        <p:tgtEl>
+                                          <p:spTgt spid="3">
+                                            <p:txEl>
+                                              <p:pRg st="1" end="1"/>
+                                            </p:txEl>
+                                          </p:spTgt>
+                                        </p:tgtEl>
+                                        <p:attrNameLst>
+                                          <p:attrName>style.visibility</p:attrName>
+                                        </p:attrNameLst>
+                                      </p:cBhvr>
+                                      <p:to>
+                                        <p:strVal val="visible"/>
+                                      </p:to>
+                                    </p:set>
+                                    <p:animEffect transition="in" filter="randombar(horizontal)">
+                                      <p:cBhvr>
+                                        <p:cTn id="12" dur="500"/>
+                                        <p:tgtEl>
+                                          <p:spTgt spid="3">
+                                            <p:txEl>
+                                              <p:pRg st="1" end="1"/>
+                                            </p:txEl>
+                                          </p:spTgt>
+                                        </p:tgtEl>
+                                      </p:cBhvr>
+                                    </p:animEffect>
+                                  </p:childTnLst>
+                                </p:cTn>
+                              </p:par>
+                            </p:childTnLst>
+                          </p:cTn>
+                        </p:par>
+                      </p:childTnLst>
+                    </p:cTn>
+                  </p:par>
+                  <p:par>
+                    <p:cTn id="13" fill="hold">
+                      <p:stCondLst>
+                        <p:cond delay="indefinite"/>
+                      </p:stCondLst>
+                      <p:childTnLst>
+                        <p:par>
+                          <p:cTn id="14" fill="hold">
+                            <p:stCondLst>
+                              <p:cond delay="0"/>
+                            </p:stCondLst>
+                            <p:childTnLst>
+                              <p:par>
+                                <p:cTn id="15" presetID="14" presetClass="entr" presetSubtype="10" fill="hold" nodeType="clickEffect">
+                                  <p:stCondLst>
+                                    <p:cond delay="0"/>
+                                  </p:stCondLst>
+                                  <p:childTnLst>
+                                    <p:set>
+                                      <p:cBhvr>
+                                        <p:cTn id="16" dur="1" fill="hold">
+                                          <p:stCondLst>
+                                            <p:cond delay="0"/>
+                                          </p:stCondLst>
+                                        </p:cTn>
+                                        <p:tgtEl>
+                                          <p:spTgt spid="3">
+                                            <p:txEl>
+                                              <p:pRg st="2" end="2"/>
+                                            </p:txEl>
+                                          </p:spTgt>
+                                        </p:tgtEl>
+                                        <p:attrNameLst>
+                                          <p:attrName>style.visibility</p:attrName>
+                                        </p:attrNameLst>
+                                      </p:cBhvr>
+                                      <p:to>
+                                        <p:strVal val="visible"/>
+                                      </p:to>
+                                    </p:set>
+                                    <p:animEffect transition="in" filter="randombar(horizontal)">
+                                      <p:cBhvr>
+                                        <p:cTn id="17" dur="500"/>
+                                        <p:tgtEl>
+                                          <p:spTgt spid="3">
+                                            <p:txEl>
+                                              <p:pRg st="2" end="2"/>
+                                            </p:txEl>
+                                          </p:spTgt>
+                                        </p:tgtEl>
+                                      </p:cBhvr>
+                                    </p:animEffect>
+                                  </p:childTnLst>
+                                </p:cTn>
+                              </p:par>
+                              <p:par>
+                                <p:cTn id="18" presetID="14" presetClass="entr" presetSubtype="10" fill="hold" nodeType="withEffect">
+                                  <p:stCondLst>
+                                    <p:cond delay="0"/>
+                                  </p:stCondLst>
+                                  <p:childTnLst>
+                                    <p:set>
+                                      <p:cBhvr>
+                                        <p:cTn id="19" dur="1" fill="hold">
+                                          <p:stCondLst>
+                                            <p:cond delay="0"/>
+                                          </p:stCondLst>
+                                        </p:cTn>
+                                        <p:tgtEl>
+                                          <p:spTgt spid="3">
+                                            <p:txEl>
+                                              <p:pRg st="3" end="3"/>
+                                            </p:txEl>
+                                          </p:spTgt>
+                                        </p:tgtEl>
+                                        <p:attrNameLst>
+                                          <p:attrName>style.visibility</p:attrName>
+                                        </p:attrNameLst>
+                                      </p:cBhvr>
+                                      <p:to>
+                                        <p:strVal val="visible"/>
+                                      </p:to>
+                                    </p:set>
+                                    <p:animEffect transition="in" filter="randombar(horizontal)">
+                                      <p:cBhvr>
+                                        <p:cTn id="20" dur="500"/>
+                                        <p:tgtEl>
+                                          <p:spTgt spid="3">
+                                            <p:txEl>
+                                              <p:pRg st="3" end="3"/>
+                                            </p:txEl>
+                                          </p:spTgt>
+                                        </p:tgtEl>
+                                      </p:cBhvr>
+                                    </p:animEffect>
+                                  </p:childTnLst>
+                                </p:cTn>
+                              </p:par>
+                              <p:par>
+                                <p:cTn id="21" presetID="14" presetClass="entr" presetSubtype="10" fill="hold" nodeType="withEffect">
+                                  <p:stCondLst>
+                                    <p:cond delay="0"/>
+                                  </p:stCondLst>
+                                  <p:childTnLst>
+                                    <p:set>
+                                      <p:cBhvr>
+                                        <p:cTn id="22" dur="1" fill="hold">
+                                          <p:stCondLst>
+                                            <p:cond delay="0"/>
+                                          </p:stCondLst>
+                                        </p:cTn>
+                                        <p:tgtEl>
+                                          <p:spTgt spid="3">
+                                            <p:txEl>
+                                              <p:pRg st="4" end="4"/>
+                                            </p:txEl>
+                                          </p:spTgt>
+                                        </p:tgtEl>
+                                        <p:attrNameLst>
+                                          <p:attrName>style.visibility</p:attrName>
+                                        </p:attrNameLst>
+                                      </p:cBhvr>
+                                      <p:to>
+                                        <p:strVal val="visible"/>
+                                      </p:to>
+                                    </p:set>
+                                    <p:animEffect transition="in" filter="randombar(horizontal)">
+                                      <p:cBhvr>
+                                        <p:cTn id="23" dur="500"/>
+                                        <p:tgtEl>
+                                          <p:spTgt spid="3">
+                                            <p:txEl>
+                                              <p:pRg st="4" end="4"/>
+                                            </p:txEl>
+                                          </p:spTgt>
+                                        </p:tgtEl>
+                                      </p:cBhvr>
+                                    </p:animEffect>
+                                  </p:childTnLst>
+                                </p:cTn>
+                              </p:par>
+                              <p:par>
+                                <p:cTn id="24" presetID="14" presetClass="entr" presetSubtype="10" fill="hold" nodeType="withEffect">
+                                  <p:stCondLst>
+                                    <p:cond delay="0"/>
+                                  </p:stCondLst>
+                                  <p:childTnLst>
+                                    <p:set>
+                                      <p:cBhvr>
+                                        <p:cTn id="25" dur="1" fill="hold">
+                                          <p:stCondLst>
+                                            <p:cond delay="0"/>
+                                          </p:stCondLst>
+                                        </p:cTn>
+                                        <p:tgtEl>
+                                          <p:spTgt spid="3">
+                                            <p:txEl>
+                                              <p:pRg st="5" end="5"/>
+                                            </p:txEl>
+                                          </p:spTgt>
+                                        </p:tgtEl>
+                                        <p:attrNameLst>
+                                          <p:attrName>style.visibility</p:attrName>
+                                        </p:attrNameLst>
+                                      </p:cBhvr>
+                                      <p:to>
+                                        <p:strVal val="visible"/>
+                                      </p:to>
+                                    </p:set>
+                                    <p:animEffect transition="in" filter="randombar(horizontal)">
+                                      <p:cBhvr>
+                                        <p:cTn id="26" dur="500"/>
+                                        <p:tgtEl>
+                                          <p:spTgt spid="3">
+                                            <p:txEl>
+                                              <p:pRg st="5" end="5"/>
+                                            </p:txEl>
+                                          </p:spTgt>
+                                        </p:tgtEl>
+                                      </p:cBhvr>
+                                    </p:animEffect>
+                                  </p:childTnLst>
+                                </p:cTn>
+                              </p:par>
+                              <p:par>
+                                <p:cTn id="27" presetID="14" presetClass="entr" presetSubtype="10" fill="hold" nodeType="withEffect">
+                                  <p:stCondLst>
+                                    <p:cond delay="0"/>
+                                  </p:stCondLst>
+                                  <p:childTnLst>
+                                    <p:set>
+                                      <p:cBhvr>
+                                        <p:cTn id="28" dur="1" fill="hold">
+                                          <p:stCondLst>
+                                            <p:cond delay="0"/>
+                                          </p:stCondLst>
+                                        </p:cTn>
+                                        <p:tgtEl>
+                                          <p:spTgt spid="3">
+                                            <p:txEl>
+                                              <p:pRg st="6" end="6"/>
+                                            </p:txEl>
+                                          </p:spTgt>
+                                        </p:tgtEl>
+                                        <p:attrNameLst>
+                                          <p:attrName>style.visibility</p:attrName>
+                                        </p:attrNameLst>
+                                      </p:cBhvr>
+                                      <p:to>
+                                        <p:strVal val="visible"/>
+                                      </p:to>
+                                    </p:set>
+                                    <p:animEffect transition="in" filter="randombar(horizontal)">
+                                      <p:cBhvr>
+                                        <p:cTn id="29" dur="500"/>
+                                        <p:tgtEl>
+                                          <p:spTgt spid="3">
+                                            <p:txEl>
+                                              <p:pRg st="6" end="6"/>
+                                            </p:txEl>
+                                          </p:spTgt>
+                                        </p:tgtEl>
+                                      </p:cBhvr>
+                                    </p:animEffect>
+                                  </p:childTnLst>
+                                </p:cTn>
+                              </p:par>
+                              <p:par>
+                                <p:cTn id="30" presetID="14" presetClass="entr" presetSubtype="10" fill="hold" nodeType="withEffect">
+                                  <p:stCondLst>
+                                    <p:cond delay="0"/>
+                                  </p:stCondLst>
+                                  <p:childTnLst>
+                                    <p:set>
+                                      <p:cBhvr>
+                                        <p:cTn id="31" dur="1" fill="hold">
+                                          <p:stCondLst>
+                                            <p:cond delay="0"/>
+                                          </p:stCondLst>
+                                        </p:cTn>
+                                        <p:tgtEl>
+                                          <p:spTgt spid="3">
+                                            <p:txEl>
+                                              <p:pRg st="7" end="7"/>
+                                            </p:txEl>
+                                          </p:spTgt>
+                                        </p:tgtEl>
+                                        <p:attrNameLst>
+                                          <p:attrName>style.visibility</p:attrName>
+                                        </p:attrNameLst>
+                                      </p:cBhvr>
+                                      <p:to>
+                                        <p:strVal val="visible"/>
+                                      </p:to>
+                                    </p:set>
+                                    <p:animEffect transition="in" filter="randombar(horizontal)">
+                                      <p:cBhvr>
+                                        <p:cTn id="32" dur="500"/>
+                                        <p:tgtEl>
+                                          <p:spTgt spid="3">
+                                            <p:txEl>
+                                              <p:pRg st="7" end="7"/>
+                                            </p:txEl>
+                                          </p:spTgt>
+                                        </p:tgtEl>
+                                      </p:cBhvr>
+                                    </p:animEffect>
+                                  </p:childTnLst>
+                                </p:cTn>
+                              </p:par>
+                              <p:par>
+                                <p:cTn id="33" presetID="14" presetClass="entr" presetSubtype="10" fill="hold" nodeType="withEffect">
+                                  <p:stCondLst>
+                                    <p:cond delay="0"/>
+                                  </p:stCondLst>
+                                  <p:childTnLst>
+                                    <p:set>
+                                      <p:cBhvr>
+                                        <p:cTn id="34" dur="1" fill="hold">
+                                          <p:stCondLst>
+                                            <p:cond delay="0"/>
+                                          </p:stCondLst>
+                                        </p:cTn>
+                                        <p:tgtEl>
+                                          <p:spTgt spid="3">
+                                            <p:txEl>
+                                              <p:pRg st="8" end="8"/>
+                                            </p:txEl>
+                                          </p:spTgt>
+                                        </p:tgtEl>
+                                        <p:attrNameLst>
+                                          <p:attrName>style.visibility</p:attrName>
+                                        </p:attrNameLst>
+                                      </p:cBhvr>
+                                      <p:to>
+                                        <p:strVal val="visible"/>
+                                      </p:to>
+                                    </p:set>
+                                    <p:animEffect transition="in" filter="randombar(horizontal)">
+                                      <p:cBhvr>
+                                        <p:cTn id="35" dur="500"/>
+                                        <p:tgtEl>
+                                          <p:spTgt spid="3">
+                                            <p:txEl>
+                                              <p:pRg st="8" end="8"/>
+                                            </p:txEl>
+                                          </p:spTgt>
+                                        </p:tgtEl>
+                                      </p:cBhvr>
+                                    </p:animEffect>
+                                  </p:childTnLst>
+                                </p:cTn>
+                              </p:par>
+                            </p:childTnLst>
+                          </p:cTn>
+                        </p:par>
+                      </p:childTnLst>
+                    </p:cTn>
+                  </p:par>
+                </p:childTnLst>
+              </p:cTn>
+              <p:prevCondLst>
+                <p:cond evt="onPrev" delay="0">
+                  <p:tgtEl>
+                    <p:sldTgt/>
+                  </p:tgtEl>
+                </p:cond>
+              </p:prevCondLst>
+              <p:nextCondLst>
+                <p:cond evt="onNext" delay="0">
+                  <p:tgtEl>
+                    <p:sldTgt/>
+                  </p:tgtEl>
+                </p:cond>
+              </p:nextCondLst>
+            </p:seq>
+          </p:childTnLst>
+        </p:cTn>
+      </p:par>
+    </p:tnLst>
+  </p:timing>
+</p:sld>
+</file>
+
+<file path=ppt/slides/slide26.xml><?xml version="1.0" encoding="utf-8"?>
+<p:sld xmlns:a="http://schemas.openxmlformats.org/drawingml/2006/main" xmlns:r="http://schemas.openxmlformats.org/officeDocument/2006/relationships" xmlns:p="http://schemas.openxmlformats.org/presentationml/2006/main">
+  <p:cSld>
+    <p:spTree>
+      <p:nvGrpSpPr>
+        <p:cNvPr id="1" name="">
+          <a:extLst>
+            <a:ext uri="{FF2B5EF4-FFF2-40B4-BE49-F238E27FC236}">
+              <a16:creationId xmlns:a16="http://schemas.microsoft.com/office/drawing/2014/main" id="{8655D1A6-614F-5795-78DF-CFDFC0FB0033}"/>
+            </a:ext>
+          </a:extLst>
+        </p:cNvPr>
+        <p:cNvGrpSpPr/>
+        <p:nvPr/>
+      </p:nvGrpSpPr>
+      <p:grpSpPr>
+        <a:xfrm>
+          <a:off x="0" y="0"/>
+          <a:ext cx="0" cy="0"/>
+          <a:chOff x="0" y="0"/>
+          <a:chExt cx="0" cy="0"/>
+        </a:xfrm>
+      </p:grpSpPr>
+      <p:sp>
+        <p:nvSpPr>
+          <p:cNvPr id="8" name="Title 7">
+            <a:extLst>
+              <a:ext uri="{FF2B5EF4-FFF2-40B4-BE49-F238E27FC236}">
+                <a16:creationId xmlns:a16="http://schemas.microsoft.com/office/drawing/2014/main" id="{9E8CC38B-68D9-43B4-A864-8C610F0133CB}"/>
+              </a:ext>
+            </a:extLst>
+          </p:cNvPr>
+          <p:cNvSpPr>
+            <a:spLocks noGrp="1"/>
+          </p:cNvSpPr>
+          <p:nvPr>
+            <p:ph type="title"/>
+          </p:nvPr>
+        </p:nvSpPr>
+        <p:spPr>
+          <a:xfrm>
+            <a:off x="904875" y="131032"/>
+            <a:ext cx="7726363" cy="1072753"/>
+          </a:xfrm>
+        </p:spPr>
+        <p:txBody>
+          <a:bodyPr>
+            <a:normAutofit/>
+          </a:bodyPr>
+          <a:lstStyle/>
+          <a:p>
+            <a:r>
+              <a:rPr lang="en-US" dirty="0"/>
+              <a:t>*3.1   Distributed extension</a:t>
+            </a:r>
+            <a:br>
+              <a:rPr lang="en-US" dirty="0"/>
+            </a:br>
+            <a:r>
+              <a:rPr lang="en-US" sz="2400" b="0" i="1" dirty="0"/>
+              <a:t>Outcomes</a:t>
+            </a:r>
+            <a:endParaRPr lang="en-GB" sz="2400" b="0" i="1" dirty="0"/>
+          </a:p>
+        </p:txBody>
+      </p:sp>
+      <p:sp>
+        <p:nvSpPr>
+          <p:cNvPr id="5" name="Date Placeholder 4">
+            <a:extLst>
+              <a:ext uri="{FF2B5EF4-FFF2-40B4-BE49-F238E27FC236}">
+                <a16:creationId xmlns:a16="http://schemas.microsoft.com/office/drawing/2014/main" id="{3E0739CF-3D54-0FCD-1157-258B413C7D05}"/>
+              </a:ext>
+            </a:extLst>
+          </p:cNvPr>
+          <p:cNvSpPr>
+            <a:spLocks noGrp="1"/>
+          </p:cNvSpPr>
+          <p:nvPr>
+            <p:ph type="dt" sz="half" idx="10"/>
+          </p:nvPr>
+        </p:nvSpPr>
+        <p:spPr/>
+        <p:txBody>
+          <a:bodyPr/>
+          <a:lstStyle/>
+          <a:p>
+            <a:r>
+              <a:rPr lang="en-US" sz="600" dirty="0">
+                <a:latin typeface="+mj-lt"/>
+              </a:rPr>
+              <a:t>EDIC PhD Private Defense / Scalable Methods for Knowledge Graph Reasoning and Generation</a:t>
+            </a:r>
+          </a:p>
+        </p:txBody>
+      </p:sp>
+      <p:sp>
+        <p:nvSpPr>
+          <p:cNvPr id="6" name="Footer Placeholder 5">
+            <a:extLst>
+              <a:ext uri="{FF2B5EF4-FFF2-40B4-BE49-F238E27FC236}">
+                <a16:creationId xmlns:a16="http://schemas.microsoft.com/office/drawing/2014/main" id="{FB865264-99B6-B5F7-D722-CAD67E6B826F}"/>
+              </a:ext>
+            </a:extLst>
+          </p:cNvPr>
+          <p:cNvSpPr>
+            <a:spLocks noGrp="1"/>
+          </p:cNvSpPr>
+          <p:nvPr>
+            <p:ph type="ftr" sz="quarter" idx="11"/>
+          </p:nvPr>
+        </p:nvSpPr>
+        <p:spPr/>
+        <p:txBody>
+          <a:bodyPr/>
+          <a:lstStyle/>
+          <a:p>
+            <a:r>
+              <a:rPr lang="fr-FR" dirty="0">
+                <a:latin typeface="+mj-lt"/>
+              </a:rPr>
+              <a:t>Andrej Janchevski, EPFL STI IEM LIONS, Lausanne, </a:t>
+            </a:r>
+            <a:r>
+              <a:rPr lang="fr-FR" dirty="0" err="1">
+                <a:latin typeface="+mj-lt"/>
+              </a:rPr>
+              <a:t>Switzerland</a:t>
+            </a:r>
+            <a:r>
+              <a:rPr lang="fr-FR" dirty="0">
+                <a:latin typeface="+mj-lt"/>
+              </a:rPr>
+              <a:t> </a:t>
+            </a:r>
+          </a:p>
+        </p:txBody>
+      </p:sp>
+      <p:sp>
+        <p:nvSpPr>
+          <p:cNvPr id="7" name="Slide Number Placeholder 6">
+            <a:extLst>
+              <a:ext uri="{FF2B5EF4-FFF2-40B4-BE49-F238E27FC236}">
+                <a16:creationId xmlns:a16="http://schemas.microsoft.com/office/drawing/2014/main" id="{A0B50AB7-A80D-7250-A751-02093080075F}"/>
+              </a:ext>
+            </a:extLst>
+          </p:cNvPr>
+          <p:cNvSpPr>
+            <a:spLocks noGrp="1"/>
+          </p:cNvSpPr>
+          <p:nvPr>
+            <p:ph type="sldNum" sz="quarter" idx="12"/>
+          </p:nvPr>
+        </p:nvSpPr>
+        <p:spPr/>
+        <p:txBody>
+          <a:bodyPr/>
+          <a:lstStyle/>
+          <a:p>
+            <a:fld id="{E1E1CD7C-2161-7D43-862E-CE4C333CD873}" type="slidenum">
+              <a:rPr lang="fr-FR" smtClean="0"/>
+              <a:pPr/>
+              <a:t>26</a:t>
+            </a:fld>
+            <a:endParaRPr lang="fr-FR" dirty="0"/>
+          </a:p>
+        </p:txBody>
+      </p:sp>
+      <mc:AlternateContent xmlns:mc="http://schemas.openxmlformats.org/markup-compatibility/2006">
+        <mc:Choice xmlns:a14="http://schemas.microsoft.com/office/drawing/2010/main" Requires="a14">
+          <p:sp>
+            <p:nvSpPr>
+              <p:cNvPr id="3" name="Content Placeholder 2">
+                <a:extLst>
+                  <a:ext uri="{FF2B5EF4-FFF2-40B4-BE49-F238E27FC236}">
+                    <a16:creationId xmlns:a16="http://schemas.microsoft.com/office/drawing/2014/main" id="{3C16877D-B56F-197B-F4C5-29A8C535CE58}"/>
+                  </a:ext>
+                </a:extLst>
+              </p:cNvPr>
+              <p:cNvSpPr>
+                <a:spLocks noGrp="1"/>
+              </p:cNvSpPr>
+              <p:nvPr>
+                <p:ph idx="1"/>
+              </p:nvPr>
+            </p:nvSpPr>
+            <p:spPr/>
+            <p:txBody>
+              <a:bodyPr>
+                <a:normAutofit fontScale="92500" lnSpcReduction="10000"/>
+              </a:bodyPr>
+              <a:lstStyle/>
+              <a:p>
+                <a:r>
+                  <a:rPr lang="en-US" dirty="0">
+                    <a:latin typeface="+mj-lt"/>
+                  </a:rPr>
+                  <a:t>Updated complexity and bounds</a:t>
+                </a:r>
+              </a:p>
+              <a:p>
+                <a:pPr marL="342900" lvl="1" indent="0">
+                  <a:buNone/>
+                </a:pPr>
+                <a14:m>
+                  <m:oMathPara xmlns:m="http://schemas.openxmlformats.org/officeDocument/2006/math">
+                    <m:oMathParaPr>
+                      <m:jc m:val="centerGroup"/>
+                    </m:oMathParaPr>
+                    <m:oMath xmlns:m="http://schemas.openxmlformats.org/officeDocument/2006/math">
+                      <m:f>
+                        <m:fPr>
+                          <m:ctrlPr>
+                            <a:rPr lang="en-US" i="1" smtClean="0">
+                              <a:latin typeface="Cambria Math" panose="02040503050406030204" pitchFamily="18" charset="0"/>
+                            </a:rPr>
+                          </m:ctrlPr>
+                        </m:fPr>
+                        <m:num>
+                          <m:r>
+                            <a:rPr lang="en-US" i="1">
+                              <a:latin typeface="Cambria Math" panose="02040503050406030204" pitchFamily="18" charset="0"/>
+                            </a:rPr>
+                            <m:t>3</m:t>
+                          </m:r>
+                        </m:num>
+                        <m:den>
+                          <m:r>
+                            <a:rPr lang="en-US" i="1">
+                              <a:latin typeface="Cambria Math" panose="02040503050406030204" pitchFamily="18" charset="0"/>
+                            </a:rPr>
+                            <m:t>2</m:t>
+                          </m:r>
+                        </m:den>
+                      </m:f>
+                      <m:rad>
+                        <m:radPr>
+                          <m:ctrlPr>
+                            <a:rPr lang="en-US" i="1">
+                              <a:latin typeface="Cambria Math" panose="02040503050406030204" pitchFamily="18" charset="0"/>
+                            </a:rPr>
+                          </m:ctrlPr>
+                        </m:radPr>
+                        <m:deg>
+                          <m:r>
+                            <a:rPr lang="en-US" i="1" smtClean="0">
+                              <a:solidFill>
+                                <a:srgbClr val="0000FF"/>
+                              </a:solidFill>
+                              <a:latin typeface="Cambria Math" panose="02040503050406030204" pitchFamily="18" charset="0"/>
+                            </a:rPr>
+                            <m:t>3</m:t>
+                          </m:r>
+                        </m:deg>
+                        <m:e>
+                          <m:r>
+                            <a:rPr lang="en-US" i="1">
+                              <a:latin typeface="Cambria Math" panose="02040503050406030204" pitchFamily="18" charset="0"/>
+                            </a:rPr>
+                            <m:t>2</m:t>
+                          </m:r>
+                          <m:d>
+                            <m:dPr>
+                              <m:begChr m:val="|"/>
+                              <m:endChr m:val="|"/>
+                              <m:ctrlPr>
+                                <a:rPr lang="en-US" i="1">
+                                  <a:latin typeface="Cambria Math" panose="02040503050406030204" pitchFamily="18" charset="0"/>
+                                </a:rPr>
+                              </m:ctrlPr>
+                            </m:dPr>
+                            <m:e>
+                              <m:r>
+                                <a:rPr lang="en-US" i="1">
+                                  <a:latin typeface="Cambria Math" panose="02040503050406030204" pitchFamily="18" charset="0"/>
+                                </a:rPr>
+                                <m:t>𝑉</m:t>
+                              </m:r>
+                            </m:e>
+                          </m:d>
+                        </m:e>
+                      </m:rad>
+                      <m:r>
+                        <a:rPr lang="en-US" i="1">
+                          <a:latin typeface="Cambria Math" panose="02040503050406030204" pitchFamily="18" charset="0"/>
+                        </a:rPr>
+                        <m:t>≤</m:t>
+                      </m:r>
+                      <m:r>
+                        <a:rPr lang="en-US" i="1">
+                          <a:latin typeface="Cambria Math" panose="02040503050406030204" pitchFamily="18" charset="0"/>
+                        </a:rPr>
+                        <m:t>𝐾𝑁</m:t>
+                      </m:r>
+                      <m:r>
+                        <a:rPr lang="en-US" i="1">
+                          <a:latin typeface="Cambria Math" panose="02040503050406030204" pitchFamily="18" charset="0"/>
+                        </a:rPr>
+                        <m:t>+</m:t>
+                      </m:r>
+                      <m:func>
+                        <m:funcPr>
+                          <m:ctrlPr>
+                            <a:rPr lang="en-US" i="1">
+                              <a:latin typeface="Cambria Math" panose="02040503050406030204" pitchFamily="18" charset="0"/>
+                            </a:rPr>
+                          </m:ctrlPr>
+                        </m:funcPr>
+                        <m:fName>
+                          <m:sSubSup>
+                            <m:sSubSupPr>
+                              <m:ctrlPr>
+                                <a:rPr lang="en-US" i="1" smtClean="0">
+                                  <a:solidFill>
+                                    <a:srgbClr val="0000FF"/>
+                                  </a:solidFill>
+                                  <a:latin typeface="Cambria Math" panose="02040503050406030204" pitchFamily="18" charset="0"/>
+                                </a:rPr>
+                              </m:ctrlPr>
+                            </m:sSubSupPr>
+                            <m:e>
+                              <m:r>
+                                <m:rPr>
+                                  <m:sty m:val="p"/>
+                                </m:rPr>
+                                <a:rPr lang="en-US" i="0">
+                                  <a:solidFill>
+                                    <a:srgbClr val="0000FF"/>
+                                  </a:solidFill>
+                                  <a:latin typeface="Cambria Math" panose="02040503050406030204" pitchFamily="18" charset="0"/>
+                                </a:rPr>
+                                <m:t>max</m:t>
+                              </m:r>
+                            </m:e>
+                            <m:sub>
+                              <m:r>
+                                <a:rPr lang="en-US" i="1">
+                                  <a:solidFill>
+                                    <a:srgbClr val="0000FF"/>
+                                  </a:solidFill>
+                                  <a:latin typeface="Cambria Math" panose="02040503050406030204" pitchFamily="18" charset="0"/>
+                                </a:rPr>
+                                <m:t>𝑙</m:t>
+                              </m:r>
+                              <m:r>
+                                <a:rPr lang="en-US" i="1">
+                                  <a:solidFill>
+                                    <a:srgbClr val="0000FF"/>
+                                  </a:solidFill>
+                                  <a:latin typeface="Cambria Math" panose="02040503050406030204" pitchFamily="18" charset="0"/>
+                                </a:rPr>
+                                <m:t>=1</m:t>
+                              </m:r>
+                            </m:sub>
+                            <m:sup>
+                              <m:d>
+                                <m:dPr>
+                                  <m:begChr m:val="|"/>
+                                  <m:endChr m:val="|"/>
+                                  <m:ctrlPr>
+                                    <a:rPr lang="en-US" i="1">
+                                      <a:solidFill>
+                                        <a:srgbClr val="0000FF"/>
+                                      </a:solidFill>
+                                      <a:latin typeface="Cambria Math" panose="02040503050406030204" pitchFamily="18" charset="0"/>
+                                    </a:rPr>
+                                  </m:ctrlPr>
+                                </m:dPr>
+                                <m:e>
+                                  <m:r>
+                                    <a:rPr lang="en-US" i="1">
+                                      <a:solidFill>
+                                        <a:srgbClr val="0000FF"/>
+                                      </a:solidFill>
+                                      <a:latin typeface="Cambria Math" panose="02040503050406030204" pitchFamily="18" charset="0"/>
+                                    </a:rPr>
+                                    <m:t>𝑈</m:t>
+                                  </m:r>
+                                </m:e>
+                              </m:d>
+                            </m:sup>
+                          </m:sSubSup>
+                        </m:fName>
+                        <m:e>
+                          <m:d>
+                            <m:dPr>
+                              <m:ctrlPr>
+                                <a:rPr lang="en-US" i="1">
+                                  <a:latin typeface="Cambria Math" panose="02040503050406030204" pitchFamily="18" charset="0"/>
+                                </a:rPr>
+                              </m:ctrlPr>
+                            </m:dPr>
+                            <m:e>
+                              <m:nary>
+                                <m:naryPr>
+                                  <m:chr m:val="∑"/>
+                                  <m:ctrlPr>
+                                    <a:rPr lang="en-US" i="1">
+                                      <a:latin typeface="Cambria Math" panose="02040503050406030204" pitchFamily="18" charset="0"/>
+                                    </a:rPr>
+                                  </m:ctrlPr>
+                                </m:naryPr>
+                                <m:sub>
+                                  <m:r>
+                                    <a:rPr lang="en-US" i="1">
+                                      <a:latin typeface="Cambria Math" panose="02040503050406030204" pitchFamily="18" charset="0"/>
+                                    </a:rPr>
+                                    <m:t>𝑘</m:t>
+                                  </m:r>
+                                  <m:r>
+                                    <a:rPr lang="en-US" i="1">
+                                      <a:latin typeface="Cambria Math" panose="02040503050406030204" pitchFamily="18" charset="0"/>
+                                    </a:rPr>
+                                    <m:t>=1</m:t>
+                                  </m:r>
+                                </m:sub>
+                                <m:sup>
+                                  <m:r>
+                                    <a:rPr lang="en-US" i="1">
+                                      <a:latin typeface="Cambria Math" panose="02040503050406030204" pitchFamily="18" charset="0"/>
+                                    </a:rPr>
+                                    <m:t>𝐾</m:t>
+                                  </m:r>
+                                </m:sup>
+                                <m:e>
+                                  <m:d>
+                                    <m:dPr>
+                                      <m:begChr m:val="|"/>
+                                      <m:endChr m:val="|"/>
+                                      <m:ctrlPr>
+                                        <a:rPr lang="en-US" i="1">
+                                          <a:latin typeface="Cambria Math" panose="02040503050406030204" pitchFamily="18" charset="0"/>
+                                        </a:rPr>
+                                      </m:ctrlPr>
+                                    </m:dPr>
+                                    <m:e>
+                                      <m:sSub>
+                                        <m:sSubPr>
+                                          <m:ctrlPr>
+                                            <a:rPr lang="en-US" i="1">
+                                              <a:latin typeface="Cambria Math" panose="02040503050406030204" pitchFamily="18" charset="0"/>
+                                            </a:rPr>
+                                          </m:ctrlPr>
+                                        </m:sSubPr>
+                                        <m:e>
+                                          <m:r>
+                                            <a:rPr lang="en-US" i="1">
+                                              <a:latin typeface="Cambria Math" panose="02040503050406030204" pitchFamily="18" charset="0"/>
+                                            </a:rPr>
+                                            <m:t>𝐶</m:t>
+                                          </m:r>
+                                        </m:e>
+                                        <m:sub>
+                                          <m:r>
+                                            <a:rPr lang="en-US" i="1">
+                                              <a:latin typeface="Cambria Math" panose="02040503050406030204" pitchFamily="18" charset="0"/>
+                                            </a:rPr>
+                                            <m:t>𝑘</m:t>
+                                          </m:r>
+                                        </m:sub>
+                                      </m:sSub>
+                                    </m:e>
+                                  </m:d>
+                                  <m:d>
+                                    <m:dPr>
+                                      <m:begChr m:val="["/>
+                                      <m:endChr m:val="]"/>
+                                      <m:ctrlPr>
+                                        <a:rPr lang="en-US" i="1">
+                                          <a:latin typeface="Cambria Math" panose="02040503050406030204" pitchFamily="18" charset="0"/>
+                                        </a:rPr>
+                                      </m:ctrlPr>
+                                    </m:dPr>
+                                    <m:e>
+                                      <m:sSub>
+                                        <m:sSubPr>
+                                          <m:ctrlPr>
+                                            <a:rPr lang="en-US" i="1">
+                                              <a:latin typeface="Cambria Math" panose="02040503050406030204" pitchFamily="18" charset="0"/>
+                                            </a:rPr>
+                                          </m:ctrlPr>
+                                        </m:sSubPr>
+                                        <m:e>
+                                          <m:r>
+                                            <a:rPr lang="en-US" i="1">
+                                              <a:latin typeface="Cambria Math" panose="02040503050406030204" pitchFamily="18" charset="0"/>
+                                            </a:rPr>
+                                            <m:t>𝑁</m:t>
+                                          </m:r>
+                                        </m:e>
+                                        <m:sub>
+                                          <m:r>
+                                            <a:rPr lang="en-US" i="1">
+                                              <a:latin typeface="Cambria Math" panose="02040503050406030204" pitchFamily="18" charset="0"/>
+                                            </a:rPr>
+                                            <m:t>𝑘</m:t>
+                                          </m:r>
+                                          <m:r>
+                                            <a:rPr lang="en-US" i="1">
+                                              <a:latin typeface="Cambria Math" panose="02040503050406030204" pitchFamily="18" charset="0"/>
+                                            </a:rPr>
+                                            <m:t>,</m:t>
+                                          </m:r>
+                                          <m:r>
+                                            <a:rPr lang="en-US" i="1">
+                                              <a:latin typeface="Cambria Math" panose="02040503050406030204" pitchFamily="18" charset="0"/>
+                                            </a:rPr>
+                                            <m:t>𝑘</m:t>
+                                          </m:r>
+                                        </m:sub>
+                                      </m:sSub>
+                                      <m:sSub>
+                                        <m:sSubPr>
+                                          <m:ctrlPr>
+                                            <a:rPr lang="en-US" i="1" smtClean="0">
+                                              <a:solidFill>
+                                                <a:srgbClr val="0000FF"/>
+                                              </a:solidFill>
+                                              <a:latin typeface="Cambria Math" panose="02040503050406030204" pitchFamily="18" charset="0"/>
+                                            </a:rPr>
+                                          </m:ctrlPr>
+                                        </m:sSubPr>
+                                        <m:e>
+                                          <m:r>
+                                            <a:rPr lang="en-US" i="1">
+                                              <a:solidFill>
+                                                <a:srgbClr val="0000FF"/>
+                                              </a:solidFill>
+                                              <a:latin typeface="Cambria Math" panose="02040503050406030204" pitchFamily="18" charset="0"/>
+                                            </a:rPr>
+                                            <m:t>𝛿</m:t>
+                                          </m:r>
+                                        </m:e>
+                                        <m:sub>
+                                          <m:r>
+                                            <a:rPr lang="en-US" i="1">
+                                              <a:solidFill>
+                                                <a:srgbClr val="0000FF"/>
+                                              </a:solidFill>
+                                              <a:latin typeface="Cambria Math" panose="02040503050406030204" pitchFamily="18" charset="0"/>
+                                            </a:rPr>
+                                            <m:t>𝑘</m:t>
+                                          </m:r>
+                                          <m:r>
+                                            <a:rPr lang="en-US" i="1">
+                                              <a:solidFill>
+                                                <a:srgbClr val="0000FF"/>
+                                              </a:solidFill>
+                                              <a:latin typeface="Cambria Math" panose="02040503050406030204" pitchFamily="18" charset="0"/>
+                                            </a:rPr>
+                                            <m:t>,</m:t>
+                                          </m:r>
+                                          <m:r>
+                                            <a:rPr lang="en-US" i="1">
+                                              <a:solidFill>
+                                                <a:srgbClr val="0000FF"/>
+                                              </a:solidFill>
+                                              <a:latin typeface="Cambria Math" panose="02040503050406030204" pitchFamily="18" charset="0"/>
+                                            </a:rPr>
+                                            <m:t>𝑙</m:t>
+                                          </m:r>
+                                        </m:sub>
+                                      </m:sSub>
+                                      <m:r>
+                                        <a:rPr lang="en-US" i="1">
+                                          <a:latin typeface="Cambria Math" panose="02040503050406030204" pitchFamily="18" charset="0"/>
+                                        </a:rPr>
+                                        <m:t>+</m:t>
+                                      </m:r>
+                                      <m:d>
+                                        <m:dPr>
+                                          <m:ctrlPr>
+                                            <a:rPr lang="en-US" i="1">
+                                              <a:latin typeface="Cambria Math" panose="02040503050406030204" pitchFamily="18" charset="0"/>
+                                            </a:rPr>
+                                          </m:ctrlPr>
+                                        </m:dPr>
+                                        <m:e>
+                                          <m:sSub>
+                                            <m:sSubPr>
+                                              <m:ctrlPr>
+                                                <a:rPr lang="en-US" i="1">
+                                                  <a:latin typeface="Cambria Math" panose="02040503050406030204" pitchFamily="18" charset="0"/>
+                                                </a:rPr>
+                                              </m:ctrlPr>
+                                            </m:sSubPr>
+                                            <m:e>
+                                              <m:r>
+                                                <a:rPr lang="en-US" i="1">
+                                                  <a:latin typeface="Cambria Math" panose="02040503050406030204" pitchFamily="18" charset="0"/>
+                                                </a:rPr>
+                                                <m:t>𝑁</m:t>
+                                              </m:r>
+                                            </m:e>
+                                            <m:sub>
+                                              <m:r>
+                                                <a:rPr lang="en-US" i="1">
+                                                  <a:latin typeface="Cambria Math" panose="02040503050406030204" pitchFamily="18" charset="0"/>
+                                                </a:rPr>
+                                                <m:t>𝑘</m:t>
+                                              </m:r>
+                                            </m:sub>
+                                          </m:sSub>
+                                          <m:r>
+                                            <a:rPr lang="en-US" i="1">
+                                              <a:latin typeface="Cambria Math" panose="02040503050406030204" pitchFamily="18" charset="0"/>
+                                            </a:rPr>
+                                            <m:t>−</m:t>
+                                          </m:r>
+                                          <m:sSub>
+                                            <m:sSubPr>
+                                              <m:ctrlPr>
+                                                <a:rPr lang="en-US" i="1">
+                                                  <a:latin typeface="Cambria Math" panose="02040503050406030204" pitchFamily="18" charset="0"/>
+                                                </a:rPr>
+                                              </m:ctrlPr>
+                                            </m:sSubPr>
+                                            <m:e>
+                                              <m:r>
+                                                <a:rPr lang="en-US" i="1">
+                                                  <a:latin typeface="Cambria Math" panose="02040503050406030204" pitchFamily="18" charset="0"/>
+                                                </a:rPr>
+                                                <m:t>𝑁</m:t>
+                                              </m:r>
+                                            </m:e>
+                                            <m:sub>
+                                              <m:r>
+                                                <a:rPr lang="en-US" i="1">
+                                                  <a:latin typeface="Cambria Math" panose="02040503050406030204" pitchFamily="18" charset="0"/>
+                                                </a:rPr>
+                                                <m:t>𝑘</m:t>
+                                              </m:r>
+                                              <m:r>
+                                                <a:rPr lang="en-US" i="1">
+                                                  <a:latin typeface="Cambria Math" panose="02040503050406030204" pitchFamily="18" charset="0"/>
+                                                </a:rPr>
+                                                <m:t>,</m:t>
+                                              </m:r>
+                                              <m:r>
+                                                <a:rPr lang="en-US" i="1">
+                                                  <a:latin typeface="Cambria Math" panose="02040503050406030204" pitchFamily="18" charset="0"/>
+                                                </a:rPr>
+                                                <m:t>𝑘</m:t>
+                                              </m:r>
+                                            </m:sub>
+                                          </m:sSub>
+                                        </m:e>
+                                      </m:d>
+                                      <m:sSub>
+                                        <m:sSubPr>
+                                          <m:ctrlPr>
+                                            <a:rPr lang="en-US" i="1" smtClean="0">
+                                              <a:solidFill>
+                                                <a:srgbClr val="0000FF"/>
+                                              </a:solidFill>
+                                              <a:latin typeface="Cambria Math" panose="02040503050406030204" pitchFamily="18" charset="0"/>
+                                            </a:rPr>
+                                          </m:ctrlPr>
+                                        </m:sSubPr>
+                                        <m:e>
+                                          <m:r>
+                                            <a:rPr lang="en-US" i="1">
+                                              <a:solidFill>
+                                                <a:srgbClr val="0000FF"/>
+                                              </a:solidFill>
+                                              <a:latin typeface="Cambria Math" panose="02040503050406030204" pitchFamily="18" charset="0"/>
+                                            </a:rPr>
+                                            <m:t>𝛿</m:t>
+                                          </m:r>
+                                        </m:e>
+                                        <m:sub>
+                                          <m:r>
+                                            <a:rPr lang="en-US" b="0" i="1" smtClean="0">
+                                              <a:solidFill>
+                                                <a:srgbClr val="0000FF"/>
+                                              </a:solidFill>
+                                              <a:latin typeface="Cambria Math" panose="02040503050406030204" pitchFamily="18" charset="0"/>
+                                            </a:rPr>
+                                            <m:t>∗</m:t>
+                                          </m:r>
+                                          <m:r>
+                                            <a:rPr lang="en-US" i="1">
+                                              <a:solidFill>
+                                                <a:srgbClr val="0000FF"/>
+                                              </a:solidFill>
+                                              <a:latin typeface="Cambria Math" panose="02040503050406030204" pitchFamily="18" charset="0"/>
+                                            </a:rPr>
+                                            <m:t>,</m:t>
+                                          </m:r>
+                                          <m:r>
+                                            <a:rPr lang="en-US" i="1">
+                                              <a:solidFill>
+                                                <a:srgbClr val="0000FF"/>
+                                              </a:solidFill>
+                                              <a:latin typeface="Cambria Math" panose="02040503050406030204" pitchFamily="18" charset="0"/>
+                                            </a:rPr>
+                                            <m:t>𝑙</m:t>
+                                          </m:r>
+                                        </m:sub>
+                                      </m:sSub>
+                                    </m:e>
+                                  </m:d>
+                                </m:e>
+                              </m:nary>
+                            </m:e>
+                          </m:d>
+                        </m:e>
+                      </m:func>
+                      <m:r>
+                        <a:rPr lang="en-US" b="0" i="1" smtClean="0">
+                          <a:latin typeface="Cambria Math" panose="02040503050406030204" pitchFamily="18" charset="0"/>
+                        </a:rPr>
+                        <m:t>≤</m:t>
+                      </m:r>
+                      <m:r>
+                        <a:rPr lang="en-US" b="0" i="1" smtClean="0">
+                          <a:latin typeface="Cambria Math" panose="02040503050406030204" pitchFamily="18" charset="0"/>
+                        </a:rPr>
+                        <m:t>𝑁</m:t>
+                      </m:r>
+                      <m:d>
+                        <m:dPr>
+                          <m:ctrlPr>
+                            <a:rPr lang="en-US" b="0" i="1" smtClean="0">
+                              <a:latin typeface="Cambria Math" panose="02040503050406030204" pitchFamily="18" charset="0"/>
+                            </a:rPr>
+                          </m:ctrlPr>
+                        </m:dPr>
+                        <m:e>
+                          <m:d>
+                            <m:dPr>
+                              <m:begChr m:val="|"/>
+                              <m:endChr m:val="|"/>
+                              <m:ctrlPr>
+                                <a:rPr lang="en-US" b="0" i="1" smtClean="0">
+                                  <a:latin typeface="Cambria Math" panose="02040503050406030204" pitchFamily="18" charset="0"/>
+                                </a:rPr>
+                              </m:ctrlPr>
+                            </m:dPr>
+                            <m:e>
+                              <m:r>
+                                <a:rPr lang="en-US" b="0" i="1" smtClean="0">
+                                  <a:latin typeface="Cambria Math" panose="02040503050406030204" pitchFamily="18" charset="0"/>
+                                </a:rPr>
+                                <m:t>𝑉</m:t>
+                              </m:r>
+                            </m:e>
+                          </m:d>
+                          <m:r>
+                            <a:rPr lang="en-US" b="0" i="1" smtClean="0">
+                              <a:latin typeface="Cambria Math" panose="02040503050406030204" pitchFamily="18" charset="0"/>
+                            </a:rPr>
+                            <m:t>+1</m:t>
+                          </m:r>
+                        </m:e>
+                      </m:d>
+                    </m:oMath>
+                  </m:oMathPara>
+                </a14:m>
+                <a:endParaRPr lang="en-US" dirty="0">
+                  <a:latin typeface="+mj-lt"/>
+                </a:endParaRPr>
+              </a:p>
+              <a:p>
+                <a:r>
+                  <a:rPr lang="en-US" dirty="0">
+                    <a:latin typeface="+mj-lt"/>
+                  </a:rPr>
+                  <a:t>Issues</a:t>
+                </a:r>
+              </a:p>
+              <a:p>
+                <a:pPr lvl="1"/>
+                <a:r>
+                  <a:rPr lang="en-US" dirty="0">
+                    <a:latin typeface="+mj-lt"/>
+                  </a:rPr>
+                  <a:t>Cubic speed-ups only when </a:t>
+                </a:r>
+                <a14:m>
+                  <m:oMath xmlns:m="http://schemas.openxmlformats.org/officeDocument/2006/math">
+                    <m:d>
+                      <m:dPr>
+                        <m:begChr m:val="|"/>
+                        <m:endChr m:val="|"/>
+                        <m:ctrlPr>
+                          <a:rPr lang="en-US" b="0" i="1" smtClean="0">
+                            <a:latin typeface="Cambria Math" panose="02040503050406030204" pitchFamily="18" charset="0"/>
+                          </a:rPr>
+                        </m:ctrlPr>
+                      </m:dPr>
+                      <m:e>
+                        <m:r>
+                          <a:rPr lang="en-US" b="0" i="1" smtClean="0">
+                            <a:latin typeface="Cambria Math" panose="02040503050406030204" pitchFamily="18" charset="0"/>
+                          </a:rPr>
+                          <m:t>𝑈</m:t>
+                        </m:r>
+                      </m:e>
+                    </m:d>
+                    <m:r>
+                      <a:rPr lang="en-US" b="0" i="1" smtClean="0">
+                        <a:latin typeface="Cambria Math" panose="02040503050406030204" pitchFamily="18" charset="0"/>
+                      </a:rPr>
+                      <m:t>=</m:t>
+                    </m:r>
+                    <m:r>
+                      <a:rPr lang="en-US" b="0" i="1" smtClean="0">
+                        <a:latin typeface="Cambria Math" panose="02040503050406030204" pitchFamily="18" charset="0"/>
+                      </a:rPr>
+                      <m:t>𝐾</m:t>
+                    </m:r>
+                    <m:r>
+                      <a:rPr lang="en-US" b="0" i="1" smtClean="0">
+                        <a:latin typeface="Cambria Math" panose="02040503050406030204" pitchFamily="18" charset="0"/>
+                      </a:rPr>
+                      <m:t>=</m:t>
+                    </m:r>
+                    <m:rad>
+                      <m:radPr>
+                        <m:ctrlPr>
+                          <a:rPr lang="en-US" i="1">
+                            <a:latin typeface="Cambria Math" panose="02040503050406030204" pitchFamily="18" charset="0"/>
+                          </a:rPr>
+                        </m:ctrlPr>
+                      </m:radPr>
+                      <m:deg>
+                        <m:r>
+                          <a:rPr lang="en-US" i="1" smtClean="0">
+                            <a:solidFill>
+                              <a:srgbClr val="000000"/>
+                            </a:solidFill>
+                            <a:latin typeface="Cambria Math" panose="02040503050406030204" pitchFamily="18" charset="0"/>
+                          </a:rPr>
+                          <m:t>3</m:t>
+                        </m:r>
+                      </m:deg>
+                      <m:e>
+                        <m:r>
+                          <a:rPr lang="en-US" i="1">
+                            <a:latin typeface="Cambria Math" panose="02040503050406030204" pitchFamily="18" charset="0"/>
+                          </a:rPr>
+                          <m:t>2</m:t>
+                        </m:r>
+                        <m:d>
+                          <m:dPr>
+                            <m:begChr m:val="|"/>
+                            <m:endChr m:val="|"/>
+                            <m:ctrlPr>
+                              <a:rPr lang="en-US" i="1">
+                                <a:latin typeface="Cambria Math" panose="02040503050406030204" pitchFamily="18" charset="0"/>
+                              </a:rPr>
+                            </m:ctrlPr>
+                          </m:dPr>
+                          <m:e>
+                            <m:r>
+                              <a:rPr lang="en-US" i="1">
+                                <a:latin typeface="Cambria Math" panose="02040503050406030204" pitchFamily="18" charset="0"/>
+                              </a:rPr>
+                              <m:t>𝑉</m:t>
+                            </m:r>
+                          </m:e>
+                        </m:d>
+                      </m:e>
+                    </m:rad>
+                  </m:oMath>
+                </a14:m>
+                <a:endParaRPr lang="en-US" dirty="0">
+                  <a:latin typeface="+mj-lt"/>
+                </a:endParaRPr>
+              </a:p>
+              <a:p>
+                <a:pPr lvl="1"/>
+                <a:r>
+                  <a:rPr lang="en-US" dirty="0">
+                    <a:latin typeface="+mj-lt"/>
+                  </a:rPr>
+                  <a:t>Too few communities, harder to preserve baseline performance</a:t>
+                </a:r>
+              </a:p>
+              <a:p>
+                <a:pPr lvl="1"/>
+                <a:r>
+                  <a:rPr lang="en-US" dirty="0">
+                    <a:latin typeface="+mj-lt"/>
+                  </a:rPr>
+                  <a:t>Need to equalize load per machine - 0-1 Knapsack</a:t>
+                </a:r>
+              </a:p>
+              <a:p>
+                <a:pPr lvl="1"/>
+                <a:r>
+                  <a:rPr lang="en-US" dirty="0">
+                    <a:latin typeface="+mj-lt"/>
+                  </a:rPr>
+                  <a:t>In practice at most 1.5x additional speed-up from distribution</a:t>
+                </a:r>
+              </a:p>
+              <a:p>
+                <a:r>
+                  <a:rPr lang="en-US" dirty="0">
+                    <a:latin typeface="+mj-lt"/>
+                  </a:rPr>
+                  <a:t>Balanced partition problem for optimal Step II assignment</a:t>
+                </a:r>
+              </a:p>
+              <a:p>
+                <a:pPr lvl="1"/>
+                <a:r>
+                  <a:rPr lang="en-US" dirty="0">
+                    <a:latin typeface="+mj-lt"/>
+                  </a:rPr>
+                  <a:t>Brute-force: </a:t>
+                </a:r>
+                <a14:m>
+                  <m:oMath xmlns:m="http://schemas.openxmlformats.org/officeDocument/2006/math">
+                    <m:r>
+                      <a:rPr lang="en-US" b="0" i="1" smtClean="0">
+                        <a:latin typeface="Cambria Math" panose="02040503050406030204" pitchFamily="18" charset="0"/>
+                      </a:rPr>
+                      <m:t>𝑂</m:t>
+                    </m:r>
+                    <m:d>
+                      <m:dPr>
+                        <m:ctrlPr>
+                          <a:rPr lang="en-US" b="0" i="1" smtClean="0">
+                            <a:latin typeface="Cambria Math" panose="02040503050406030204" pitchFamily="18" charset="0"/>
+                          </a:rPr>
+                        </m:ctrlPr>
+                      </m:dPr>
+                      <m:e>
+                        <m:sSup>
+                          <m:sSupPr>
+                            <m:ctrlPr>
+                              <a:rPr lang="en-US" b="0" i="1" smtClean="0">
+                                <a:latin typeface="Cambria Math" panose="02040503050406030204" pitchFamily="18" charset="0"/>
+                              </a:rPr>
+                            </m:ctrlPr>
+                          </m:sSupPr>
+                          <m:e>
+                            <m:d>
+                              <m:dPr>
+                                <m:begChr m:val="|"/>
+                                <m:endChr m:val="|"/>
+                                <m:ctrlPr>
+                                  <a:rPr lang="en-US" b="0" i="1" smtClean="0">
+                                    <a:latin typeface="Cambria Math" panose="02040503050406030204" pitchFamily="18" charset="0"/>
+                                  </a:rPr>
+                                </m:ctrlPr>
+                              </m:dPr>
+                              <m:e>
+                                <m:r>
+                                  <a:rPr lang="en-US" b="0" i="1" smtClean="0">
+                                    <a:latin typeface="Cambria Math" panose="02040503050406030204" pitchFamily="18" charset="0"/>
+                                  </a:rPr>
+                                  <m:t>𝑈</m:t>
+                                </m:r>
+                              </m:e>
+                            </m:d>
+                          </m:e>
+                          <m:sup>
+                            <m:r>
+                              <a:rPr lang="en-US" b="0" i="1" smtClean="0">
+                                <a:latin typeface="Cambria Math" panose="02040503050406030204" pitchFamily="18" charset="0"/>
+                              </a:rPr>
+                              <m:t>𝐾</m:t>
+                            </m:r>
+                          </m:sup>
+                        </m:sSup>
+                      </m:e>
+                    </m:d>
+                  </m:oMath>
+                </a14:m>
+                <a:r>
+                  <a:rPr lang="en-US" dirty="0">
+                    <a:latin typeface="+mj-lt"/>
+                  </a:rPr>
+                  <a:t> (infeasible)</a:t>
+                </a:r>
+              </a:p>
+              <a:p>
+                <a:pPr lvl="1"/>
+                <a:r>
+                  <a:rPr lang="en-US" dirty="0">
+                    <a:latin typeface="+mj-lt"/>
+                  </a:rPr>
+                  <a:t>Dynamic programming: </a:t>
+                </a:r>
+                <a14:m>
+                  <m:oMath xmlns:m="http://schemas.openxmlformats.org/officeDocument/2006/math">
+                    <m:r>
+                      <a:rPr lang="en-US" i="1">
+                        <a:latin typeface="Cambria Math" panose="02040503050406030204" pitchFamily="18" charset="0"/>
+                      </a:rPr>
+                      <m:t>𝑂</m:t>
+                    </m:r>
+                    <m:d>
+                      <m:dPr>
+                        <m:ctrlPr>
+                          <a:rPr lang="en-US" i="1">
+                            <a:latin typeface="Cambria Math" panose="02040503050406030204" pitchFamily="18" charset="0"/>
+                          </a:rPr>
+                        </m:ctrlPr>
+                      </m:dPr>
+                      <m:e>
+                        <m:sSup>
+                          <m:sSupPr>
+                            <m:ctrlPr>
+                              <a:rPr lang="en-US" i="1">
+                                <a:latin typeface="Cambria Math" panose="02040503050406030204" pitchFamily="18" charset="0"/>
+                              </a:rPr>
+                            </m:ctrlPr>
+                          </m:sSupPr>
+                          <m:e>
+                            <m:r>
+                              <a:rPr lang="en-US" b="0" i="1" smtClean="0">
+                                <a:latin typeface="Cambria Math" panose="02040503050406030204" pitchFamily="18" charset="0"/>
+                              </a:rPr>
+                              <m:t>𝐾𝑆</m:t>
+                            </m:r>
+                          </m:e>
+                          <m:sup>
+                            <m:r>
+                              <a:rPr lang="en-US" b="0" i="1" smtClean="0">
+                                <a:latin typeface="Cambria Math" panose="02040503050406030204" pitchFamily="18" charset="0"/>
+                              </a:rPr>
+                              <m:t>|</m:t>
+                            </m:r>
+                            <m:r>
+                              <a:rPr lang="en-US" b="0" i="1" smtClean="0">
+                                <a:latin typeface="Cambria Math" panose="02040503050406030204" pitchFamily="18" charset="0"/>
+                              </a:rPr>
+                              <m:t>𝑈</m:t>
+                            </m:r>
+                            <m:r>
+                              <a:rPr lang="en-US" b="0" i="1" smtClean="0">
+                                <a:latin typeface="Cambria Math" panose="02040503050406030204" pitchFamily="18" charset="0"/>
+                              </a:rPr>
+                              <m:t>|-1</m:t>
+                            </m:r>
+                          </m:sup>
+                        </m:sSup>
+                      </m:e>
+                    </m:d>
+                  </m:oMath>
+                </a14:m>
+                <a:r>
+                  <a:rPr lang="en-US" dirty="0">
+                    <a:latin typeface="+mj-lt"/>
+                  </a:rPr>
+                  <a:t> (impractical)</a:t>
+                </a:r>
+              </a:p>
+              <a:p>
+                <a:pPr lvl="1"/>
+                <a:r>
+                  <a:rPr lang="en-US" dirty="0">
+                    <a:latin typeface="+mj-lt"/>
+                  </a:rPr>
+                  <a:t>Greedy: </a:t>
+                </a:r>
+                <a14:m>
+                  <m:oMath xmlns:m="http://schemas.openxmlformats.org/officeDocument/2006/math">
+                    <m:r>
+                      <a:rPr lang="en-US" i="1">
+                        <a:latin typeface="Cambria Math" panose="02040503050406030204" pitchFamily="18" charset="0"/>
+                      </a:rPr>
+                      <m:t>𝑂</m:t>
+                    </m:r>
+                    <m:d>
+                      <m:dPr>
+                        <m:ctrlPr>
+                          <a:rPr lang="en-US" i="1">
+                            <a:latin typeface="Cambria Math" panose="02040503050406030204" pitchFamily="18" charset="0"/>
+                          </a:rPr>
+                        </m:ctrlPr>
+                      </m:dPr>
+                      <m:e>
+                        <m:r>
+                          <a:rPr lang="en-US" b="0" i="1" smtClean="0">
+                            <a:latin typeface="Cambria Math" panose="02040503050406030204" pitchFamily="18" charset="0"/>
+                          </a:rPr>
+                          <m:t>𝐾</m:t>
+                        </m:r>
+                        <m:func>
+                          <m:funcPr>
+                            <m:ctrlPr>
+                              <a:rPr lang="en-US" b="0" i="1" smtClean="0">
+                                <a:latin typeface="Cambria Math" panose="02040503050406030204" pitchFamily="18" charset="0"/>
+                              </a:rPr>
+                            </m:ctrlPr>
+                          </m:funcPr>
+                          <m:fName>
+                            <m:r>
+                              <m:rPr>
+                                <m:sty m:val="p"/>
+                              </m:rPr>
+                              <a:rPr lang="en-US" b="0" i="0" smtClean="0">
+                                <a:latin typeface="Cambria Math" panose="02040503050406030204" pitchFamily="18" charset="0"/>
+                              </a:rPr>
+                              <m:t>log</m:t>
+                            </m:r>
+                          </m:fName>
+                          <m:e>
+                            <m:d>
+                              <m:dPr>
+                                <m:ctrlPr>
+                                  <a:rPr lang="en-US" b="0" i="1" smtClean="0">
+                                    <a:latin typeface="Cambria Math" panose="02040503050406030204" pitchFamily="18" charset="0"/>
+                                  </a:rPr>
+                                </m:ctrlPr>
+                              </m:dPr>
+                              <m:e>
+                                <m:r>
+                                  <a:rPr lang="en-US" b="0" i="1" smtClean="0">
+                                    <a:latin typeface="Cambria Math" panose="02040503050406030204" pitchFamily="18" charset="0"/>
+                                  </a:rPr>
+                                  <m:t>𝐾</m:t>
+                                </m:r>
+                                <m:d>
+                                  <m:dPr>
+                                    <m:begChr m:val="|"/>
+                                    <m:endChr m:val="|"/>
+                                    <m:ctrlPr>
+                                      <a:rPr lang="en-US" b="0" i="1" smtClean="0">
+                                        <a:latin typeface="Cambria Math" panose="02040503050406030204" pitchFamily="18" charset="0"/>
+                                      </a:rPr>
+                                    </m:ctrlPr>
+                                  </m:dPr>
+                                  <m:e>
+                                    <m:r>
+                                      <a:rPr lang="en-US" b="0" i="1" smtClean="0">
+                                        <a:latin typeface="Cambria Math" panose="02040503050406030204" pitchFamily="18" charset="0"/>
+                                      </a:rPr>
+                                      <m:t>𝑈</m:t>
+                                    </m:r>
+                                  </m:e>
+                                </m:d>
+                              </m:e>
+                            </m:d>
+                          </m:e>
+                        </m:func>
+                      </m:e>
+                    </m:d>
+                  </m:oMath>
+                </a14:m>
+                <a:r>
+                  <a:rPr lang="en-US" dirty="0">
+                    <a:latin typeface="+mj-lt"/>
+                  </a:rPr>
+                  <a:t> (inexact but scalable)</a:t>
+                </a:r>
+              </a:p>
+              <a:p>
+                <a:pPr lvl="1"/>
+                <a:endParaRPr lang="en-US" dirty="0">
+                  <a:latin typeface="+mj-lt"/>
+                </a:endParaRPr>
+              </a:p>
+              <a:p>
+                <a:pPr marL="342900" lvl="1" indent="0">
+                  <a:buNone/>
+                </a:pPr>
+                <a:endParaRPr lang="en-US" dirty="0">
+                  <a:latin typeface="+mj-lt"/>
+                </a:endParaRPr>
+              </a:p>
+            </p:txBody>
+          </p:sp>
+        </mc:Choice>
+        <mc:Fallback>
+          <p:sp>
+            <p:nvSpPr>
+              <p:cNvPr id="3" name="Content Placeholder 2">
+                <a:extLst>
+                  <a:ext uri="{FF2B5EF4-FFF2-40B4-BE49-F238E27FC236}">
+                    <a16:creationId xmlns:a16="http://schemas.microsoft.com/office/drawing/2014/main" id="{3C16877D-B56F-197B-F4C5-29A8C535CE58}"/>
+                  </a:ext>
+                </a:extLst>
+              </p:cNvPr>
+              <p:cNvSpPr>
+                <a:spLocks noGrp="1" noRot="1" noChangeAspect="1" noMove="1" noResize="1" noEditPoints="1" noAdjustHandles="1" noChangeArrowheads="1" noChangeShapeType="1" noTextEdit="1"/>
+              </p:cNvSpPr>
+              <p:nvPr>
+                <p:ph idx="1"/>
+              </p:nvPr>
+            </p:nvSpPr>
+            <p:spPr>
+              <a:blipFill>
+                <a:blip r:embed="rId3"/>
+                <a:stretch>
+                  <a:fillRect t="-2162"/>
+                </a:stretch>
+              </a:blipFill>
+            </p:spPr>
+            <p:txBody>
+              <a:bodyPr/>
+              <a:lstStyle/>
+              <a:p>
+                <a:r>
+                  <a:rPr lang="en-GB">
+                    <a:noFill/>
+                  </a:rPr>
+                  <a:t> </a:t>
+                </a:r>
+              </a:p>
+            </p:txBody>
+          </p:sp>
+        </mc:Fallback>
+      </mc:AlternateContent>
+    </p:spTree>
+    <p:extLst>
+      <p:ext uri="{BB962C8B-B14F-4D97-AF65-F5344CB8AC3E}">
+        <p14:creationId xmlns:p14="http://schemas.microsoft.com/office/powerpoint/2010/main" val="2824215342"/>
+      </p:ext>
+    </p:extLst>
+  </p:cSld>
+  <p:clrMapOvr>
+    <a:masterClrMapping/>
+  </p:clrMapOvr>
+  <p:timing>
+    <p:tnLst>
+      <p:par>
+        <p:cTn id="1" dur="indefinite" restart="never" nodeType="tmRoot">
+          <p:childTnLst>
+            <p:seq concurrent="1" nextAc="seek">
+              <p:cTn id="2" dur="indefinite" nodeType="mainSeq">
+                <p:childTnLst>
+                  <p:par>
+                    <p:cTn id="3" fill="hold">
+                      <p:stCondLst>
+                        <p:cond delay="indefinite"/>
+                      </p:stCondLst>
+                      <p:childTnLst>
+                        <p:par>
+                          <p:cTn id="4" fill="hold">
+                            <p:stCondLst>
+                              <p:cond delay="0"/>
+                            </p:stCondLst>
+                            <p:childTnLst>
+                              <p:par>
+                                <p:cTn id="5" presetID="14" presetClass="entr" presetSubtype="10" fill="hold" nodeType="clickEffect">
+                                  <p:stCondLst>
+                                    <p:cond delay="0"/>
+                                  </p:stCondLst>
+                                  <p:childTnLst>
+                                    <p:set>
+                                      <p:cBhvr>
+                                        <p:cTn id="6" dur="1" fill="hold">
+                                          <p:stCondLst>
+                                            <p:cond delay="0"/>
+                                          </p:stCondLst>
+                                        </p:cTn>
+                                        <p:tgtEl>
+                                          <p:spTgt spid="3">
+                                            <p:txEl>
+                                              <p:pRg st="0" end="0"/>
+                                            </p:txEl>
+                                          </p:spTgt>
+                                        </p:tgtEl>
+                                        <p:attrNameLst>
+                                          <p:attrName>style.visibility</p:attrName>
+                                        </p:attrNameLst>
+                                      </p:cBhvr>
+                                      <p:to>
+                                        <p:strVal val="visible"/>
+                                      </p:to>
+                                    </p:set>
+                                    <p:animEffect transition="in" filter="randombar(horizontal)">
+                                      <p:cBhvr>
+                                        <p:cTn id="7" dur="500"/>
+                                        <p:tgtEl>
+                                          <p:spTgt spid="3">
+                                            <p:txEl>
+                                              <p:pRg st="0" end="0"/>
+                                            </p:txEl>
+                                          </p:spTgt>
+                                        </p:tgtEl>
+                                      </p:cBhvr>
+                                    </p:animEffect>
+                                  </p:childTnLst>
+                                </p:cTn>
+                              </p:par>
+                              <p:par>
+                                <p:cTn id="8" presetID="14" presetClass="entr" presetSubtype="10" fill="hold" nodeType="withEffect">
+                                  <p:stCondLst>
+                                    <p:cond delay="0"/>
+                                  </p:stCondLst>
+                                  <p:childTnLst>
+                                    <p:set>
+                                      <p:cBhvr>
+                                        <p:cTn id="9" dur="1" fill="hold">
+                                          <p:stCondLst>
+                                            <p:cond delay="0"/>
+                                          </p:stCondLst>
+                                        </p:cTn>
+                                        <p:tgtEl>
+                                          <p:spTgt spid="3">
+                                            <p:txEl>
+                                              <p:pRg st="1" end="1"/>
+                                            </p:txEl>
+                                          </p:spTgt>
+                                        </p:tgtEl>
+                                        <p:attrNameLst>
+                                          <p:attrName>style.visibility</p:attrName>
+                                        </p:attrNameLst>
+                                      </p:cBhvr>
+                                      <p:to>
+                                        <p:strVal val="visible"/>
+                                      </p:to>
+                                    </p:set>
+                                    <p:animEffect transition="in" filter="randombar(horizontal)">
+                                      <p:cBhvr>
+                                        <p:cTn id="10" dur="500"/>
+                                        <p:tgtEl>
+                                          <p:spTgt spid="3">
+                                            <p:txEl>
+                                              <p:pRg st="1" end="1"/>
+                                            </p:txEl>
+                                          </p:spTgt>
+                                        </p:tgtEl>
+                                      </p:cBhvr>
+                                    </p:animEffect>
+                                  </p:childTnLst>
+                                </p:cTn>
+                              </p:par>
+                            </p:childTnLst>
+                          </p:cTn>
+                        </p:par>
+                      </p:childTnLst>
+                    </p:cTn>
+                  </p:par>
+                  <p:par>
+                    <p:cTn id="11" fill="hold">
+                      <p:stCondLst>
+                        <p:cond delay="indefinite"/>
+                      </p:stCondLst>
+                      <p:childTnLst>
+                        <p:par>
+                          <p:cTn id="12" fill="hold">
+                            <p:stCondLst>
+                              <p:cond delay="0"/>
+                            </p:stCondLst>
+                            <p:childTnLst>
+                              <p:par>
+                                <p:cTn id="13" presetID="14" presetClass="entr" presetSubtype="10" fill="hold" nodeType="clickEffect">
+                                  <p:stCondLst>
+                                    <p:cond delay="0"/>
+                                  </p:stCondLst>
+                                  <p:childTnLst>
+                                    <p:set>
+                                      <p:cBhvr>
+                                        <p:cTn id="14" dur="1" fill="hold">
+                                          <p:stCondLst>
+                                            <p:cond delay="0"/>
+                                          </p:stCondLst>
+                                        </p:cTn>
+                                        <p:tgtEl>
+                                          <p:spTgt spid="3">
+                                            <p:txEl>
+                                              <p:pRg st="2" end="2"/>
+                                            </p:txEl>
+                                          </p:spTgt>
+                                        </p:tgtEl>
+                                        <p:attrNameLst>
+                                          <p:attrName>style.visibility</p:attrName>
+                                        </p:attrNameLst>
+                                      </p:cBhvr>
+                                      <p:to>
+                                        <p:strVal val="visible"/>
+                                      </p:to>
+                                    </p:set>
+                                    <p:animEffect transition="in" filter="randombar(horizontal)">
+                                      <p:cBhvr>
+                                        <p:cTn id="15" dur="500"/>
+                                        <p:tgtEl>
+                                          <p:spTgt spid="3">
+                                            <p:txEl>
+                                              <p:pRg st="2" end="2"/>
+                                            </p:txEl>
+                                          </p:spTgt>
+                                        </p:tgtEl>
+                                      </p:cBhvr>
+                                    </p:animEffect>
+                                  </p:childTnLst>
+                                </p:cTn>
+                              </p:par>
+                              <p:par>
+                                <p:cTn id="16" presetID="14" presetClass="entr" presetSubtype="10" fill="hold" nodeType="withEffect">
+                                  <p:stCondLst>
+                                    <p:cond delay="0"/>
+                                  </p:stCondLst>
+                                  <p:childTnLst>
+                                    <p:set>
+                                      <p:cBhvr>
+                                        <p:cTn id="17" dur="1" fill="hold">
+                                          <p:stCondLst>
+                                            <p:cond delay="0"/>
+                                          </p:stCondLst>
+                                        </p:cTn>
+                                        <p:tgtEl>
+                                          <p:spTgt spid="3">
+                                            <p:txEl>
+                                              <p:pRg st="3" end="3"/>
+                                            </p:txEl>
+                                          </p:spTgt>
+                                        </p:tgtEl>
+                                        <p:attrNameLst>
+                                          <p:attrName>style.visibility</p:attrName>
+                                        </p:attrNameLst>
+                                      </p:cBhvr>
+                                      <p:to>
+                                        <p:strVal val="visible"/>
+                                      </p:to>
+                                    </p:set>
+                                    <p:animEffect transition="in" filter="randombar(horizontal)">
+                                      <p:cBhvr>
+                                        <p:cTn id="18" dur="500"/>
+                                        <p:tgtEl>
+                                          <p:spTgt spid="3">
+                                            <p:txEl>
+                                              <p:pRg st="3" end="3"/>
+                                            </p:txEl>
+                                          </p:spTgt>
+                                        </p:tgtEl>
+                                      </p:cBhvr>
+                                    </p:animEffect>
+                                  </p:childTnLst>
+                                </p:cTn>
+                              </p:par>
+                              <p:par>
+                                <p:cTn id="19" presetID="14" presetClass="entr" presetSubtype="10" fill="hold" nodeType="withEffect">
+                                  <p:stCondLst>
+                                    <p:cond delay="0"/>
+                                  </p:stCondLst>
+                                  <p:childTnLst>
+                                    <p:set>
+                                      <p:cBhvr>
+                                        <p:cTn id="20" dur="1" fill="hold">
+                                          <p:stCondLst>
+                                            <p:cond delay="0"/>
+                                          </p:stCondLst>
+                                        </p:cTn>
+                                        <p:tgtEl>
+                                          <p:spTgt spid="3">
+                                            <p:txEl>
+                                              <p:pRg st="4" end="4"/>
+                                            </p:txEl>
+                                          </p:spTgt>
+                                        </p:tgtEl>
+                                        <p:attrNameLst>
+                                          <p:attrName>style.visibility</p:attrName>
+                                        </p:attrNameLst>
+                                      </p:cBhvr>
+                                      <p:to>
+                                        <p:strVal val="visible"/>
+                                      </p:to>
+                                    </p:set>
+                                    <p:animEffect transition="in" filter="randombar(horizontal)">
+                                      <p:cBhvr>
+                                        <p:cTn id="21" dur="500"/>
+                                        <p:tgtEl>
+                                          <p:spTgt spid="3">
+                                            <p:txEl>
+                                              <p:pRg st="4" end="4"/>
+                                            </p:txEl>
+                                          </p:spTgt>
+                                        </p:tgtEl>
+                                      </p:cBhvr>
+                                    </p:animEffect>
+                                  </p:childTnLst>
+                                </p:cTn>
+                              </p:par>
+                              <p:par>
+                                <p:cTn id="22" presetID="14" presetClass="entr" presetSubtype="10" fill="hold" nodeType="withEffect">
+                                  <p:stCondLst>
+                                    <p:cond delay="0"/>
+                                  </p:stCondLst>
+                                  <p:childTnLst>
+                                    <p:set>
+                                      <p:cBhvr>
+                                        <p:cTn id="23" dur="1" fill="hold">
+                                          <p:stCondLst>
+                                            <p:cond delay="0"/>
+                                          </p:stCondLst>
+                                        </p:cTn>
+                                        <p:tgtEl>
+                                          <p:spTgt spid="3">
+                                            <p:txEl>
+                                              <p:pRg st="5" end="5"/>
+                                            </p:txEl>
+                                          </p:spTgt>
+                                        </p:tgtEl>
+                                        <p:attrNameLst>
+                                          <p:attrName>style.visibility</p:attrName>
+                                        </p:attrNameLst>
+                                      </p:cBhvr>
+                                      <p:to>
+                                        <p:strVal val="visible"/>
+                                      </p:to>
+                                    </p:set>
+                                    <p:animEffect transition="in" filter="randombar(horizontal)">
+                                      <p:cBhvr>
+                                        <p:cTn id="24" dur="500"/>
+                                        <p:tgtEl>
+                                          <p:spTgt spid="3">
+                                            <p:txEl>
+                                              <p:pRg st="5" end="5"/>
+                                            </p:txEl>
+                                          </p:spTgt>
+                                        </p:tgtEl>
+                                      </p:cBhvr>
+                                    </p:animEffect>
+                                  </p:childTnLst>
+                                </p:cTn>
+                              </p:par>
+                              <p:par>
+                                <p:cTn id="25" presetID="14" presetClass="entr" presetSubtype="10" fill="hold" nodeType="withEffect">
+                                  <p:stCondLst>
+                                    <p:cond delay="0"/>
+                                  </p:stCondLst>
+                                  <p:childTnLst>
+                                    <p:set>
+                                      <p:cBhvr>
+                                        <p:cTn id="26" dur="1" fill="hold">
+                                          <p:stCondLst>
+                                            <p:cond delay="0"/>
+                                          </p:stCondLst>
+                                        </p:cTn>
+                                        <p:tgtEl>
+                                          <p:spTgt spid="3">
+                                            <p:txEl>
+                                              <p:pRg st="6" end="6"/>
+                                            </p:txEl>
+                                          </p:spTgt>
+                                        </p:tgtEl>
+                                        <p:attrNameLst>
+                                          <p:attrName>style.visibility</p:attrName>
+                                        </p:attrNameLst>
+                                      </p:cBhvr>
+                                      <p:to>
+                                        <p:strVal val="visible"/>
+                                      </p:to>
+                                    </p:set>
+                                    <p:animEffect transition="in" filter="randombar(horizontal)">
+                                      <p:cBhvr>
+                                        <p:cTn id="27" dur="500"/>
+                                        <p:tgtEl>
+                                          <p:spTgt spid="3">
+                                            <p:txEl>
+                                              <p:pRg st="6" end="6"/>
+                                            </p:txEl>
+                                          </p:spTgt>
+                                        </p:tgtEl>
+                                      </p:cBhvr>
+                                    </p:animEffect>
+                                  </p:childTnLst>
+                                </p:cTn>
+                              </p:par>
+                            </p:childTnLst>
+                          </p:cTn>
+                        </p:par>
+                      </p:childTnLst>
+                    </p:cTn>
+                  </p:par>
+                  <p:par>
+                    <p:cTn id="28" fill="hold">
+                      <p:stCondLst>
+                        <p:cond delay="indefinite"/>
+                      </p:stCondLst>
+                      <p:childTnLst>
+                        <p:par>
+                          <p:cTn id="29" fill="hold">
+                            <p:stCondLst>
+                              <p:cond delay="0"/>
+                            </p:stCondLst>
+                            <p:childTnLst>
+                              <p:par>
+                                <p:cTn id="30" presetID="14" presetClass="entr" presetSubtype="10" fill="hold" nodeType="clickEffect">
+                                  <p:stCondLst>
+                                    <p:cond delay="0"/>
+                                  </p:stCondLst>
+                                  <p:childTnLst>
+                                    <p:set>
+                                      <p:cBhvr>
+                                        <p:cTn id="31" dur="1" fill="hold">
+                                          <p:stCondLst>
+                                            <p:cond delay="0"/>
+                                          </p:stCondLst>
+                                        </p:cTn>
+                                        <p:tgtEl>
+                                          <p:spTgt spid="3">
+                                            <p:txEl>
+                                              <p:pRg st="7" end="7"/>
+                                            </p:txEl>
+                                          </p:spTgt>
+                                        </p:tgtEl>
+                                        <p:attrNameLst>
+                                          <p:attrName>style.visibility</p:attrName>
+                                        </p:attrNameLst>
+                                      </p:cBhvr>
+                                      <p:to>
+                                        <p:strVal val="visible"/>
+                                      </p:to>
+                                    </p:set>
+                                    <p:animEffect transition="in" filter="randombar(horizontal)">
+                                      <p:cBhvr>
+                                        <p:cTn id="32" dur="500"/>
+                                        <p:tgtEl>
+                                          <p:spTgt spid="3">
+                                            <p:txEl>
+                                              <p:pRg st="7" end="7"/>
+                                            </p:txEl>
+                                          </p:spTgt>
+                                        </p:tgtEl>
+                                      </p:cBhvr>
+                                    </p:animEffect>
+                                  </p:childTnLst>
+                                </p:cTn>
+                              </p:par>
+                              <p:par>
+                                <p:cTn id="33" presetID="14" presetClass="entr" presetSubtype="10" fill="hold" nodeType="withEffect">
+                                  <p:stCondLst>
+                                    <p:cond delay="0"/>
+                                  </p:stCondLst>
+                                  <p:childTnLst>
+                                    <p:set>
+                                      <p:cBhvr>
+                                        <p:cTn id="34" dur="1" fill="hold">
+                                          <p:stCondLst>
+                                            <p:cond delay="0"/>
+                                          </p:stCondLst>
+                                        </p:cTn>
+                                        <p:tgtEl>
+                                          <p:spTgt spid="3">
+                                            <p:txEl>
+                                              <p:pRg st="8" end="8"/>
+                                            </p:txEl>
+                                          </p:spTgt>
+                                        </p:tgtEl>
+                                        <p:attrNameLst>
+                                          <p:attrName>style.visibility</p:attrName>
+                                        </p:attrNameLst>
+                                      </p:cBhvr>
+                                      <p:to>
+                                        <p:strVal val="visible"/>
+                                      </p:to>
+                                    </p:set>
+                                    <p:animEffect transition="in" filter="randombar(horizontal)">
+                                      <p:cBhvr>
+                                        <p:cTn id="35" dur="500"/>
+                                        <p:tgtEl>
+                                          <p:spTgt spid="3">
+                                            <p:txEl>
+                                              <p:pRg st="8" end="8"/>
+                                            </p:txEl>
+                                          </p:spTgt>
+                                        </p:tgtEl>
+                                      </p:cBhvr>
+                                    </p:animEffect>
+                                  </p:childTnLst>
+                                </p:cTn>
+                              </p:par>
+                              <p:par>
+                                <p:cTn id="36" presetID="14" presetClass="entr" presetSubtype="10" fill="hold" nodeType="withEffect">
+                                  <p:stCondLst>
+                                    <p:cond delay="0"/>
+                                  </p:stCondLst>
+                                  <p:childTnLst>
+                                    <p:set>
+                                      <p:cBhvr>
+                                        <p:cTn id="37" dur="1" fill="hold">
+                                          <p:stCondLst>
+                                            <p:cond delay="0"/>
+                                          </p:stCondLst>
+                                        </p:cTn>
+                                        <p:tgtEl>
+                                          <p:spTgt spid="3">
+                                            <p:txEl>
+                                              <p:pRg st="9" end="9"/>
+                                            </p:txEl>
+                                          </p:spTgt>
+                                        </p:tgtEl>
+                                        <p:attrNameLst>
+                                          <p:attrName>style.visibility</p:attrName>
+                                        </p:attrNameLst>
+                                      </p:cBhvr>
+                                      <p:to>
+                                        <p:strVal val="visible"/>
+                                      </p:to>
+                                    </p:set>
+                                    <p:animEffect transition="in" filter="randombar(horizontal)">
+                                      <p:cBhvr>
+                                        <p:cTn id="38" dur="500"/>
+                                        <p:tgtEl>
+                                          <p:spTgt spid="3">
+                                            <p:txEl>
+                                              <p:pRg st="9" end="9"/>
+                                            </p:txEl>
+                                          </p:spTgt>
+                                        </p:tgtEl>
+                                      </p:cBhvr>
+                                    </p:animEffect>
+                                  </p:childTnLst>
+                                </p:cTn>
+                              </p:par>
+                              <p:par>
+                                <p:cTn id="39" presetID="14" presetClass="entr" presetSubtype="10" fill="hold" nodeType="withEffect">
+                                  <p:stCondLst>
+                                    <p:cond delay="0"/>
+                                  </p:stCondLst>
+                                  <p:childTnLst>
+                                    <p:set>
+                                      <p:cBhvr>
+                                        <p:cTn id="40" dur="1" fill="hold">
+                                          <p:stCondLst>
+                                            <p:cond delay="0"/>
+                                          </p:stCondLst>
+                                        </p:cTn>
+                                        <p:tgtEl>
+                                          <p:spTgt spid="3">
+                                            <p:txEl>
+                                              <p:pRg st="10" end="10"/>
+                                            </p:txEl>
+                                          </p:spTgt>
+                                        </p:tgtEl>
+                                        <p:attrNameLst>
+                                          <p:attrName>style.visibility</p:attrName>
+                                        </p:attrNameLst>
+                                      </p:cBhvr>
+                                      <p:to>
+                                        <p:strVal val="visible"/>
+                                      </p:to>
+                                    </p:set>
+                                    <p:animEffect transition="in" filter="randombar(horizontal)">
+                                      <p:cBhvr>
+                                        <p:cTn id="41" dur="500"/>
+                                        <p:tgtEl>
+                                          <p:spTgt spid="3">
+                                            <p:txEl>
+                                              <p:pRg st="10" end="10"/>
+                                            </p:txEl>
+                                          </p:spTgt>
+                                        </p:tgtEl>
+                                      </p:cBhvr>
+                                    </p:animEffect>
+                                  </p:childTnLst>
+                                </p:cTn>
+                              </p:par>
+                            </p:childTnLst>
+                          </p:cTn>
+                        </p:par>
+                      </p:childTnLst>
+                    </p:cTn>
+                  </p:par>
+                </p:childTnLst>
+              </p:cTn>
+              <p:prevCondLst>
+                <p:cond evt="onPrev" delay="0">
+                  <p:tgtEl>
+                    <p:sldTgt/>
+                  </p:tgtEl>
+                </p:cond>
+              </p:prevCondLst>
+              <p:nextCondLst>
+                <p:cond evt="onNext" delay="0">
+                  <p:tgtEl>
+                    <p:sldTgt/>
+                  </p:tgtEl>
+                </p:cond>
+              </p:nextCondLst>
+            </p:seq>
+          </p:childTnLst>
+        </p:cTn>
+      </p:par>
+    </p:tnLst>
+  </p:timing>
+</p:sld>
+</file>
+
+<file path=ppt/slides/slide27.xml><?xml version="1.0" encoding="utf-8"?>
+<p:sld xmlns:a="http://schemas.openxmlformats.org/drawingml/2006/main" xmlns:r="http://schemas.openxmlformats.org/officeDocument/2006/relationships" xmlns:p="http://schemas.openxmlformats.org/presentationml/2006/main">
+  <p:cSld>
+    <p:spTree>
+      <p:nvGrpSpPr>
+        <p:cNvPr id="1" name="">
+          <a:extLst>
+            <a:ext uri="{FF2B5EF4-FFF2-40B4-BE49-F238E27FC236}">
+              <a16:creationId xmlns:a16="http://schemas.microsoft.com/office/drawing/2014/main" id="{1C096763-2499-4BFA-8670-B3703031A15E}"/>
+            </a:ext>
+          </a:extLst>
+        </p:cNvPr>
+        <p:cNvGrpSpPr/>
+        <p:nvPr/>
+      </p:nvGrpSpPr>
+      <p:grpSpPr>
+        <a:xfrm>
+          <a:off x="0" y="0"/>
+          <a:ext cx="0" cy="0"/>
+          <a:chOff x="0" y="0"/>
+          <a:chExt cx="0" cy="0"/>
+        </a:xfrm>
+      </p:grpSpPr>
+      <p:sp>
+        <p:nvSpPr>
+          <p:cNvPr id="2" name="Content Placeholder 1">
+            <a:extLst>
+              <a:ext uri="{FF2B5EF4-FFF2-40B4-BE49-F238E27FC236}">
+                <a16:creationId xmlns:a16="http://schemas.microsoft.com/office/drawing/2014/main" id="{43E45940-5989-BBDA-7851-84547BE24E8B}"/>
+              </a:ext>
+            </a:extLst>
+          </p:cNvPr>
+          <p:cNvSpPr>
+            <a:spLocks noGrp="1"/>
+          </p:cNvSpPr>
+          <p:nvPr>
+            <p:ph sz="half" idx="1"/>
+          </p:nvPr>
+        </p:nvSpPr>
+        <p:spPr>
+          <a:xfrm>
+            <a:off x="904874" y="1563688"/>
+            <a:ext cx="4177079" cy="3263504"/>
+          </a:xfrm>
+        </p:spPr>
+        <p:txBody>
+          <a:bodyPr>
+            <a:normAutofit/>
+          </a:bodyPr>
+          <a:lstStyle/>
+          <a:p>
+            <a:r>
+              <a:rPr lang="en-US" dirty="0">
+                <a:latin typeface="+mj-lt"/>
+              </a:rPr>
+              <a:t>Applications</a:t>
+            </a:r>
+          </a:p>
+          <a:p>
+            <a:pPr lvl="1"/>
+            <a:r>
+              <a:rPr lang="en-US" dirty="0">
+                <a:latin typeface="+mj-lt"/>
+              </a:rPr>
+              <a:t>Journalism</a:t>
+            </a:r>
+          </a:p>
+          <a:p>
+            <a:pPr lvl="1"/>
+            <a:r>
+              <a:rPr lang="en-US" dirty="0">
+                <a:latin typeface="+mj-lt"/>
+              </a:rPr>
+              <a:t>Biomedicine</a:t>
+            </a:r>
+          </a:p>
+          <a:p>
+            <a:pPr lvl="1"/>
+            <a:r>
+              <a:rPr lang="en-US" dirty="0">
+                <a:latin typeface="+mj-lt"/>
+              </a:rPr>
+              <a:t>Social networks</a:t>
+            </a:r>
+          </a:p>
+          <a:p>
+            <a:pPr lvl="1"/>
+            <a:r>
+              <a:rPr lang="en-US" dirty="0">
+                <a:latin typeface="+mj-lt"/>
+              </a:rPr>
+              <a:t>Forensics, security</a:t>
+            </a:r>
+          </a:p>
+          <a:p>
+            <a:pPr lvl="1"/>
+            <a:r>
+              <a:rPr lang="en-US" dirty="0">
+                <a:latin typeface="+mj-lt"/>
+              </a:rPr>
+              <a:t>Telecommunications…</a:t>
+            </a:r>
+          </a:p>
+          <a:p>
+            <a:r>
+              <a:rPr lang="en-US" dirty="0">
+                <a:latin typeface="+mj-lt"/>
+              </a:rPr>
+              <a:t>Monty</a:t>
+            </a:r>
+          </a:p>
+          <a:p>
+            <a:pPr lvl="1"/>
+            <a:r>
+              <a:rPr lang="en-US" dirty="0">
+                <a:latin typeface="+mj-lt"/>
+              </a:rPr>
+              <a:t>Knowledge base of Swisscom</a:t>
+            </a:r>
+          </a:p>
+          <a:p>
+            <a:pPr lvl="1"/>
+            <a:r>
+              <a:rPr lang="en-US" dirty="0">
+                <a:latin typeface="+mj-lt"/>
+              </a:rPr>
+              <a:t>Analyze infrastructure, predict &amp; diagnose defects, aid customer support…</a:t>
+            </a:r>
+          </a:p>
+          <a:p>
+            <a:pPr lvl="1"/>
+            <a:endParaRPr lang="en-US" dirty="0">
+              <a:latin typeface="+mj-lt"/>
+            </a:endParaRPr>
+          </a:p>
+          <a:p>
+            <a:pPr lvl="1"/>
+            <a:endParaRPr lang="en-US" dirty="0">
+              <a:latin typeface="+mj-lt"/>
+            </a:endParaRPr>
+          </a:p>
+          <a:p>
+            <a:pPr lvl="1"/>
+            <a:endParaRPr lang="en-GB" dirty="0">
+              <a:latin typeface="+mj-lt"/>
+            </a:endParaRPr>
+          </a:p>
+        </p:txBody>
+      </p:sp>
+      <p:sp>
+        <p:nvSpPr>
+          <p:cNvPr id="8" name="Title 7">
+            <a:extLst>
+              <a:ext uri="{FF2B5EF4-FFF2-40B4-BE49-F238E27FC236}">
+                <a16:creationId xmlns:a16="http://schemas.microsoft.com/office/drawing/2014/main" id="{819DBEA4-D44A-0617-CD81-99B7FF4B4AE4}"/>
+              </a:ext>
+            </a:extLst>
+          </p:cNvPr>
+          <p:cNvSpPr>
+            <a:spLocks noGrp="1"/>
+          </p:cNvSpPr>
+          <p:nvPr>
+            <p:ph type="title"/>
+          </p:nvPr>
+        </p:nvSpPr>
+        <p:spPr>
+          <a:xfrm>
+            <a:off x="904875" y="131032"/>
+            <a:ext cx="7726363" cy="1072753"/>
+          </a:xfrm>
+        </p:spPr>
+        <p:txBody>
+          <a:bodyPr>
+            <a:normAutofit/>
+          </a:bodyPr>
+          <a:lstStyle/>
+          <a:p>
+            <a:r>
+              <a:rPr lang="en-US" dirty="0"/>
+              <a:t>3.2	Motivation</a:t>
+            </a:r>
+            <a:br>
+              <a:rPr lang="en-US" dirty="0"/>
+            </a:br>
+            <a:r>
+              <a:rPr lang="en-US" sz="2400" b="0" i="1" dirty="0"/>
+              <a:t>Knowledge Graph Reasoning in Industry</a:t>
+            </a:r>
+            <a:endParaRPr lang="en-GB" sz="2400" b="0" i="1" dirty="0"/>
+          </a:p>
+        </p:txBody>
+      </p:sp>
+      <p:sp>
+        <p:nvSpPr>
+          <p:cNvPr id="5" name="Date Placeholder 4">
+            <a:extLst>
+              <a:ext uri="{FF2B5EF4-FFF2-40B4-BE49-F238E27FC236}">
+                <a16:creationId xmlns:a16="http://schemas.microsoft.com/office/drawing/2014/main" id="{29B1E48F-7C2A-3644-CB31-4FA37A28D241}"/>
+              </a:ext>
+            </a:extLst>
+          </p:cNvPr>
+          <p:cNvSpPr>
+            <a:spLocks noGrp="1"/>
+          </p:cNvSpPr>
+          <p:nvPr>
+            <p:ph type="dt" sz="half" idx="10"/>
+          </p:nvPr>
+        </p:nvSpPr>
+        <p:spPr/>
+        <p:txBody>
+          <a:bodyPr/>
+          <a:lstStyle/>
+          <a:p>
+            <a:r>
+              <a:rPr lang="en-US" sz="600" dirty="0">
+                <a:latin typeface="+mj-lt"/>
+              </a:rPr>
+              <a:t>EDIC PhD Private Defense / Scalable Methods for Knowledge Graph Reasoning and Generation</a:t>
+            </a:r>
+          </a:p>
+        </p:txBody>
+      </p:sp>
+      <p:sp>
+        <p:nvSpPr>
+          <p:cNvPr id="6" name="Footer Placeholder 5">
+            <a:extLst>
+              <a:ext uri="{FF2B5EF4-FFF2-40B4-BE49-F238E27FC236}">
+                <a16:creationId xmlns:a16="http://schemas.microsoft.com/office/drawing/2014/main" id="{BB2C8337-F038-4FDD-F305-6BE2914D284D}"/>
+              </a:ext>
+            </a:extLst>
+          </p:cNvPr>
+          <p:cNvSpPr>
+            <a:spLocks noGrp="1"/>
+          </p:cNvSpPr>
+          <p:nvPr>
+            <p:ph type="ftr" sz="quarter" idx="11"/>
+          </p:nvPr>
+        </p:nvSpPr>
+        <p:spPr/>
+        <p:txBody>
+          <a:bodyPr/>
+          <a:lstStyle/>
+          <a:p>
+            <a:r>
+              <a:rPr lang="fr-FR" dirty="0">
+                <a:latin typeface="+mj-lt"/>
+              </a:rPr>
+              <a:t>Andrej Janchevski, EPFL STI IEM LIONS, Lausanne, </a:t>
+            </a:r>
+            <a:r>
+              <a:rPr lang="fr-FR" dirty="0" err="1">
+                <a:latin typeface="+mj-lt"/>
+              </a:rPr>
+              <a:t>Switzerland</a:t>
+            </a:r>
+            <a:r>
+              <a:rPr lang="fr-FR" dirty="0">
+                <a:latin typeface="+mj-lt"/>
+              </a:rPr>
+              <a:t> </a:t>
+            </a:r>
+          </a:p>
+        </p:txBody>
+      </p:sp>
+      <p:sp>
+        <p:nvSpPr>
+          <p:cNvPr id="7" name="Slide Number Placeholder 6">
+            <a:extLst>
+              <a:ext uri="{FF2B5EF4-FFF2-40B4-BE49-F238E27FC236}">
+                <a16:creationId xmlns:a16="http://schemas.microsoft.com/office/drawing/2014/main" id="{4326CA10-E54B-BBA2-EC42-6F210AFB38BE}"/>
+              </a:ext>
+            </a:extLst>
+          </p:cNvPr>
+          <p:cNvSpPr>
+            <a:spLocks noGrp="1"/>
+          </p:cNvSpPr>
+          <p:nvPr>
+            <p:ph type="sldNum" sz="quarter" idx="12"/>
+          </p:nvPr>
+        </p:nvSpPr>
+        <p:spPr/>
+        <p:txBody>
+          <a:bodyPr/>
+          <a:lstStyle/>
+          <a:p>
+            <a:fld id="{E1E1CD7C-2161-7D43-862E-CE4C333CD873}" type="slidenum">
+              <a:rPr lang="fr-FR" smtClean="0"/>
+              <a:pPr/>
+              <a:t>27</a:t>
+            </a:fld>
+            <a:endParaRPr lang="fr-FR" dirty="0"/>
+          </a:p>
+        </p:txBody>
+      </p:sp>
+      <p:pic>
+        <p:nvPicPr>
+          <p:cNvPr id="9" name="Content Placeholder 8">
+            <a:extLst>
+              <a:ext uri="{FF2B5EF4-FFF2-40B4-BE49-F238E27FC236}">
+                <a16:creationId xmlns:a16="http://schemas.microsoft.com/office/drawing/2014/main" id="{64B66164-69EB-020C-2554-FBDE32A160FE}"/>
+              </a:ext>
+            </a:extLst>
+          </p:cNvPr>
+          <p:cNvPicPr>
+            <a:picLocks noGrp="1" noChangeAspect="1" noChangeArrowheads="1"/>
+          </p:cNvPicPr>
+          <p:nvPr>
+            <p:ph sz="half" idx="2"/>
+          </p:nvPr>
+        </p:nvPicPr>
+        <p:blipFill>
+          <a:blip r:embed="rId3">
+            <a:extLst>
+              <a:ext uri="{28A0092B-C50C-407E-A947-70E740481C1C}">
+                <a14:useLocalDpi xmlns:a14="http://schemas.microsoft.com/office/drawing/2010/main" val="0"/>
+              </a:ext>
+            </a:extLst>
+          </a:blip>
+          <a:srcRect/>
+          <a:stretch>
+            <a:fillRect/>
+          </a:stretch>
+        </p:blipFill>
+        <p:spPr bwMode="auto">
+          <a:xfrm>
+            <a:off x="4959350" y="2698403"/>
+            <a:ext cx="3671888" cy="994469"/>
+          </a:xfrm>
+          <a:prstGeom prst="rect">
+            <a:avLst/>
+          </a:prstGeom>
+          <a:noFill/>
+          <a:extLst>
+            <a:ext uri="{909E8E84-426E-40DD-AFC4-6F175D3DCCD1}">
+              <a14:hiddenFill xmlns:a14="http://schemas.microsoft.com/office/drawing/2010/main">
+                <a:solidFill>
+                  <a:srgbClr val="FFFFFF"/>
+                </a:solidFill>
+              </a14:hiddenFill>
+            </a:ext>
+          </a:extLst>
+        </p:spPr>
+      </p:pic>
+    </p:spTree>
+    <p:extLst>
+      <p:ext uri="{BB962C8B-B14F-4D97-AF65-F5344CB8AC3E}">
+        <p14:creationId xmlns:p14="http://schemas.microsoft.com/office/powerpoint/2010/main" val="3095051533"/>
+      </p:ext>
+    </p:extLst>
+  </p:cSld>
+  <p:clrMapOvr>
+    <a:masterClrMapping/>
+  </p:clrMapOvr>
+  <p:timing>
+    <p:tnLst>
+      <p:par>
+        <p:cTn id="1" dur="indefinite" restart="never" nodeType="tmRoot">
+          <p:childTnLst>
+            <p:seq concurrent="1" nextAc="seek">
+              <p:cTn id="2" dur="indefinite" nodeType="mainSeq">
+                <p:childTnLst>
+                  <p:par>
+                    <p:cTn id="3" fill="hold">
+                      <p:stCondLst>
+                        <p:cond delay="indefinite"/>
+                      </p:stCondLst>
+                      <p:childTnLst>
+                        <p:par>
+                          <p:cTn id="4" fill="hold">
+                            <p:stCondLst>
+                              <p:cond delay="0"/>
+                            </p:stCondLst>
+                            <p:childTnLst>
+                              <p:par>
+                                <p:cTn id="5" presetID="14" presetClass="entr" presetSubtype="10" fill="hold" nodeType="clickEffect">
+                                  <p:stCondLst>
+                                    <p:cond delay="0"/>
+                                  </p:stCondLst>
+                                  <p:childTnLst>
+                                    <p:set>
+                                      <p:cBhvr>
+                                        <p:cTn id="6" dur="1" fill="hold">
+                                          <p:stCondLst>
+                                            <p:cond delay="0"/>
+                                          </p:stCondLst>
+                                        </p:cTn>
+                                        <p:tgtEl>
+                                          <p:spTgt spid="2">
+                                            <p:txEl>
+                                              <p:pRg st="0" end="0"/>
+                                            </p:txEl>
+                                          </p:spTgt>
+                                        </p:tgtEl>
+                                        <p:attrNameLst>
+                                          <p:attrName>style.visibility</p:attrName>
+                                        </p:attrNameLst>
+                                      </p:cBhvr>
+                                      <p:to>
+                                        <p:strVal val="visible"/>
+                                      </p:to>
+                                    </p:set>
+                                    <p:animEffect transition="in" filter="randombar(horizontal)">
+                                      <p:cBhvr>
+                                        <p:cTn id="7" dur="500"/>
+                                        <p:tgtEl>
+                                          <p:spTgt spid="2">
+                                            <p:txEl>
+                                              <p:pRg st="0" end="0"/>
+                                            </p:txEl>
+                                          </p:spTgt>
+                                        </p:tgtEl>
+                                      </p:cBhvr>
+                                    </p:animEffect>
+                                  </p:childTnLst>
+                                </p:cTn>
+                              </p:par>
+                              <p:par>
+                                <p:cTn id="8" presetID="14" presetClass="entr" presetSubtype="10" fill="hold" nodeType="withEffect">
+                                  <p:stCondLst>
+                                    <p:cond delay="0"/>
+                                  </p:stCondLst>
+                                  <p:childTnLst>
+                                    <p:set>
+                                      <p:cBhvr>
+                                        <p:cTn id="9" dur="1" fill="hold">
+                                          <p:stCondLst>
+                                            <p:cond delay="0"/>
+                                          </p:stCondLst>
+                                        </p:cTn>
+                                        <p:tgtEl>
+                                          <p:spTgt spid="2">
+                                            <p:txEl>
+                                              <p:pRg st="1" end="1"/>
+                                            </p:txEl>
+                                          </p:spTgt>
+                                        </p:tgtEl>
+                                        <p:attrNameLst>
+                                          <p:attrName>style.visibility</p:attrName>
+                                        </p:attrNameLst>
+                                      </p:cBhvr>
+                                      <p:to>
+                                        <p:strVal val="visible"/>
+                                      </p:to>
+                                    </p:set>
+                                    <p:animEffect transition="in" filter="randombar(horizontal)">
+                                      <p:cBhvr>
+                                        <p:cTn id="10" dur="500"/>
+                                        <p:tgtEl>
+                                          <p:spTgt spid="2">
+                                            <p:txEl>
+                                              <p:pRg st="1" end="1"/>
+                                            </p:txEl>
+                                          </p:spTgt>
+                                        </p:tgtEl>
+                                      </p:cBhvr>
+                                    </p:animEffect>
+                                  </p:childTnLst>
+                                </p:cTn>
+                              </p:par>
+                              <p:par>
+                                <p:cTn id="11" presetID="14" presetClass="entr" presetSubtype="10" fill="hold" nodeType="withEffect">
+                                  <p:stCondLst>
+                                    <p:cond delay="0"/>
+                                  </p:stCondLst>
+                                  <p:childTnLst>
+                                    <p:set>
+                                      <p:cBhvr>
+                                        <p:cTn id="12" dur="1" fill="hold">
+                                          <p:stCondLst>
+                                            <p:cond delay="0"/>
+                                          </p:stCondLst>
+                                        </p:cTn>
+                                        <p:tgtEl>
+                                          <p:spTgt spid="2">
+                                            <p:txEl>
+                                              <p:pRg st="2" end="2"/>
+                                            </p:txEl>
+                                          </p:spTgt>
+                                        </p:tgtEl>
+                                        <p:attrNameLst>
+                                          <p:attrName>style.visibility</p:attrName>
+                                        </p:attrNameLst>
+                                      </p:cBhvr>
+                                      <p:to>
+                                        <p:strVal val="visible"/>
+                                      </p:to>
+                                    </p:set>
+                                    <p:animEffect transition="in" filter="randombar(horizontal)">
+                                      <p:cBhvr>
+                                        <p:cTn id="13" dur="500"/>
+                                        <p:tgtEl>
+                                          <p:spTgt spid="2">
+                                            <p:txEl>
+                                              <p:pRg st="2" end="2"/>
+                                            </p:txEl>
+                                          </p:spTgt>
+                                        </p:tgtEl>
+                                      </p:cBhvr>
+                                    </p:animEffect>
+                                  </p:childTnLst>
+                                </p:cTn>
+                              </p:par>
+                              <p:par>
+                                <p:cTn id="14" presetID="14" presetClass="entr" presetSubtype="10" fill="hold" nodeType="withEffect">
+                                  <p:stCondLst>
+                                    <p:cond delay="0"/>
+                                  </p:stCondLst>
+                                  <p:childTnLst>
+                                    <p:set>
+                                      <p:cBhvr>
+                                        <p:cTn id="15" dur="1" fill="hold">
+                                          <p:stCondLst>
+                                            <p:cond delay="0"/>
+                                          </p:stCondLst>
+                                        </p:cTn>
+                                        <p:tgtEl>
+                                          <p:spTgt spid="2">
+                                            <p:txEl>
+                                              <p:pRg st="3" end="3"/>
+                                            </p:txEl>
+                                          </p:spTgt>
+                                        </p:tgtEl>
+                                        <p:attrNameLst>
+                                          <p:attrName>style.visibility</p:attrName>
+                                        </p:attrNameLst>
+                                      </p:cBhvr>
+                                      <p:to>
+                                        <p:strVal val="visible"/>
+                                      </p:to>
+                                    </p:set>
+                                    <p:animEffect transition="in" filter="randombar(horizontal)">
+                                      <p:cBhvr>
+                                        <p:cTn id="16" dur="500"/>
+                                        <p:tgtEl>
+                                          <p:spTgt spid="2">
+                                            <p:txEl>
+                                              <p:pRg st="3" end="3"/>
+                                            </p:txEl>
+                                          </p:spTgt>
+                                        </p:tgtEl>
+                                      </p:cBhvr>
+                                    </p:animEffect>
+                                  </p:childTnLst>
+                                </p:cTn>
+                              </p:par>
+                              <p:par>
+                                <p:cTn id="17" presetID="14" presetClass="entr" presetSubtype="10" fill="hold" nodeType="withEffect">
+                                  <p:stCondLst>
+                                    <p:cond delay="0"/>
+                                  </p:stCondLst>
+                                  <p:childTnLst>
+                                    <p:set>
+                                      <p:cBhvr>
+                                        <p:cTn id="18" dur="1" fill="hold">
+                                          <p:stCondLst>
+                                            <p:cond delay="0"/>
+                                          </p:stCondLst>
+                                        </p:cTn>
+                                        <p:tgtEl>
+                                          <p:spTgt spid="2">
+                                            <p:txEl>
+                                              <p:pRg st="4" end="4"/>
+                                            </p:txEl>
+                                          </p:spTgt>
+                                        </p:tgtEl>
+                                        <p:attrNameLst>
+                                          <p:attrName>style.visibility</p:attrName>
+                                        </p:attrNameLst>
+                                      </p:cBhvr>
+                                      <p:to>
+                                        <p:strVal val="visible"/>
+                                      </p:to>
+                                    </p:set>
+                                    <p:animEffect transition="in" filter="randombar(horizontal)">
+                                      <p:cBhvr>
+                                        <p:cTn id="19" dur="500"/>
+                                        <p:tgtEl>
+                                          <p:spTgt spid="2">
+                                            <p:txEl>
+                                              <p:pRg st="4" end="4"/>
+                                            </p:txEl>
+                                          </p:spTgt>
+                                        </p:tgtEl>
+                                      </p:cBhvr>
+                                    </p:animEffect>
+                                  </p:childTnLst>
+                                </p:cTn>
+                              </p:par>
+                              <p:par>
+                                <p:cTn id="20" presetID="14" presetClass="entr" presetSubtype="10" fill="hold" nodeType="withEffect">
+                                  <p:stCondLst>
+                                    <p:cond delay="0"/>
+                                  </p:stCondLst>
+                                  <p:childTnLst>
+                                    <p:set>
+                                      <p:cBhvr>
+                                        <p:cTn id="21" dur="1" fill="hold">
+                                          <p:stCondLst>
+                                            <p:cond delay="0"/>
+                                          </p:stCondLst>
+                                        </p:cTn>
+                                        <p:tgtEl>
+                                          <p:spTgt spid="2">
+                                            <p:txEl>
+                                              <p:pRg st="5" end="5"/>
+                                            </p:txEl>
+                                          </p:spTgt>
+                                        </p:tgtEl>
+                                        <p:attrNameLst>
+                                          <p:attrName>style.visibility</p:attrName>
+                                        </p:attrNameLst>
+                                      </p:cBhvr>
+                                      <p:to>
+                                        <p:strVal val="visible"/>
+                                      </p:to>
+                                    </p:set>
+                                    <p:animEffect transition="in" filter="randombar(horizontal)">
+                                      <p:cBhvr>
+                                        <p:cTn id="22" dur="500"/>
+                                        <p:tgtEl>
+                                          <p:spTgt spid="2">
+                                            <p:txEl>
+                                              <p:pRg st="5" end="5"/>
+                                            </p:txEl>
+                                          </p:spTgt>
+                                        </p:tgtEl>
+                                      </p:cBhvr>
+                                    </p:animEffect>
+                                  </p:childTnLst>
+                                </p:cTn>
+                              </p:par>
+                            </p:childTnLst>
+                          </p:cTn>
+                        </p:par>
+                      </p:childTnLst>
+                    </p:cTn>
+                  </p:par>
+                  <p:par>
+                    <p:cTn id="23" fill="hold">
+                      <p:stCondLst>
+                        <p:cond delay="indefinite"/>
+                      </p:stCondLst>
+                      <p:childTnLst>
+                        <p:par>
+                          <p:cTn id="24" fill="hold">
+                            <p:stCondLst>
+                              <p:cond delay="0"/>
+                            </p:stCondLst>
+                            <p:childTnLst>
+                              <p:par>
+                                <p:cTn id="25" presetID="14" presetClass="entr" presetSubtype="10" fill="hold" nodeType="clickEffect">
+                                  <p:stCondLst>
+                                    <p:cond delay="0"/>
+                                  </p:stCondLst>
+                                  <p:childTnLst>
+                                    <p:set>
+                                      <p:cBhvr>
+                                        <p:cTn id="26" dur="1" fill="hold">
+                                          <p:stCondLst>
+                                            <p:cond delay="0"/>
+                                          </p:stCondLst>
+                                        </p:cTn>
+                                        <p:tgtEl>
+                                          <p:spTgt spid="2">
+                                            <p:txEl>
+                                              <p:pRg st="6" end="6"/>
+                                            </p:txEl>
+                                          </p:spTgt>
+                                        </p:tgtEl>
+                                        <p:attrNameLst>
+                                          <p:attrName>style.visibility</p:attrName>
+                                        </p:attrNameLst>
+                                      </p:cBhvr>
+                                      <p:to>
+                                        <p:strVal val="visible"/>
+                                      </p:to>
+                                    </p:set>
+                                    <p:animEffect transition="in" filter="randombar(horizontal)">
+                                      <p:cBhvr>
+                                        <p:cTn id="27" dur="500"/>
+                                        <p:tgtEl>
+                                          <p:spTgt spid="2">
+                                            <p:txEl>
+                                              <p:pRg st="6" end="6"/>
+                                            </p:txEl>
+                                          </p:spTgt>
+                                        </p:tgtEl>
+                                      </p:cBhvr>
+                                    </p:animEffect>
+                                  </p:childTnLst>
+                                </p:cTn>
+                              </p:par>
+                              <p:par>
+                                <p:cTn id="28" presetID="14" presetClass="entr" presetSubtype="10" fill="hold" nodeType="withEffect">
+                                  <p:stCondLst>
+                                    <p:cond delay="0"/>
+                                  </p:stCondLst>
+                                  <p:childTnLst>
+                                    <p:set>
+                                      <p:cBhvr>
+                                        <p:cTn id="29" dur="1" fill="hold">
+                                          <p:stCondLst>
+                                            <p:cond delay="0"/>
+                                          </p:stCondLst>
+                                        </p:cTn>
+                                        <p:tgtEl>
+                                          <p:spTgt spid="2">
+                                            <p:txEl>
+                                              <p:pRg st="7" end="7"/>
+                                            </p:txEl>
+                                          </p:spTgt>
+                                        </p:tgtEl>
+                                        <p:attrNameLst>
+                                          <p:attrName>style.visibility</p:attrName>
+                                        </p:attrNameLst>
+                                      </p:cBhvr>
+                                      <p:to>
+                                        <p:strVal val="visible"/>
+                                      </p:to>
+                                    </p:set>
+                                    <p:animEffect transition="in" filter="randombar(horizontal)">
+                                      <p:cBhvr>
+                                        <p:cTn id="30" dur="500"/>
+                                        <p:tgtEl>
+                                          <p:spTgt spid="2">
+                                            <p:txEl>
+                                              <p:pRg st="7" end="7"/>
+                                            </p:txEl>
+                                          </p:spTgt>
+                                        </p:tgtEl>
+                                      </p:cBhvr>
+                                    </p:animEffect>
+                                  </p:childTnLst>
+                                </p:cTn>
+                              </p:par>
+                              <p:par>
+                                <p:cTn id="31" presetID="14" presetClass="entr" presetSubtype="10" fill="hold" nodeType="withEffect">
+                                  <p:stCondLst>
+                                    <p:cond delay="0"/>
+                                  </p:stCondLst>
+                                  <p:childTnLst>
+                                    <p:set>
+                                      <p:cBhvr>
+                                        <p:cTn id="32" dur="1" fill="hold">
+                                          <p:stCondLst>
+                                            <p:cond delay="0"/>
+                                          </p:stCondLst>
+                                        </p:cTn>
+                                        <p:tgtEl>
+                                          <p:spTgt spid="2">
+                                            <p:txEl>
+                                              <p:pRg st="8" end="8"/>
+                                            </p:txEl>
+                                          </p:spTgt>
+                                        </p:tgtEl>
+                                        <p:attrNameLst>
+                                          <p:attrName>style.visibility</p:attrName>
+                                        </p:attrNameLst>
+                                      </p:cBhvr>
+                                      <p:to>
+                                        <p:strVal val="visible"/>
+                                      </p:to>
+                                    </p:set>
+                                    <p:animEffect transition="in" filter="randombar(horizontal)">
+                                      <p:cBhvr>
+                                        <p:cTn id="33" dur="500"/>
+                                        <p:tgtEl>
+                                          <p:spTgt spid="2">
+                                            <p:txEl>
+                                              <p:pRg st="8" end="8"/>
+                                            </p:txEl>
+                                          </p:spTgt>
+                                        </p:tgtEl>
+                                      </p:cBhvr>
+                                    </p:animEffect>
+                                  </p:childTnLst>
+                                </p:cTn>
+                              </p:par>
+                              <p:par>
+                                <p:cTn id="34" presetID="14" presetClass="entr" presetSubtype="10" fill="hold" nodeType="withEffect">
+                                  <p:stCondLst>
+                                    <p:cond delay="0"/>
+                                  </p:stCondLst>
+                                  <p:childTnLst>
+                                    <p:set>
+                                      <p:cBhvr>
+                                        <p:cTn id="35" dur="1" fill="hold">
+                                          <p:stCondLst>
+                                            <p:cond delay="0"/>
+                                          </p:stCondLst>
+                                        </p:cTn>
+                                        <p:tgtEl>
+                                          <p:spTgt spid="9"/>
+                                        </p:tgtEl>
+                                        <p:attrNameLst>
+                                          <p:attrName>style.visibility</p:attrName>
+                                        </p:attrNameLst>
+                                      </p:cBhvr>
+                                      <p:to>
+                                        <p:strVal val="visible"/>
+                                      </p:to>
+                                    </p:set>
+                                    <p:animEffect transition="in" filter="randombar(horizontal)">
+                                      <p:cBhvr>
+                                        <p:cTn id="36" dur="500"/>
+                                        <p:tgtEl>
+                                          <p:spTgt spid="9"/>
+                                        </p:tgtEl>
+                                      </p:cBhvr>
+                                    </p:animEffect>
+                                  </p:childTnLst>
+                                </p:cTn>
+                              </p:par>
+                            </p:childTnLst>
+                          </p:cTn>
+                        </p:par>
+                      </p:childTnLst>
+                    </p:cTn>
+                  </p:par>
+                </p:childTnLst>
+              </p:cTn>
+              <p:prevCondLst>
+                <p:cond evt="onPrev" delay="0">
+                  <p:tgtEl>
+                    <p:sldTgt/>
+                  </p:tgtEl>
+                </p:cond>
+              </p:prevCondLst>
+              <p:nextCondLst>
+                <p:cond evt="onNext" delay="0">
+                  <p:tgtEl>
+                    <p:sldTgt/>
+                  </p:tgtEl>
+                </p:cond>
+              </p:nextCondLst>
+            </p:seq>
+          </p:childTnLst>
+        </p:cTn>
+      </p:par>
+    </p:tnLst>
+  </p:timing>
+</p:sld>
+</file>
+
+<file path=ppt/slides/slide28.xml><?xml version="1.0" encoding="utf-8"?>
+<p:sld xmlns:a="http://schemas.openxmlformats.org/drawingml/2006/main" xmlns:r="http://schemas.openxmlformats.org/officeDocument/2006/relationships" xmlns:p="http://schemas.openxmlformats.org/presentationml/2006/main">
+  <p:cSld>
+    <p:spTree>
+      <p:nvGrpSpPr>
+        <p:cNvPr id="1" name="">
+          <a:extLst>
+            <a:ext uri="{FF2B5EF4-FFF2-40B4-BE49-F238E27FC236}">
+              <a16:creationId xmlns:a16="http://schemas.microsoft.com/office/drawing/2014/main" id="{FF9A3BFE-4C0D-3CF3-6A21-E8A253594831}"/>
+            </a:ext>
+          </a:extLst>
+        </p:cNvPr>
+        <p:cNvGrpSpPr/>
+        <p:nvPr/>
+      </p:nvGrpSpPr>
+      <p:grpSpPr>
+        <a:xfrm>
+          <a:off x="0" y="0"/>
+          <a:ext cx="0" cy="0"/>
+          <a:chOff x="0" y="0"/>
+          <a:chExt cx="0" cy="0"/>
+        </a:xfrm>
+      </p:grpSpPr>
+      <p:sp>
+        <p:nvSpPr>
+          <p:cNvPr id="2" name="Content Placeholder 1">
+            <a:extLst>
+              <a:ext uri="{FF2B5EF4-FFF2-40B4-BE49-F238E27FC236}">
+                <a16:creationId xmlns:a16="http://schemas.microsoft.com/office/drawing/2014/main" id="{C8877CD0-814C-0595-8F7B-07CE78A86B4E}"/>
+              </a:ext>
+            </a:extLst>
+          </p:cNvPr>
+          <p:cNvSpPr>
+            <a:spLocks noGrp="1"/>
+          </p:cNvSpPr>
+          <p:nvPr>
+            <p:ph sz="half" idx="1"/>
+          </p:nvPr>
+        </p:nvSpPr>
+        <p:spPr>
+          <a:xfrm>
+            <a:off x="904874" y="1563688"/>
+            <a:ext cx="4054475" cy="3263504"/>
+          </a:xfrm>
+        </p:spPr>
+        <p:txBody>
+          <a:bodyPr>
+            <a:normAutofit/>
+          </a:bodyPr>
+          <a:lstStyle/>
+          <a:p>
+            <a:r>
+              <a:rPr lang="en-US" dirty="0">
+                <a:latin typeface="+mj-lt"/>
+              </a:rPr>
+              <a:t>History of COINs</a:t>
+            </a:r>
+          </a:p>
+          <a:p>
+            <a:pPr lvl="1"/>
+            <a:r>
+              <a:rPr lang="en-US" dirty="0">
+                <a:latin typeface="+mj-lt"/>
+              </a:rPr>
+              <a:t>First version successful on Monty samples</a:t>
+            </a:r>
+          </a:p>
+          <a:p>
+            <a:pPr lvl="1"/>
+            <a:r>
+              <a:rPr lang="en-US" dirty="0">
+                <a:latin typeface="+mj-lt"/>
+              </a:rPr>
+              <a:t>Weak generalization to public data</a:t>
+            </a:r>
+          </a:p>
+          <a:p>
+            <a:pPr marL="342900" lvl="1" indent="0">
+              <a:buNone/>
+            </a:pPr>
+            <a:endParaRPr lang="en-US" dirty="0">
+              <a:latin typeface="+mj-lt"/>
+            </a:endParaRPr>
+          </a:p>
+          <a:p>
+            <a:pPr marL="342900" lvl="1" indent="0">
+              <a:buNone/>
+            </a:pPr>
+            <a:endParaRPr lang="en-US" dirty="0">
+              <a:latin typeface="+mj-lt"/>
+            </a:endParaRPr>
+          </a:p>
+          <a:p>
+            <a:r>
+              <a:rPr lang="en-US" dirty="0">
+                <a:latin typeface="+mj-lt"/>
+              </a:rPr>
+              <a:t>Need to answer: Why?</a:t>
+            </a:r>
+          </a:p>
+          <a:p>
+            <a:pPr lvl="1"/>
+            <a:r>
+              <a:rPr lang="en-US" dirty="0">
+                <a:latin typeface="+mj-lt"/>
+              </a:rPr>
+              <a:t>Detailed report with comparison between Monty and KGs from many other domains</a:t>
+            </a:r>
+          </a:p>
+          <a:p>
+            <a:pPr lvl="1"/>
+            <a:r>
+              <a:rPr lang="en-US" dirty="0">
+                <a:latin typeface="+mj-lt"/>
+              </a:rPr>
+              <a:t>Model ablation and re-evaluation</a:t>
+            </a:r>
+          </a:p>
+          <a:p>
+            <a:pPr lvl="1"/>
+            <a:endParaRPr lang="en-US" dirty="0">
+              <a:latin typeface="+mj-lt"/>
+            </a:endParaRPr>
+          </a:p>
+          <a:p>
+            <a:pPr lvl="1"/>
+            <a:endParaRPr lang="en-US" dirty="0">
+              <a:latin typeface="+mj-lt"/>
+            </a:endParaRPr>
+          </a:p>
+          <a:p>
+            <a:pPr lvl="1"/>
+            <a:endParaRPr lang="en-US" dirty="0">
+              <a:latin typeface="+mj-lt"/>
+            </a:endParaRPr>
+          </a:p>
+          <a:p>
+            <a:pPr lvl="1"/>
+            <a:endParaRPr lang="en-GB" dirty="0">
+              <a:latin typeface="+mj-lt"/>
+            </a:endParaRPr>
+          </a:p>
+        </p:txBody>
+      </p:sp>
+      <p:sp>
+        <p:nvSpPr>
+          <p:cNvPr id="8" name="Title 7">
+            <a:extLst>
+              <a:ext uri="{FF2B5EF4-FFF2-40B4-BE49-F238E27FC236}">
+                <a16:creationId xmlns:a16="http://schemas.microsoft.com/office/drawing/2014/main" id="{6DA7F738-4375-67C1-5DB6-EE361AFBF6E5}"/>
+              </a:ext>
+            </a:extLst>
+          </p:cNvPr>
+          <p:cNvSpPr>
+            <a:spLocks noGrp="1"/>
+          </p:cNvSpPr>
+          <p:nvPr>
+            <p:ph type="title"/>
+          </p:nvPr>
+        </p:nvSpPr>
+        <p:spPr>
+          <a:xfrm>
+            <a:off x="904875" y="131032"/>
+            <a:ext cx="7726363" cy="1072753"/>
+          </a:xfrm>
+        </p:spPr>
+        <p:txBody>
+          <a:bodyPr>
+            <a:normAutofit/>
+          </a:bodyPr>
+          <a:lstStyle/>
+          <a:p>
+            <a:r>
+              <a:rPr lang="en-US" dirty="0"/>
+              <a:t>3.2	Motivation</a:t>
+            </a:r>
+            <a:br>
+              <a:rPr lang="en-US" dirty="0"/>
+            </a:br>
+            <a:r>
+              <a:rPr lang="en-US" sz="2400" b="0" i="1" dirty="0"/>
+              <a:t>COINs origins</a:t>
+            </a:r>
+            <a:endParaRPr lang="en-GB" sz="2400" b="0" i="1" dirty="0"/>
+          </a:p>
+        </p:txBody>
+      </p:sp>
+      <p:sp>
+        <p:nvSpPr>
+          <p:cNvPr id="5" name="Date Placeholder 4">
+            <a:extLst>
+              <a:ext uri="{FF2B5EF4-FFF2-40B4-BE49-F238E27FC236}">
+                <a16:creationId xmlns:a16="http://schemas.microsoft.com/office/drawing/2014/main" id="{A3BC50A3-F954-A955-9239-33923111E116}"/>
+              </a:ext>
+            </a:extLst>
+          </p:cNvPr>
+          <p:cNvSpPr>
+            <a:spLocks noGrp="1"/>
+          </p:cNvSpPr>
+          <p:nvPr>
+            <p:ph type="dt" sz="half" idx="10"/>
+          </p:nvPr>
+        </p:nvSpPr>
+        <p:spPr/>
+        <p:txBody>
+          <a:bodyPr/>
+          <a:lstStyle/>
+          <a:p>
+            <a:r>
+              <a:rPr lang="en-US" sz="600" dirty="0">
+                <a:latin typeface="+mj-lt"/>
+              </a:rPr>
+              <a:t>EDIC PhD Private Defense / Scalable Methods for Knowledge Graph Reasoning and Generation</a:t>
+            </a:r>
+          </a:p>
+        </p:txBody>
+      </p:sp>
+      <p:sp>
+        <p:nvSpPr>
+          <p:cNvPr id="6" name="Footer Placeholder 5">
+            <a:extLst>
+              <a:ext uri="{FF2B5EF4-FFF2-40B4-BE49-F238E27FC236}">
+                <a16:creationId xmlns:a16="http://schemas.microsoft.com/office/drawing/2014/main" id="{9F3016CF-A00A-54B3-9869-4024BAE8F5E4}"/>
+              </a:ext>
+            </a:extLst>
+          </p:cNvPr>
+          <p:cNvSpPr>
+            <a:spLocks noGrp="1"/>
+          </p:cNvSpPr>
+          <p:nvPr>
+            <p:ph type="ftr" sz="quarter" idx="11"/>
+          </p:nvPr>
+        </p:nvSpPr>
+        <p:spPr/>
+        <p:txBody>
+          <a:bodyPr/>
+          <a:lstStyle/>
+          <a:p>
+            <a:r>
+              <a:rPr lang="fr-FR" dirty="0">
+                <a:latin typeface="+mj-lt"/>
+              </a:rPr>
+              <a:t>Andrej Janchevski, EPFL STI IEM LIONS, Lausanne, </a:t>
+            </a:r>
+            <a:r>
+              <a:rPr lang="fr-FR" dirty="0" err="1">
+                <a:latin typeface="+mj-lt"/>
+              </a:rPr>
+              <a:t>Switzerland</a:t>
+            </a:r>
+            <a:r>
+              <a:rPr lang="fr-FR" dirty="0">
+                <a:latin typeface="+mj-lt"/>
+              </a:rPr>
+              <a:t> </a:t>
+            </a:r>
+          </a:p>
+        </p:txBody>
+      </p:sp>
+      <p:sp>
+        <p:nvSpPr>
+          <p:cNvPr id="7" name="Slide Number Placeholder 6">
+            <a:extLst>
+              <a:ext uri="{FF2B5EF4-FFF2-40B4-BE49-F238E27FC236}">
+                <a16:creationId xmlns:a16="http://schemas.microsoft.com/office/drawing/2014/main" id="{2E9140BC-9C63-860E-1980-621BDC2FB501}"/>
+              </a:ext>
+            </a:extLst>
+          </p:cNvPr>
+          <p:cNvSpPr>
+            <a:spLocks noGrp="1"/>
+          </p:cNvSpPr>
+          <p:nvPr>
+            <p:ph type="sldNum" sz="quarter" idx="12"/>
+          </p:nvPr>
+        </p:nvSpPr>
+        <p:spPr/>
+        <p:txBody>
+          <a:bodyPr/>
+          <a:lstStyle/>
+          <a:p>
+            <a:fld id="{E1E1CD7C-2161-7D43-862E-CE4C333CD873}" type="slidenum">
+              <a:rPr lang="fr-FR" smtClean="0"/>
+              <a:pPr/>
+              <a:t>28</a:t>
+            </a:fld>
+            <a:endParaRPr lang="fr-FR" dirty="0"/>
+          </a:p>
+        </p:txBody>
+      </p:sp>
+      <p:pic>
+        <p:nvPicPr>
+          <p:cNvPr id="9" name="Content Placeholder 8">
+            <a:extLst>
+              <a:ext uri="{FF2B5EF4-FFF2-40B4-BE49-F238E27FC236}">
+                <a16:creationId xmlns:a16="http://schemas.microsoft.com/office/drawing/2014/main" id="{B9B6C7F7-6992-22AF-6263-A71CAFBB1CCE}"/>
+              </a:ext>
+            </a:extLst>
+          </p:cNvPr>
+          <p:cNvPicPr>
+            <a:picLocks noGrp="1" noChangeAspect="1" noChangeArrowheads="1"/>
+          </p:cNvPicPr>
+          <p:nvPr>
+            <p:ph sz="half" idx="2"/>
+          </p:nvPr>
+        </p:nvPicPr>
+        <p:blipFill>
+          <a:blip r:embed="rId3">
+            <a:extLst>
+              <a:ext uri="{28A0092B-C50C-407E-A947-70E740481C1C}">
+                <a14:useLocalDpi xmlns:a14="http://schemas.microsoft.com/office/drawing/2010/main" val="0"/>
+              </a:ext>
+            </a:extLst>
+          </a:blip>
+          <a:srcRect/>
+          <a:stretch>
+            <a:fillRect/>
+          </a:stretch>
+        </p:blipFill>
+        <p:spPr bwMode="auto">
+          <a:xfrm>
+            <a:off x="4959350" y="2698403"/>
+            <a:ext cx="3671888" cy="994469"/>
+          </a:xfrm>
+          <a:prstGeom prst="rect">
+            <a:avLst/>
+          </a:prstGeom>
+          <a:noFill/>
+          <a:extLst>
+            <a:ext uri="{909E8E84-426E-40DD-AFC4-6F175D3DCCD1}">
+              <a14:hiddenFill xmlns:a14="http://schemas.microsoft.com/office/drawing/2010/main">
+                <a:solidFill>
+                  <a:srgbClr val="FFFFFF"/>
+                </a:solidFill>
+              </a14:hiddenFill>
+            </a:ext>
+          </a:extLst>
+        </p:spPr>
+      </p:pic>
+    </p:spTree>
+    <p:extLst>
+      <p:ext uri="{BB962C8B-B14F-4D97-AF65-F5344CB8AC3E}">
+        <p14:creationId xmlns:p14="http://schemas.microsoft.com/office/powerpoint/2010/main" val="2849033799"/>
+      </p:ext>
+    </p:extLst>
+  </p:cSld>
+  <p:clrMapOvr>
+    <a:masterClrMapping/>
+  </p:clrMapOvr>
+  <p:timing>
+    <p:tnLst>
+      <p:par>
+        <p:cTn id="1" dur="indefinite" restart="never" nodeType="tmRoot">
+          <p:childTnLst>
+            <p:seq concurrent="1" nextAc="seek">
+              <p:cTn id="2" dur="indefinite" nodeType="mainSeq">
+                <p:childTnLst>
+                  <p:par>
+                    <p:cTn id="3" fill="hold">
+                      <p:stCondLst>
+                        <p:cond delay="indefinite"/>
+                      </p:stCondLst>
+                      <p:childTnLst>
+                        <p:par>
+                          <p:cTn id="4" fill="hold">
+                            <p:stCondLst>
+                              <p:cond delay="0"/>
+                            </p:stCondLst>
+                            <p:childTnLst>
+                              <p:par>
+                                <p:cTn id="5" presetID="14" presetClass="entr" presetSubtype="10" fill="hold" nodeType="clickEffect">
+                                  <p:stCondLst>
+                                    <p:cond delay="0"/>
+                                  </p:stCondLst>
+                                  <p:childTnLst>
+                                    <p:set>
+                                      <p:cBhvr>
+                                        <p:cTn id="6" dur="1" fill="hold">
+                                          <p:stCondLst>
+                                            <p:cond delay="0"/>
+                                          </p:stCondLst>
+                                        </p:cTn>
+                                        <p:tgtEl>
+                                          <p:spTgt spid="2">
+                                            <p:txEl>
+                                              <p:pRg st="0" end="0"/>
+                                            </p:txEl>
+                                          </p:spTgt>
+                                        </p:tgtEl>
+                                        <p:attrNameLst>
+                                          <p:attrName>style.visibility</p:attrName>
+                                        </p:attrNameLst>
+                                      </p:cBhvr>
+                                      <p:to>
+                                        <p:strVal val="visible"/>
+                                      </p:to>
+                                    </p:set>
+                                    <p:animEffect transition="in" filter="randombar(horizontal)">
+                                      <p:cBhvr>
+                                        <p:cTn id="7" dur="500"/>
+                                        <p:tgtEl>
+                                          <p:spTgt spid="2">
+                                            <p:txEl>
+                                              <p:pRg st="0" end="0"/>
+                                            </p:txEl>
+                                          </p:spTgt>
+                                        </p:tgtEl>
+                                      </p:cBhvr>
+                                    </p:animEffect>
+                                  </p:childTnLst>
+                                </p:cTn>
+                              </p:par>
+                              <p:par>
+                                <p:cTn id="8" presetID="14" presetClass="entr" presetSubtype="10" fill="hold" nodeType="withEffect">
+                                  <p:stCondLst>
+                                    <p:cond delay="0"/>
+                                  </p:stCondLst>
+                                  <p:childTnLst>
+                                    <p:set>
+                                      <p:cBhvr>
+                                        <p:cTn id="9" dur="1" fill="hold">
+                                          <p:stCondLst>
+                                            <p:cond delay="0"/>
+                                          </p:stCondLst>
+                                        </p:cTn>
+                                        <p:tgtEl>
+                                          <p:spTgt spid="2">
+                                            <p:txEl>
+                                              <p:pRg st="1" end="1"/>
+                                            </p:txEl>
+                                          </p:spTgt>
+                                        </p:tgtEl>
+                                        <p:attrNameLst>
+                                          <p:attrName>style.visibility</p:attrName>
+                                        </p:attrNameLst>
+                                      </p:cBhvr>
+                                      <p:to>
+                                        <p:strVal val="visible"/>
+                                      </p:to>
+                                    </p:set>
+                                    <p:animEffect transition="in" filter="randombar(horizontal)">
+                                      <p:cBhvr>
+                                        <p:cTn id="10" dur="500"/>
+                                        <p:tgtEl>
+                                          <p:spTgt spid="2">
+                                            <p:txEl>
+                                              <p:pRg st="1" end="1"/>
+                                            </p:txEl>
+                                          </p:spTgt>
+                                        </p:tgtEl>
+                                      </p:cBhvr>
+                                    </p:animEffect>
+                                  </p:childTnLst>
+                                </p:cTn>
+                              </p:par>
+                              <p:par>
+                                <p:cTn id="11" presetID="14" presetClass="entr" presetSubtype="10" fill="hold" nodeType="withEffect">
+                                  <p:stCondLst>
+                                    <p:cond delay="0"/>
+                                  </p:stCondLst>
+                                  <p:childTnLst>
+                                    <p:set>
+                                      <p:cBhvr>
+                                        <p:cTn id="12" dur="1" fill="hold">
+                                          <p:stCondLst>
+                                            <p:cond delay="0"/>
+                                          </p:stCondLst>
+                                        </p:cTn>
+                                        <p:tgtEl>
+                                          <p:spTgt spid="2">
+                                            <p:txEl>
+                                              <p:pRg st="2" end="2"/>
+                                            </p:txEl>
+                                          </p:spTgt>
+                                        </p:tgtEl>
+                                        <p:attrNameLst>
+                                          <p:attrName>style.visibility</p:attrName>
+                                        </p:attrNameLst>
+                                      </p:cBhvr>
+                                      <p:to>
+                                        <p:strVal val="visible"/>
+                                      </p:to>
+                                    </p:set>
+                                    <p:animEffect transition="in" filter="randombar(horizontal)">
+                                      <p:cBhvr>
+                                        <p:cTn id="13" dur="500"/>
+                                        <p:tgtEl>
+                                          <p:spTgt spid="2">
+                                            <p:txEl>
+                                              <p:pRg st="2" end="2"/>
+                                            </p:txEl>
+                                          </p:spTgt>
+                                        </p:tgtEl>
+                                      </p:cBhvr>
+                                    </p:animEffect>
+                                  </p:childTnLst>
+                                </p:cTn>
+                              </p:par>
+                            </p:childTnLst>
+                          </p:cTn>
+                        </p:par>
+                      </p:childTnLst>
+                    </p:cTn>
+                  </p:par>
+                  <p:par>
+                    <p:cTn id="14" fill="hold">
+                      <p:stCondLst>
+                        <p:cond delay="indefinite"/>
+                      </p:stCondLst>
+                      <p:childTnLst>
+                        <p:par>
+                          <p:cTn id="15" fill="hold">
+                            <p:stCondLst>
+                              <p:cond delay="0"/>
+                            </p:stCondLst>
+                            <p:childTnLst>
+                              <p:par>
+                                <p:cTn id="16" presetID="14" presetClass="entr" presetSubtype="10" fill="hold" nodeType="clickEffect">
+                                  <p:stCondLst>
+                                    <p:cond delay="0"/>
+                                  </p:stCondLst>
+                                  <p:childTnLst>
+                                    <p:set>
+                                      <p:cBhvr>
+                                        <p:cTn id="17" dur="1" fill="hold">
+                                          <p:stCondLst>
+                                            <p:cond delay="0"/>
+                                          </p:stCondLst>
+                                        </p:cTn>
+                                        <p:tgtEl>
+                                          <p:spTgt spid="2">
+                                            <p:txEl>
+                                              <p:pRg st="5" end="5"/>
+                                            </p:txEl>
+                                          </p:spTgt>
+                                        </p:tgtEl>
+                                        <p:attrNameLst>
+                                          <p:attrName>style.visibility</p:attrName>
+                                        </p:attrNameLst>
+                                      </p:cBhvr>
+                                      <p:to>
+                                        <p:strVal val="visible"/>
+                                      </p:to>
+                                    </p:set>
+                                    <p:animEffect transition="in" filter="randombar(horizontal)">
+                                      <p:cBhvr>
+                                        <p:cTn id="18" dur="500"/>
+                                        <p:tgtEl>
+                                          <p:spTgt spid="2">
+                                            <p:txEl>
+                                              <p:pRg st="5" end="5"/>
+                                            </p:txEl>
+                                          </p:spTgt>
+                                        </p:tgtEl>
+                                      </p:cBhvr>
+                                    </p:animEffect>
+                                  </p:childTnLst>
+                                </p:cTn>
+                              </p:par>
+                              <p:par>
+                                <p:cTn id="19" presetID="14" presetClass="entr" presetSubtype="10" fill="hold" nodeType="withEffect">
+                                  <p:stCondLst>
+                                    <p:cond delay="0"/>
+                                  </p:stCondLst>
+                                  <p:childTnLst>
+                                    <p:set>
+                                      <p:cBhvr>
+                                        <p:cTn id="20" dur="1" fill="hold">
+                                          <p:stCondLst>
+                                            <p:cond delay="0"/>
+                                          </p:stCondLst>
+                                        </p:cTn>
+                                        <p:tgtEl>
+                                          <p:spTgt spid="2">
+                                            <p:txEl>
+                                              <p:pRg st="6" end="6"/>
+                                            </p:txEl>
+                                          </p:spTgt>
+                                        </p:tgtEl>
+                                        <p:attrNameLst>
+                                          <p:attrName>style.visibility</p:attrName>
+                                        </p:attrNameLst>
+                                      </p:cBhvr>
+                                      <p:to>
+                                        <p:strVal val="visible"/>
+                                      </p:to>
+                                    </p:set>
+                                    <p:animEffect transition="in" filter="randombar(horizontal)">
+                                      <p:cBhvr>
+                                        <p:cTn id="21" dur="500"/>
+                                        <p:tgtEl>
+                                          <p:spTgt spid="2">
+                                            <p:txEl>
+                                              <p:pRg st="6" end="6"/>
+                                            </p:txEl>
+                                          </p:spTgt>
+                                        </p:tgtEl>
+                                      </p:cBhvr>
+                                    </p:animEffect>
+                                  </p:childTnLst>
+                                </p:cTn>
+                              </p:par>
+                              <p:par>
+                                <p:cTn id="22" presetID="14" presetClass="entr" presetSubtype="10" fill="hold" nodeType="withEffect">
+                                  <p:stCondLst>
+                                    <p:cond delay="0"/>
+                                  </p:stCondLst>
+                                  <p:childTnLst>
+                                    <p:set>
+                                      <p:cBhvr>
+                                        <p:cTn id="23" dur="1" fill="hold">
+                                          <p:stCondLst>
+                                            <p:cond delay="0"/>
+                                          </p:stCondLst>
+                                        </p:cTn>
+                                        <p:tgtEl>
+                                          <p:spTgt spid="2">
+                                            <p:txEl>
+                                              <p:pRg st="7" end="7"/>
+                                            </p:txEl>
+                                          </p:spTgt>
+                                        </p:tgtEl>
+                                        <p:attrNameLst>
+                                          <p:attrName>style.visibility</p:attrName>
+                                        </p:attrNameLst>
+                                      </p:cBhvr>
+                                      <p:to>
+                                        <p:strVal val="visible"/>
+                                      </p:to>
+                                    </p:set>
+                                    <p:animEffect transition="in" filter="randombar(horizontal)">
+                                      <p:cBhvr>
+                                        <p:cTn id="24" dur="500"/>
+                                        <p:tgtEl>
+                                          <p:spTgt spid="2">
+                                            <p:txEl>
+                                              <p:pRg st="7" end="7"/>
+                                            </p:txEl>
+                                          </p:spTgt>
+                                        </p:tgtEl>
+                                      </p:cBhvr>
+                                    </p:animEffect>
+                                  </p:childTnLst>
+                                </p:cTn>
+                              </p:par>
+                            </p:childTnLst>
+                          </p:cTn>
+                        </p:par>
+                      </p:childTnLst>
+                    </p:cTn>
+                  </p:par>
+                </p:childTnLst>
+              </p:cTn>
+              <p:prevCondLst>
+                <p:cond evt="onPrev" delay="0">
+                  <p:tgtEl>
+                    <p:sldTgt/>
+                  </p:tgtEl>
+                </p:cond>
+              </p:prevCondLst>
+              <p:nextCondLst>
+                <p:cond evt="onNext" delay="0">
+                  <p:tgtEl>
+                    <p:sldTgt/>
+                  </p:tgtEl>
+                </p:cond>
+              </p:nextCondLst>
+            </p:seq>
+          </p:childTnLst>
+        </p:cTn>
+      </p:par>
+    </p:tnLst>
+  </p:timing>
+</p:sld>
+</file>
+
+<file path=ppt/slides/slide29.xml><?xml version="1.0" encoding="utf-8"?>
+<p:sld xmlns:a="http://schemas.openxmlformats.org/drawingml/2006/main" xmlns:r="http://schemas.openxmlformats.org/officeDocument/2006/relationships" xmlns:p="http://schemas.openxmlformats.org/presentationml/2006/main">
+  <p:cSld>
+    <p:spTree>
+      <p:nvGrpSpPr>
+        <p:cNvPr id="1" name="">
+          <a:extLst>
+            <a:ext uri="{FF2B5EF4-FFF2-40B4-BE49-F238E27FC236}">
+              <a16:creationId xmlns:a16="http://schemas.microsoft.com/office/drawing/2014/main" id="{F580B3FF-F4FA-20F7-62B9-F78C26A7E850}"/>
+            </a:ext>
+          </a:extLst>
+        </p:cNvPr>
+        <p:cNvGrpSpPr/>
+        <p:nvPr/>
+      </p:nvGrpSpPr>
+      <p:grpSpPr>
+        <a:xfrm>
+          <a:off x="0" y="0"/>
+          <a:ext cx="0" cy="0"/>
+          <a:chOff x="0" y="0"/>
+          <a:chExt cx="0" cy="0"/>
+        </a:xfrm>
+      </p:grpSpPr>
+      <p:sp>
+        <p:nvSpPr>
+          <p:cNvPr id="2" name="Content Placeholder 1">
+            <a:extLst>
+              <a:ext uri="{FF2B5EF4-FFF2-40B4-BE49-F238E27FC236}">
+                <a16:creationId xmlns:a16="http://schemas.microsoft.com/office/drawing/2014/main" id="{EA6D8828-DF76-7D84-601B-DFBB8628E8BA}"/>
+              </a:ext>
+            </a:extLst>
+          </p:cNvPr>
+          <p:cNvSpPr>
+            <a:spLocks noGrp="1"/>
+          </p:cNvSpPr>
+          <p:nvPr>
+            <p:ph sz="half" idx="1"/>
+          </p:nvPr>
+        </p:nvSpPr>
+        <p:spPr>
+          <a:xfrm>
+            <a:off x="904874" y="1563688"/>
+            <a:ext cx="4054475" cy="3263504"/>
+          </a:xfrm>
+        </p:spPr>
+        <p:txBody>
+          <a:bodyPr>
+            <a:normAutofit/>
+          </a:bodyPr>
+          <a:lstStyle/>
+          <a:p>
+            <a:pPr marL="342900" indent="-342900">
+              <a:buFont typeface="+mj-lt"/>
+              <a:buAutoNum type="arabicPeriod"/>
+            </a:pPr>
+            <a:r>
+              <a:rPr lang="en-US" dirty="0">
+                <a:latin typeface="+mj-lt"/>
+              </a:rPr>
+              <a:t>Heterogeneity</a:t>
+            </a:r>
+          </a:p>
+          <a:p>
+            <a:pPr lvl="1"/>
+            <a:r>
+              <a:rPr lang="en-US" dirty="0">
+                <a:latin typeface="+mj-lt"/>
+              </a:rPr>
+              <a:t>Label frequencies &amp; </a:t>
+            </a:r>
+            <a:r>
+              <a:rPr lang="en-US" dirty="0" err="1">
+                <a:latin typeface="+mj-lt"/>
+              </a:rPr>
+              <a:t>assortativity</a:t>
+            </a:r>
+            <a:endParaRPr lang="en-US" dirty="0">
+              <a:latin typeface="+mj-lt"/>
+            </a:endParaRPr>
+          </a:p>
+          <a:p>
+            <a:pPr marL="342900" indent="-342900">
+              <a:buFont typeface="+mj-lt"/>
+              <a:buAutoNum type="arabicPeriod"/>
+            </a:pPr>
+            <a:r>
+              <a:rPr lang="en-US" dirty="0">
+                <a:latin typeface="+mj-lt"/>
+              </a:rPr>
+              <a:t>Connectivity</a:t>
+            </a:r>
+          </a:p>
+          <a:p>
+            <a:pPr lvl="1"/>
+            <a:r>
+              <a:rPr lang="en-US" dirty="0">
+                <a:latin typeface="+mj-lt"/>
+              </a:rPr>
+              <a:t>Sparsity, clustering, components</a:t>
+            </a:r>
+          </a:p>
+          <a:p>
+            <a:pPr marL="342900" indent="-342900">
+              <a:buFont typeface="+mj-lt"/>
+              <a:buAutoNum type="arabicPeriod"/>
+            </a:pPr>
+            <a:r>
+              <a:rPr lang="en-US" dirty="0">
+                <a:latin typeface="+mj-lt"/>
+              </a:rPr>
+              <a:t>Importance</a:t>
+            </a:r>
+          </a:p>
+          <a:p>
+            <a:pPr marL="342900" indent="-342900">
+              <a:buFont typeface="+mj-lt"/>
+              <a:buAutoNum type="arabicPeriod"/>
+            </a:pPr>
+            <a:r>
+              <a:rPr lang="en-US" dirty="0" err="1">
+                <a:latin typeface="+mj-lt"/>
+              </a:rPr>
+              <a:t>Subgraphing</a:t>
+            </a:r>
+            <a:endParaRPr lang="en-US" dirty="0">
+              <a:latin typeface="+mj-lt"/>
+            </a:endParaRPr>
+          </a:p>
+          <a:p>
+            <a:pPr lvl="1"/>
+            <a:r>
+              <a:rPr lang="en-US" dirty="0">
+                <a:latin typeface="+mj-lt"/>
+              </a:rPr>
+              <a:t>Communities</a:t>
+            </a:r>
+          </a:p>
+          <a:p>
+            <a:pPr lvl="1"/>
+            <a:r>
+              <a:rPr lang="en-US" dirty="0">
+                <a:latin typeface="+mj-lt"/>
+              </a:rPr>
+              <a:t>Motifs</a:t>
+            </a:r>
+          </a:p>
+          <a:p>
+            <a:pPr marL="342900" indent="-342900">
+              <a:buFont typeface="+mj-lt"/>
+              <a:buAutoNum type="arabicPeriod"/>
+            </a:pPr>
+            <a:r>
+              <a:rPr lang="en-US" dirty="0">
+                <a:latin typeface="+mj-lt"/>
+              </a:rPr>
+              <a:t>Summarization</a:t>
+            </a:r>
+          </a:p>
+          <a:p>
+            <a:pPr lvl="1"/>
+            <a:r>
+              <a:rPr lang="en-US" dirty="0">
+                <a:latin typeface="+mj-lt"/>
+              </a:rPr>
+              <a:t>Association rules, compression</a:t>
+            </a:r>
+          </a:p>
+          <a:p>
+            <a:pPr lvl="1"/>
+            <a:endParaRPr lang="en-GB" dirty="0">
+              <a:latin typeface="+mj-lt"/>
+            </a:endParaRPr>
+          </a:p>
+        </p:txBody>
+      </p:sp>
+      <p:sp>
+        <p:nvSpPr>
+          <p:cNvPr id="8" name="Title 7">
+            <a:extLst>
+              <a:ext uri="{FF2B5EF4-FFF2-40B4-BE49-F238E27FC236}">
+                <a16:creationId xmlns:a16="http://schemas.microsoft.com/office/drawing/2014/main" id="{666D5C40-6EF4-E99B-21A3-CF9DF5083C37}"/>
+              </a:ext>
+            </a:extLst>
+          </p:cNvPr>
+          <p:cNvSpPr>
+            <a:spLocks noGrp="1"/>
+          </p:cNvSpPr>
+          <p:nvPr>
+            <p:ph type="title"/>
+          </p:nvPr>
+        </p:nvSpPr>
+        <p:spPr>
+          <a:xfrm>
+            <a:off x="904875" y="131032"/>
+            <a:ext cx="7726363" cy="1072753"/>
+          </a:xfrm>
+        </p:spPr>
+        <p:txBody>
+          <a:bodyPr>
+            <a:normAutofit/>
+          </a:bodyPr>
+          <a:lstStyle/>
+          <a:p>
+            <a:r>
+              <a:rPr lang="en-US" dirty="0"/>
+              <a:t>3.2	Methodology</a:t>
+            </a:r>
+            <a:br>
+              <a:rPr lang="en-US" dirty="0"/>
+            </a:br>
+            <a:r>
+              <a:rPr lang="en-US" sz="2400" b="0" i="1" dirty="0"/>
+              <a:t>Feature extraction</a:t>
+            </a:r>
+            <a:endParaRPr lang="en-GB" sz="2400" b="0" i="1" dirty="0"/>
+          </a:p>
+        </p:txBody>
+      </p:sp>
+      <p:sp>
+        <p:nvSpPr>
+          <p:cNvPr id="5" name="Date Placeholder 4">
+            <a:extLst>
+              <a:ext uri="{FF2B5EF4-FFF2-40B4-BE49-F238E27FC236}">
+                <a16:creationId xmlns:a16="http://schemas.microsoft.com/office/drawing/2014/main" id="{CE0B312E-9E70-CE0E-3575-B67BF4EEB497}"/>
+              </a:ext>
+            </a:extLst>
+          </p:cNvPr>
+          <p:cNvSpPr>
+            <a:spLocks noGrp="1"/>
+          </p:cNvSpPr>
+          <p:nvPr>
+            <p:ph type="dt" sz="half" idx="10"/>
+          </p:nvPr>
+        </p:nvSpPr>
+        <p:spPr/>
+        <p:txBody>
+          <a:bodyPr/>
+          <a:lstStyle/>
+          <a:p>
+            <a:r>
+              <a:rPr lang="en-US" sz="600" dirty="0">
+                <a:latin typeface="+mj-lt"/>
+              </a:rPr>
+              <a:t>EDIC PhD Private Defense / Scalable Methods for Knowledge Graph Reasoning and Generation</a:t>
+            </a:r>
+          </a:p>
+        </p:txBody>
+      </p:sp>
+      <p:sp>
+        <p:nvSpPr>
+          <p:cNvPr id="6" name="Footer Placeholder 5">
+            <a:extLst>
+              <a:ext uri="{FF2B5EF4-FFF2-40B4-BE49-F238E27FC236}">
+                <a16:creationId xmlns:a16="http://schemas.microsoft.com/office/drawing/2014/main" id="{1BA48CDD-A711-6780-68CA-9C6DC559CEB8}"/>
+              </a:ext>
+            </a:extLst>
+          </p:cNvPr>
+          <p:cNvSpPr>
+            <a:spLocks noGrp="1"/>
+          </p:cNvSpPr>
+          <p:nvPr>
+            <p:ph type="ftr" sz="quarter" idx="11"/>
+          </p:nvPr>
+        </p:nvSpPr>
+        <p:spPr/>
+        <p:txBody>
+          <a:bodyPr/>
+          <a:lstStyle/>
+          <a:p>
+            <a:r>
+              <a:rPr lang="fr-FR" dirty="0">
+                <a:latin typeface="+mj-lt"/>
+              </a:rPr>
+              <a:t>Andrej Janchevski, EPFL STI IEM LIONS, Lausanne, </a:t>
+            </a:r>
+            <a:r>
+              <a:rPr lang="fr-FR" dirty="0" err="1">
+                <a:latin typeface="+mj-lt"/>
+              </a:rPr>
+              <a:t>Switzerland</a:t>
+            </a:r>
+            <a:r>
+              <a:rPr lang="fr-FR" dirty="0">
+                <a:latin typeface="+mj-lt"/>
+              </a:rPr>
+              <a:t> </a:t>
+            </a:r>
+          </a:p>
+        </p:txBody>
+      </p:sp>
+      <p:sp>
+        <p:nvSpPr>
+          <p:cNvPr id="7" name="Slide Number Placeholder 6">
+            <a:extLst>
+              <a:ext uri="{FF2B5EF4-FFF2-40B4-BE49-F238E27FC236}">
+                <a16:creationId xmlns:a16="http://schemas.microsoft.com/office/drawing/2014/main" id="{98856E3C-AEB4-C161-916E-A0FB4D3DF4CB}"/>
+              </a:ext>
+            </a:extLst>
+          </p:cNvPr>
+          <p:cNvSpPr>
+            <a:spLocks noGrp="1"/>
+          </p:cNvSpPr>
+          <p:nvPr>
+            <p:ph type="sldNum" sz="quarter" idx="12"/>
+          </p:nvPr>
+        </p:nvSpPr>
+        <p:spPr/>
+        <p:txBody>
+          <a:bodyPr/>
+          <a:lstStyle/>
+          <a:p>
+            <a:fld id="{E1E1CD7C-2161-7D43-862E-CE4C333CD873}" type="slidenum">
+              <a:rPr lang="fr-FR" smtClean="0"/>
+              <a:pPr/>
+              <a:t>29</a:t>
+            </a:fld>
+            <a:endParaRPr lang="fr-FR" dirty="0"/>
+          </a:p>
+        </p:txBody>
+      </p:sp>
+      <p:pic>
+        <p:nvPicPr>
+          <p:cNvPr id="10" name="Content Placeholder 9" descr="A diagram of a graph&#10;&#10;AI-generated content may be incorrect.">
+            <a:extLst>
+              <a:ext uri="{FF2B5EF4-FFF2-40B4-BE49-F238E27FC236}">
+                <a16:creationId xmlns:a16="http://schemas.microsoft.com/office/drawing/2014/main" id="{8503E888-AC45-919D-4932-1EA1875E1E81}"/>
+              </a:ext>
+            </a:extLst>
+          </p:cNvPr>
+          <p:cNvPicPr>
+            <a:picLocks noGrp="1" noChangeAspect="1"/>
+          </p:cNvPicPr>
+          <p:nvPr>
+            <p:ph sz="half" idx="2"/>
+          </p:nvPr>
+        </p:nvPicPr>
+        <p:blipFill>
+          <a:blip r:embed="rId3"/>
+          <a:stretch>
+            <a:fillRect/>
+          </a:stretch>
+        </p:blipFill>
+        <p:spPr>
+          <a:xfrm>
+            <a:off x="5579961" y="1563688"/>
+            <a:ext cx="2430665" cy="3263900"/>
+          </a:xfrm>
+        </p:spPr>
+      </p:pic>
+    </p:spTree>
+    <p:extLst>
+      <p:ext uri="{BB962C8B-B14F-4D97-AF65-F5344CB8AC3E}">
+        <p14:creationId xmlns:p14="http://schemas.microsoft.com/office/powerpoint/2010/main" val="2388316413"/>
+      </p:ext>
+    </p:extLst>
+  </p:cSld>
+  <p:clrMapOvr>
+    <a:masterClrMapping/>
+  </p:clrMapOvr>
+  <p:timing>
+    <p:tnLst>
+      <p:par>
+        <p:cTn id="1" dur="indefinite" restart="never" nodeType="tmRoot">
+          <p:childTnLst>
+            <p:seq concurrent="1" nextAc="seek">
+              <p:cTn id="2" dur="indefinite" nodeType="mainSeq">
+                <p:childTnLst>
+                  <p:par>
+                    <p:cTn id="3" fill="hold">
+                      <p:stCondLst>
+                        <p:cond delay="indefinite"/>
+                      </p:stCondLst>
+                      <p:childTnLst>
+                        <p:par>
+                          <p:cTn id="4" fill="hold">
+                            <p:stCondLst>
+                              <p:cond delay="0"/>
+                            </p:stCondLst>
+                            <p:childTnLst>
+                              <p:par>
+                                <p:cTn id="5" presetID="14" presetClass="entr" presetSubtype="10" fill="hold" nodeType="clickEffect">
+                                  <p:stCondLst>
+                                    <p:cond delay="0"/>
+                                  </p:stCondLst>
+                                  <p:childTnLst>
+                                    <p:set>
+                                      <p:cBhvr>
+                                        <p:cTn id="6" dur="1" fill="hold">
+                                          <p:stCondLst>
+                                            <p:cond delay="0"/>
+                                          </p:stCondLst>
+                                        </p:cTn>
+                                        <p:tgtEl>
+                                          <p:spTgt spid="2">
+                                            <p:txEl>
+                                              <p:pRg st="0" end="0"/>
+                                            </p:txEl>
+                                          </p:spTgt>
+                                        </p:tgtEl>
+                                        <p:attrNameLst>
+                                          <p:attrName>style.visibility</p:attrName>
+                                        </p:attrNameLst>
+                                      </p:cBhvr>
+                                      <p:to>
+                                        <p:strVal val="visible"/>
+                                      </p:to>
+                                    </p:set>
+                                    <p:animEffect transition="in" filter="randombar(horizontal)">
+                                      <p:cBhvr>
+                                        <p:cTn id="7" dur="500"/>
+                                        <p:tgtEl>
+                                          <p:spTgt spid="2">
+                                            <p:txEl>
+                                              <p:pRg st="0" end="0"/>
+                                            </p:txEl>
+                                          </p:spTgt>
+                                        </p:tgtEl>
+                                      </p:cBhvr>
+                                    </p:animEffect>
+                                  </p:childTnLst>
+                                </p:cTn>
+                              </p:par>
+                              <p:par>
+                                <p:cTn id="8" presetID="14" presetClass="entr" presetSubtype="10" fill="hold" nodeType="withEffect">
+                                  <p:stCondLst>
+                                    <p:cond delay="0"/>
+                                  </p:stCondLst>
+                                  <p:childTnLst>
+                                    <p:set>
+                                      <p:cBhvr>
+                                        <p:cTn id="9" dur="1" fill="hold">
+                                          <p:stCondLst>
+                                            <p:cond delay="0"/>
+                                          </p:stCondLst>
+                                        </p:cTn>
+                                        <p:tgtEl>
+                                          <p:spTgt spid="2">
+                                            <p:txEl>
+                                              <p:pRg st="1" end="1"/>
+                                            </p:txEl>
+                                          </p:spTgt>
+                                        </p:tgtEl>
+                                        <p:attrNameLst>
+                                          <p:attrName>style.visibility</p:attrName>
+                                        </p:attrNameLst>
+                                      </p:cBhvr>
+                                      <p:to>
+                                        <p:strVal val="visible"/>
+                                      </p:to>
+                                    </p:set>
+                                    <p:animEffect transition="in" filter="randombar(horizontal)">
+                                      <p:cBhvr>
+                                        <p:cTn id="10" dur="500"/>
+                                        <p:tgtEl>
+                                          <p:spTgt spid="2">
+                                            <p:txEl>
+                                              <p:pRg st="1" end="1"/>
+                                            </p:txEl>
+                                          </p:spTgt>
+                                        </p:tgtEl>
+                                      </p:cBhvr>
+                                    </p:animEffect>
+                                  </p:childTnLst>
+                                </p:cTn>
+                              </p:par>
+                            </p:childTnLst>
+                          </p:cTn>
+                        </p:par>
+                      </p:childTnLst>
+                    </p:cTn>
+                  </p:par>
+                  <p:par>
+                    <p:cTn id="11" fill="hold">
+                      <p:stCondLst>
+                        <p:cond delay="indefinite"/>
+                      </p:stCondLst>
+                      <p:childTnLst>
+                        <p:par>
+                          <p:cTn id="12" fill="hold">
+                            <p:stCondLst>
+                              <p:cond delay="0"/>
+                            </p:stCondLst>
+                            <p:childTnLst>
+                              <p:par>
+                                <p:cTn id="13" presetID="14" presetClass="entr" presetSubtype="10" fill="hold" nodeType="clickEffect">
+                                  <p:stCondLst>
+                                    <p:cond delay="0"/>
+                                  </p:stCondLst>
+                                  <p:childTnLst>
+                                    <p:set>
+                                      <p:cBhvr>
+                                        <p:cTn id="14" dur="1" fill="hold">
+                                          <p:stCondLst>
+                                            <p:cond delay="0"/>
+                                          </p:stCondLst>
+                                        </p:cTn>
+                                        <p:tgtEl>
+                                          <p:spTgt spid="2">
+                                            <p:txEl>
+                                              <p:pRg st="2" end="2"/>
+                                            </p:txEl>
+                                          </p:spTgt>
+                                        </p:tgtEl>
+                                        <p:attrNameLst>
+                                          <p:attrName>style.visibility</p:attrName>
+                                        </p:attrNameLst>
+                                      </p:cBhvr>
+                                      <p:to>
+                                        <p:strVal val="visible"/>
+                                      </p:to>
+                                    </p:set>
+                                    <p:animEffect transition="in" filter="randombar(horizontal)">
+                                      <p:cBhvr>
+                                        <p:cTn id="15" dur="500"/>
+                                        <p:tgtEl>
+                                          <p:spTgt spid="2">
+                                            <p:txEl>
+                                              <p:pRg st="2" end="2"/>
+                                            </p:txEl>
+                                          </p:spTgt>
+                                        </p:tgtEl>
+                                      </p:cBhvr>
+                                    </p:animEffect>
+                                  </p:childTnLst>
+                                </p:cTn>
+                              </p:par>
+                              <p:par>
+                                <p:cTn id="16" presetID="14" presetClass="entr" presetSubtype="10" fill="hold" nodeType="withEffect">
+                                  <p:stCondLst>
+                                    <p:cond delay="0"/>
+                                  </p:stCondLst>
+                                  <p:childTnLst>
+                                    <p:set>
+                                      <p:cBhvr>
+                                        <p:cTn id="17" dur="1" fill="hold">
+                                          <p:stCondLst>
+                                            <p:cond delay="0"/>
+                                          </p:stCondLst>
+                                        </p:cTn>
+                                        <p:tgtEl>
+                                          <p:spTgt spid="2">
+                                            <p:txEl>
+                                              <p:pRg st="3" end="3"/>
+                                            </p:txEl>
+                                          </p:spTgt>
+                                        </p:tgtEl>
+                                        <p:attrNameLst>
+                                          <p:attrName>style.visibility</p:attrName>
+                                        </p:attrNameLst>
+                                      </p:cBhvr>
+                                      <p:to>
+                                        <p:strVal val="visible"/>
+                                      </p:to>
+                                    </p:set>
+                                    <p:animEffect transition="in" filter="randombar(horizontal)">
+                                      <p:cBhvr>
+                                        <p:cTn id="18" dur="500"/>
+                                        <p:tgtEl>
+                                          <p:spTgt spid="2">
+                                            <p:txEl>
+                                              <p:pRg st="3" end="3"/>
+                                            </p:txEl>
+                                          </p:spTgt>
+                                        </p:tgtEl>
+                                      </p:cBhvr>
+                                    </p:animEffect>
+                                  </p:childTnLst>
+                                </p:cTn>
+                              </p:par>
+                            </p:childTnLst>
+                          </p:cTn>
+                        </p:par>
+                      </p:childTnLst>
+                    </p:cTn>
+                  </p:par>
+                  <p:par>
+                    <p:cTn id="19" fill="hold">
+                      <p:stCondLst>
+                        <p:cond delay="indefinite"/>
+                      </p:stCondLst>
+                      <p:childTnLst>
+                        <p:par>
+                          <p:cTn id="20" fill="hold">
+                            <p:stCondLst>
+                              <p:cond delay="0"/>
+                            </p:stCondLst>
+                            <p:childTnLst>
+                              <p:par>
+                                <p:cTn id="21" presetID="14" presetClass="entr" presetSubtype="10" fill="hold" nodeType="clickEffect">
+                                  <p:stCondLst>
+                                    <p:cond delay="0"/>
+                                  </p:stCondLst>
+                                  <p:childTnLst>
+                                    <p:set>
+                                      <p:cBhvr>
+                                        <p:cTn id="22" dur="1" fill="hold">
+                                          <p:stCondLst>
+                                            <p:cond delay="0"/>
+                                          </p:stCondLst>
+                                        </p:cTn>
+                                        <p:tgtEl>
+                                          <p:spTgt spid="2">
+                                            <p:txEl>
+                                              <p:pRg st="4" end="4"/>
+                                            </p:txEl>
+                                          </p:spTgt>
+                                        </p:tgtEl>
+                                        <p:attrNameLst>
+                                          <p:attrName>style.visibility</p:attrName>
+                                        </p:attrNameLst>
+                                      </p:cBhvr>
+                                      <p:to>
+                                        <p:strVal val="visible"/>
+                                      </p:to>
+                                    </p:set>
+                                    <p:animEffect transition="in" filter="randombar(horizontal)">
+                                      <p:cBhvr>
+                                        <p:cTn id="23" dur="500"/>
+                                        <p:tgtEl>
+                                          <p:spTgt spid="2">
+                                            <p:txEl>
+                                              <p:pRg st="4" end="4"/>
+                                            </p:txEl>
+                                          </p:spTgt>
+                                        </p:tgtEl>
+                                      </p:cBhvr>
+                                    </p:animEffect>
+                                  </p:childTnLst>
+                                </p:cTn>
+                              </p:par>
+                            </p:childTnLst>
+                          </p:cTn>
+                        </p:par>
+                      </p:childTnLst>
+                    </p:cTn>
+                  </p:par>
+                  <p:par>
+                    <p:cTn id="24" fill="hold">
+                      <p:stCondLst>
+                        <p:cond delay="indefinite"/>
+                      </p:stCondLst>
+                      <p:childTnLst>
+                        <p:par>
+                          <p:cTn id="25" fill="hold">
+                            <p:stCondLst>
+                              <p:cond delay="0"/>
+                            </p:stCondLst>
+                            <p:childTnLst>
+                              <p:par>
+                                <p:cTn id="26" presetID="14" presetClass="entr" presetSubtype="10" fill="hold" nodeType="clickEffect">
+                                  <p:stCondLst>
+                                    <p:cond delay="0"/>
+                                  </p:stCondLst>
+                                  <p:childTnLst>
+                                    <p:set>
+                                      <p:cBhvr>
+                                        <p:cTn id="27" dur="1" fill="hold">
+                                          <p:stCondLst>
+                                            <p:cond delay="0"/>
+                                          </p:stCondLst>
+                                        </p:cTn>
+                                        <p:tgtEl>
+                                          <p:spTgt spid="2">
+                                            <p:txEl>
+                                              <p:pRg st="5" end="5"/>
+                                            </p:txEl>
+                                          </p:spTgt>
+                                        </p:tgtEl>
+                                        <p:attrNameLst>
+                                          <p:attrName>style.visibility</p:attrName>
+                                        </p:attrNameLst>
+                                      </p:cBhvr>
+                                      <p:to>
+                                        <p:strVal val="visible"/>
+                                      </p:to>
+                                    </p:set>
+                                    <p:animEffect transition="in" filter="randombar(horizontal)">
+                                      <p:cBhvr>
+                                        <p:cTn id="28" dur="500"/>
+                                        <p:tgtEl>
+                                          <p:spTgt spid="2">
+                                            <p:txEl>
+                                              <p:pRg st="5" end="5"/>
+                                            </p:txEl>
+                                          </p:spTgt>
+                                        </p:tgtEl>
+                                      </p:cBhvr>
+                                    </p:animEffect>
+                                  </p:childTnLst>
+                                </p:cTn>
+                              </p:par>
+                              <p:par>
+                                <p:cTn id="29" presetID="14" presetClass="entr" presetSubtype="10" fill="hold" nodeType="withEffect">
+                                  <p:stCondLst>
+                                    <p:cond delay="0"/>
+                                  </p:stCondLst>
+                                  <p:childTnLst>
+                                    <p:set>
+                                      <p:cBhvr>
+                                        <p:cTn id="30" dur="1" fill="hold">
+                                          <p:stCondLst>
+                                            <p:cond delay="0"/>
+                                          </p:stCondLst>
+                                        </p:cTn>
+                                        <p:tgtEl>
+                                          <p:spTgt spid="2">
+                                            <p:txEl>
+                                              <p:pRg st="6" end="6"/>
+                                            </p:txEl>
+                                          </p:spTgt>
+                                        </p:tgtEl>
+                                        <p:attrNameLst>
+                                          <p:attrName>style.visibility</p:attrName>
+                                        </p:attrNameLst>
+                                      </p:cBhvr>
+                                      <p:to>
+                                        <p:strVal val="visible"/>
+                                      </p:to>
+                                    </p:set>
+                                    <p:animEffect transition="in" filter="randombar(horizontal)">
+                                      <p:cBhvr>
+                                        <p:cTn id="31" dur="500"/>
+                                        <p:tgtEl>
+                                          <p:spTgt spid="2">
+                                            <p:txEl>
+                                              <p:pRg st="6" end="6"/>
+                                            </p:txEl>
+                                          </p:spTgt>
+                                        </p:tgtEl>
+                                      </p:cBhvr>
+                                    </p:animEffect>
+                                  </p:childTnLst>
+                                </p:cTn>
+                              </p:par>
+                              <p:par>
+                                <p:cTn id="32" presetID="14" presetClass="entr" presetSubtype="10" fill="hold" nodeType="withEffect">
+                                  <p:stCondLst>
+                                    <p:cond delay="0"/>
+                                  </p:stCondLst>
+                                  <p:childTnLst>
+                                    <p:set>
+                                      <p:cBhvr>
+                                        <p:cTn id="33" dur="1" fill="hold">
+                                          <p:stCondLst>
+                                            <p:cond delay="0"/>
+                                          </p:stCondLst>
+                                        </p:cTn>
+                                        <p:tgtEl>
+                                          <p:spTgt spid="2">
+                                            <p:txEl>
+                                              <p:pRg st="7" end="7"/>
+                                            </p:txEl>
+                                          </p:spTgt>
+                                        </p:tgtEl>
+                                        <p:attrNameLst>
+                                          <p:attrName>style.visibility</p:attrName>
+                                        </p:attrNameLst>
+                                      </p:cBhvr>
+                                      <p:to>
+                                        <p:strVal val="visible"/>
+                                      </p:to>
+                                    </p:set>
+                                    <p:animEffect transition="in" filter="randombar(horizontal)">
+                                      <p:cBhvr>
+                                        <p:cTn id="34" dur="500"/>
+                                        <p:tgtEl>
+                                          <p:spTgt spid="2">
+                                            <p:txEl>
+                                              <p:pRg st="7" end="7"/>
+                                            </p:txEl>
+                                          </p:spTgt>
+                                        </p:tgtEl>
+                                      </p:cBhvr>
+                                    </p:animEffect>
+                                  </p:childTnLst>
+                                </p:cTn>
+                              </p:par>
+                              <p:par>
+                                <p:cTn id="35" presetID="14" presetClass="entr" presetSubtype="10" fill="hold" nodeType="withEffect">
+                                  <p:stCondLst>
+                                    <p:cond delay="0"/>
+                                  </p:stCondLst>
+                                  <p:childTnLst>
+                                    <p:set>
+                                      <p:cBhvr>
+                                        <p:cTn id="36" dur="1" fill="hold">
+                                          <p:stCondLst>
+                                            <p:cond delay="0"/>
+                                          </p:stCondLst>
+                                        </p:cTn>
+                                        <p:tgtEl>
+                                          <p:spTgt spid="10"/>
+                                        </p:tgtEl>
+                                        <p:attrNameLst>
+                                          <p:attrName>style.visibility</p:attrName>
+                                        </p:attrNameLst>
+                                      </p:cBhvr>
+                                      <p:to>
+                                        <p:strVal val="visible"/>
+                                      </p:to>
+                                    </p:set>
+                                    <p:animEffect transition="in" filter="randombar(horizontal)">
+                                      <p:cBhvr>
+                                        <p:cTn id="37" dur="500"/>
+                                        <p:tgtEl>
+                                          <p:spTgt spid="10"/>
+                                        </p:tgtEl>
+                                      </p:cBhvr>
+                                    </p:animEffect>
+                                  </p:childTnLst>
+                                </p:cTn>
+                              </p:par>
+                            </p:childTnLst>
+                          </p:cTn>
+                        </p:par>
+                      </p:childTnLst>
+                    </p:cTn>
+                  </p:par>
+                  <p:par>
+                    <p:cTn id="38" fill="hold">
+                      <p:stCondLst>
+                        <p:cond delay="indefinite"/>
+                      </p:stCondLst>
+                      <p:childTnLst>
+                        <p:par>
+                          <p:cTn id="39" fill="hold">
+                            <p:stCondLst>
+                              <p:cond delay="0"/>
+                            </p:stCondLst>
+                            <p:childTnLst>
+                              <p:par>
+                                <p:cTn id="40" presetID="14" presetClass="entr" presetSubtype="10" fill="hold" nodeType="clickEffect">
+                                  <p:stCondLst>
+                                    <p:cond delay="0"/>
+                                  </p:stCondLst>
+                                  <p:childTnLst>
+                                    <p:set>
+                                      <p:cBhvr>
+                                        <p:cTn id="41" dur="1" fill="hold">
+                                          <p:stCondLst>
+                                            <p:cond delay="0"/>
+                                          </p:stCondLst>
+                                        </p:cTn>
+                                        <p:tgtEl>
+                                          <p:spTgt spid="2">
+                                            <p:txEl>
+                                              <p:pRg st="8" end="8"/>
+                                            </p:txEl>
+                                          </p:spTgt>
+                                        </p:tgtEl>
+                                        <p:attrNameLst>
+                                          <p:attrName>style.visibility</p:attrName>
+                                        </p:attrNameLst>
+                                      </p:cBhvr>
+                                      <p:to>
+                                        <p:strVal val="visible"/>
+                                      </p:to>
+                                    </p:set>
+                                    <p:animEffect transition="in" filter="randombar(horizontal)">
+                                      <p:cBhvr>
+                                        <p:cTn id="42" dur="500"/>
+                                        <p:tgtEl>
+                                          <p:spTgt spid="2">
+                                            <p:txEl>
+                                              <p:pRg st="8" end="8"/>
+                                            </p:txEl>
+                                          </p:spTgt>
+                                        </p:tgtEl>
+                                      </p:cBhvr>
+                                    </p:animEffect>
+                                  </p:childTnLst>
+                                </p:cTn>
+                              </p:par>
+                              <p:par>
+                                <p:cTn id="43" presetID="14" presetClass="entr" presetSubtype="10" fill="hold" nodeType="withEffect">
+                                  <p:stCondLst>
+                                    <p:cond delay="0"/>
+                                  </p:stCondLst>
+                                  <p:childTnLst>
+                                    <p:set>
+                                      <p:cBhvr>
+                                        <p:cTn id="44" dur="1" fill="hold">
+                                          <p:stCondLst>
+                                            <p:cond delay="0"/>
+                                          </p:stCondLst>
+                                        </p:cTn>
+                                        <p:tgtEl>
+                                          <p:spTgt spid="2">
+                                            <p:txEl>
+                                              <p:pRg st="9" end="9"/>
+                                            </p:txEl>
+                                          </p:spTgt>
+                                        </p:tgtEl>
+                                        <p:attrNameLst>
+                                          <p:attrName>style.visibility</p:attrName>
+                                        </p:attrNameLst>
+                                      </p:cBhvr>
+                                      <p:to>
+                                        <p:strVal val="visible"/>
+                                      </p:to>
+                                    </p:set>
+                                    <p:animEffect transition="in" filter="randombar(horizontal)">
+                                      <p:cBhvr>
+                                        <p:cTn id="45" dur="500"/>
+                                        <p:tgtEl>
+                                          <p:spTgt spid="2">
+                                            <p:txEl>
+                                              <p:pRg st="9" end="9"/>
+                                            </p:txEl>
+                                          </p:spTgt>
+                                        </p:tgtEl>
+                                      </p:cBhvr>
+                                    </p:animEffect>
+                                  </p:childTnLst>
+                                </p:cTn>
+                              </p:par>
+                            </p:childTnLst>
+                          </p:cTn>
+                        </p:par>
+                      </p:childTnLst>
+                    </p:cTn>
+                  </p:par>
+                </p:childTnLst>
+              </p:cTn>
+              <p:prevCondLst>
+                <p:cond evt="onPrev" delay="0">
+                  <p:tgtEl>
+                    <p:sldTgt/>
+                  </p:tgtEl>
+                </p:cond>
+              </p:prevCondLst>
+              <p:nextCondLst>
+                <p:cond evt="onNext" delay="0">
+                  <p:tgtEl>
+                    <p:sldTgt/>
+                  </p:tgtEl>
+                </p:cond>
+              </p:nextCondLst>
+            </p:seq>
+          </p:childTnLst>
+        </p:cTn>
+      </p:par>
+    </p:tnLst>
+  </p:timing>
+</p:sld>
+</file>
+
+<file path=ppt/slides/slide3.xml><?xml version="1.0" encoding="utf-8"?>
+<p:sld xmlns:a="http://schemas.openxmlformats.org/drawingml/2006/main" xmlns:r="http://schemas.openxmlformats.org/officeDocument/2006/relationships" xmlns:p="http://schemas.openxmlformats.org/presentationml/2006/main">
+  <p:cSld>
+    <p:spTree>
+      <p:nvGrpSpPr>
+        <p:cNvPr id="1" name=""/>
+        <p:cNvGrpSpPr/>
+        <p:nvPr/>
+      </p:nvGrpSpPr>
+      <p:grpSpPr>
+        <a:xfrm>
+          <a:off x="0" y="0"/>
+          <a:ext cx="0" cy="0"/>
+          <a:chOff x="0" y="0"/>
+          <a:chExt cx="0" cy="0"/>
+        </a:xfrm>
+      </p:grpSpPr>
+      <p:sp>
+        <p:nvSpPr>
+          <p:cNvPr id="7" name="Title 6">
+            <a:extLst>
+              <a:ext uri="{FF2B5EF4-FFF2-40B4-BE49-F238E27FC236}">
+                <a16:creationId xmlns:a16="http://schemas.microsoft.com/office/drawing/2014/main" id="{579054AB-E69B-49BD-6443-39E9AED0207C}"/>
+              </a:ext>
+            </a:extLst>
+          </p:cNvPr>
+          <p:cNvSpPr>
+            <a:spLocks noGrp="1"/>
+          </p:cNvSpPr>
+          <p:nvPr>
+            <p:ph type="title"/>
+          </p:nvPr>
+        </p:nvSpPr>
+        <p:spPr/>
+        <p:txBody>
+          <a:bodyPr/>
+          <a:lstStyle/>
+          <a:p>
+            <a:r>
+              <a:rPr lang="en-US" dirty="0"/>
+              <a:t>Introduction</a:t>
+            </a:r>
+            <a:endParaRPr lang="en-GB" dirty="0"/>
+          </a:p>
+        </p:txBody>
+      </p:sp>
+      <p:sp>
+        <p:nvSpPr>
+          <p:cNvPr id="8" name="Text Placeholder 7">
+            <a:extLst>
+              <a:ext uri="{FF2B5EF4-FFF2-40B4-BE49-F238E27FC236}">
+                <a16:creationId xmlns:a16="http://schemas.microsoft.com/office/drawing/2014/main" id="{762427C8-5173-2FAE-16A3-AA708901905A}"/>
+              </a:ext>
+            </a:extLst>
+          </p:cNvPr>
+          <p:cNvSpPr>
+            <a:spLocks noGrp="1"/>
+          </p:cNvSpPr>
+          <p:nvPr>
+            <p:ph type="body" idx="1"/>
+          </p:nvPr>
+        </p:nvSpPr>
+        <p:spPr/>
+        <p:txBody>
+          <a:bodyPr>
+            <a:normAutofit/>
+          </a:bodyPr>
+          <a:lstStyle/>
+          <a:p>
+            <a:r>
+              <a:rPr lang="en-US" sz="2400" dirty="0">
+                <a:latin typeface="+mj-lt"/>
+              </a:rPr>
+              <a:t>Chapter 1</a:t>
+            </a:r>
+            <a:endParaRPr lang="en-GB" sz="2400" dirty="0">
+              <a:latin typeface="+mj-lt"/>
+            </a:endParaRPr>
+          </a:p>
+        </p:txBody>
+      </p:sp>
+      <p:sp>
+        <p:nvSpPr>
+          <p:cNvPr id="4" name="Date Placeholder 3">
+            <a:extLst>
+              <a:ext uri="{FF2B5EF4-FFF2-40B4-BE49-F238E27FC236}">
+                <a16:creationId xmlns:a16="http://schemas.microsoft.com/office/drawing/2014/main" id="{5751FED3-C36F-426D-39B0-F93F3B412C3D}"/>
+              </a:ext>
+            </a:extLst>
+          </p:cNvPr>
+          <p:cNvSpPr>
+            <a:spLocks noGrp="1"/>
+          </p:cNvSpPr>
+          <p:nvPr>
+            <p:ph type="dt" sz="half" idx="14"/>
+          </p:nvPr>
+        </p:nvSpPr>
+        <p:spPr/>
+        <p:txBody>
+          <a:bodyPr/>
+          <a:lstStyle/>
+          <a:p>
+            <a:r>
+              <a:rPr lang="en-US" sz="600" dirty="0">
+                <a:latin typeface="+mj-lt"/>
+              </a:rPr>
+              <a:t>EDIC PhD Private Defense / Scalable Methods for Knowledge Graph Reasoning and Generation</a:t>
+            </a:r>
+          </a:p>
+        </p:txBody>
+      </p:sp>
+      <p:sp>
+        <p:nvSpPr>
+          <p:cNvPr id="5" name="Footer Placeholder 4">
+            <a:extLst>
+              <a:ext uri="{FF2B5EF4-FFF2-40B4-BE49-F238E27FC236}">
+                <a16:creationId xmlns:a16="http://schemas.microsoft.com/office/drawing/2014/main" id="{01436E2B-6C6B-2BBB-CDDF-4BFF19B93179}"/>
+              </a:ext>
+            </a:extLst>
+          </p:cNvPr>
+          <p:cNvSpPr>
+            <a:spLocks noGrp="1"/>
+          </p:cNvSpPr>
+          <p:nvPr>
+            <p:ph type="ftr" sz="quarter" idx="15"/>
+          </p:nvPr>
+        </p:nvSpPr>
+        <p:spPr/>
+        <p:txBody>
+          <a:bodyPr/>
+          <a:lstStyle/>
+          <a:p>
+            <a:endParaRPr lang="fr-FR" dirty="0">
+              <a:latin typeface="+mj-lt"/>
+            </a:endParaRPr>
+          </a:p>
+          <a:p>
+            <a:r>
+              <a:rPr lang="fr-FR" dirty="0">
+                <a:latin typeface="+mj-lt"/>
+              </a:rPr>
+              <a:t>Andrej Janchevski, EPFL STI IEM LIONS, Lausanne, </a:t>
+            </a:r>
+            <a:r>
+              <a:rPr lang="fr-FR" dirty="0" err="1">
+                <a:latin typeface="+mj-lt"/>
+              </a:rPr>
+              <a:t>Switzerland</a:t>
+            </a:r>
+            <a:r>
+              <a:rPr lang="fr-FR" dirty="0">
+                <a:latin typeface="+mj-lt"/>
+              </a:rPr>
+              <a:t> </a:t>
+            </a:r>
+          </a:p>
+          <a:p>
+            <a:r>
+              <a:rPr lang="fr-FR" dirty="0"/>
+              <a:t> </a:t>
+            </a:r>
+          </a:p>
+        </p:txBody>
+      </p:sp>
+      <p:sp>
+        <p:nvSpPr>
+          <p:cNvPr id="6" name="Slide Number Placeholder 5">
+            <a:extLst>
+              <a:ext uri="{FF2B5EF4-FFF2-40B4-BE49-F238E27FC236}">
+                <a16:creationId xmlns:a16="http://schemas.microsoft.com/office/drawing/2014/main" id="{1CECEE65-7D03-DBD2-DD71-1F87BF9F8775}"/>
+              </a:ext>
+            </a:extLst>
+          </p:cNvPr>
+          <p:cNvSpPr>
+            <a:spLocks noGrp="1"/>
+          </p:cNvSpPr>
+          <p:nvPr>
+            <p:ph type="sldNum" sz="quarter" idx="16"/>
+          </p:nvPr>
+        </p:nvSpPr>
+        <p:spPr/>
+        <p:txBody>
+          <a:bodyPr/>
+          <a:lstStyle/>
+          <a:p>
+            <a:fld id="{E1E1CD7C-2161-7D43-862E-CE4C333CD873}" type="slidenum">
+              <a:rPr lang="fr-FR" smtClean="0"/>
+              <a:pPr/>
+              <a:t>3</a:t>
+            </a:fld>
+            <a:endParaRPr lang="fr-FR" dirty="0"/>
+          </a:p>
+        </p:txBody>
+      </p:sp>
+      <p:pic>
+        <p:nvPicPr>
+          <p:cNvPr id="10" name="Picture Placeholder 11" descr="A city next to the water&#10;&#10;AI-generated content may be incorrect.">
+            <a:extLst>
+              <a:ext uri="{FF2B5EF4-FFF2-40B4-BE49-F238E27FC236}">
+                <a16:creationId xmlns:a16="http://schemas.microsoft.com/office/drawing/2014/main" id="{7D023253-089C-DCAE-E050-516180635769}"/>
+              </a:ext>
+            </a:extLst>
+          </p:cNvPr>
+          <p:cNvPicPr>
+            <a:picLocks noGrp="1" noChangeAspect="1"/>
+          </p:cNvPicPr>
+          <p:nvPr>
+            <p:ph type="pic" sz="quarter" idx="13"/>
+          </p:nvPr>
+        </p:nvPicPr>
+        <p:blipFill>
+          <a:blip r:embed="rId3">
+            <a:extLst>
+              <a:ext uri="{837473B0-CC2E-450A-ABE3-18F120FF3D39}">
+                <a1611:picAttrSrcUrl xmlns:a1611="http://schemas.microsoft.com/office/drawing/2016/11/main" r:id="rId4"/>
+              </a:ext>
+            </a:extLst>
+          </a:blip>
+          <a:srcRect l="26235" r="26235"/>
+          <a:stretch>
+            <a:fillRect/>
+          </a:stretch>
+        </p:blipFill>
+        <p:spPr bwMode="auto">
+          <a:xfrm>
+            <a:off x="904875" y="0"/>
+            <a:ext cx="3667125" cy="5143500"/>
+          </a:xfrm>
+          <a:prstGeom prst="rect">
+            <a:avLst/>
+          </a:prstGeom>
+          <a:noFill/>
+          <a:extLst>
+            <a:ext uri="{909E8E84-426E-40DD-AFC4-6F175D3DCCD1}">
+              <a14:hiddenFill xmlns:a14="http://schemas.microsoft.com/office/drawing/2010/main">
+                <a:solidFill>
+                  <a:srgbClr val="FFFFFF"/>
+                </a:solidFill>
+              </a14:hiddenFill>
+            </a:ext>
+          </a:extLst>
+        </p:spPr>
+      </p:pic>
+    </p:spTree>
+    <p:extLst>
+      <p:ext uri="{BB962C8B-B14F-4D97-AF65-F5344CB8AC3E}">
+        <p14:creationId xmlns:p14="http://schemas.microsoft.com/office/powerpoint/2010/main" val="2310135826"/>
+      </p:ext>
+    </p:extLst>
+  </p:cSld>
+  <p:clrMapOvr>
+    <a:masterClrMapping/>
+  </p:clrMapOvr>
+</p:sld>
+</file>
+
+<file path=ppt/slides/slide30.xml><?xml version="1.0" encoding="utf-8"?>
+<p:sld xmlns:a="http://schemas.openxmlformats.org/drawingml/2006/main" xmlns:r="http://schemas.openxmlformats.org/officeDocument/2006/relationships" xmlns:p="http://schemas.openxmlformats.org/presentationml/2006/main">
+  <p:cSld>
+    <p:spTree>
+      <p:nvGrpSpPr>
+        <p:cNvPr id="1" name="">
+          <a:extLst>
+            <a:ext uri="{FF2B5EF4-FFF2-40B4-BE49-F238E27FC236}">
+              <a16:creationId xmlns:a16="http://schemas.microsoft.com/office/drawing/2014/main" id="{B0D6E8A4-54BB-8492-5658-E3BDA65E70E8}"/>
+            </a:ext>
+          </a:extLst>
+        </p:cNvPr>
+        <p:cNvGrpSpPr/>
+        <p:nvPr/>
+      </p:nvGrpSpPr>
+      <p:grpSpPr>
+        <a:xfrm>
+          <a:off x="0" y="0"/>
+          <a:ext cx="0" cy="0"/>
+          <a:chOff x="0" y="0"/>
+          <a:chExt cx="0" cy="0"/>
+        </a:xfrm>
+      </p:grpSpPr>
+      <p:sp>
+        <p:nvSpPr>
+          <p:cNvPr id="9" name="Content Placeholder 8">
+            <a:extLst>
+              <a:ext uri="{FF2B5EF4-FFF2-40B4-BE49-F238E27FC236}">
+                <a16:creationId xmlns:a16="http://schemas.microsoft.com/office/drawing/2014/main" id="{954A354E-74B8-594C-E158-019562C59962}"/>
+              </a:ext>
+            </a:extLst>
+          </p:cNvPr>
+          <p:cNvSpPr>
+            <a:spLocks noGrp="1"/>
+          </p:cNvSpPr>
+          <p:nvPr>
+            <p:ph idx="1"/>
+          </p:nvPr>
+        </p:nvSpPr>
+        <p:spPr/>
+        <p:txBody>
+          <a:bodyPr/>
+          <a:lstStyle/>
+          <a:p>
+            <a:r>
+              <a:rPr lang="en-US" dirty="0">
+                <a:latin typeface="+mj-lt"/>
+              </a:rPr>
+              <a:t>Public data</a:t>
+            </a:r>
+          </a:p>
+          <a:p>
+            <a:pPr lvl="1"/>
+            <a:r>
+              <a:rPr lang="en-US" dirty="0">
+                <a:latin typeface="+mj-lt"/>
+              </a:rPr>
+              <a:t>Freebase, WordNet, NELL</a:t>
+            </a:r>
+          </a:p>
+          <a:p>
+            <a:pPr lvl="1"/>
+            <a:r>
+              <a:rPr lang="en-US" dirty="0">
+                <a:latin typeface="+mj-lt"/>
+              </a:rPr>
+              <a:t>Citation networks: </a:t>
+            </a:r>
+            <a:r>
+              <a:rPr lang="en-US" dirty="0" err="1">
+                <a:latin typeface="+mj-lt"/>
+              </a:rPr>
+              <a:t>redditHyperlinks</a:t>
+            </a:r>
+            <a:r>
+              <a:rPr lang="en-US" dirty="0">
+                <a:latin typeface="+mj-lt"/>
+              </a:rPr>
+              <a:t>, </a:t>
+            </a:r>
+            <a:r>
+              <a:rPr lang="en-US" dirty="0" err="1">
+                <a:latin typeface="+mj-lt"/>
+              </a:rPr>
+              <a:t>HepPh</a:t>
+            </a:r>
+            <a:r>
+              <a:rPr lang="en-US" dirty="0">
+                <a:latin typeface="+mj-lt"/>
+              </a:rPr>
+              <a:t>, </a:t>
+            </a:r>
+            <a:r>
+              <a:rPr lang="en-US" dirty="0" err="1">
+                <a:latin typeface="+mj-lt"/>
+              </a:rPr>
+              <a:t>cit</a:t>
+            </a:r>
+            <a:r>
+              <a:rPr lang="en-US" dirty="0">
+                <a:latin typeface="+mj-lt"/>
+              </a:rPr>
+              <a:t>-patents</a:t>
+            </a:r>
+          </a:p>
+          <a:p>
+            <a:pPr lvl="1"/>
+            <a:r>
+              <a:rPr lang="en-US" dirty="0">
+                <a:latin typeface="+mj-lt"/>
+              </a:rPr>
+              <a:t>Biology: </a:t>
+            </a:r>
+            <a:r>
+              <a:rPr lang="en-US" dirty="0" err="1">
+                <a:latin typeface="+mj-lt"/>
+              </a:rPr>
+              <a:t>ogbl-biokg</a:t>
+            </a:r>
+            <a:endParaRPr lang="en-US" dirty="0">
+              <a:latin typeface="+mj-lt"/>
+            </a:endParaRPr>
+          </a:p>
+          <a:p>
+            <a:pPr lvl="1"/>
+            <a:r>
+              <a:rPr lang="en-US" dirty="0">
+                <a:latin typeface="+mj-lt"/>
+              </a:rPr>
+              <a:t>Transportation networks of 25 cities</a:t>
+            </a:r>
+          </a:p>
+          <a:p>
+            <a:r>
+              <a:rPr lang="en-US" dirty="0">
+                <a:latin typeface="+mj-lt"/>
+              </a:rPr>
+              <a:t>One-sample hypothesis testing for metric distribution type</a:t>
+            </a:r>
+          </a:p>
+          <a:p>
+            <a:pPr lvl="1"/>
+            <a:r>
+              <a:rPr lang="en-GB" dirty="0">
+                <a:latin typeface="+mj-lt"/>
+              </a:rPr>
+              <a:t>Heavy tails</a:t>
+            </a:r>
+          </a:p>
+          <a:p>
+            <a:pPr lvl="1"/>
+            <a:r>
+              <a:rPr lang="en-GB" dirty="0">
+                <a:latin typeface="+mj-lt"/>
+              </a:rPr>
+              <a:t>Uniformity across subgraphs/communities</a:t>
+            </a:r>
+          </a:p>
+          <a:p>
+            <a:r>
+              <a:rPr lang="en-GB" dirty="0">
+                <a:latin typeface="+mj-lt"/>
+              </a:rPr>
+              <a:t>Metric distribution comparison</a:t>
+            </a:r>
+          </a:p>
+          <a:p>
+            <a:pPr lvl="1"/>
+            <a:r>
+              <a:rPr lang="en-GB" dirty="0">
+                <a:latin typeface="+mj-lt"/>
+              </a:rPr>
+              <a:t>t-tests for equal means</a:t>
+            </a:r>
+          </a:p>
+          <a:p>
+            <a:pPr lvl="1"/>
+            <a:r>
+              <a:rPr lang="en-GB" dirty="0">
+                <a:latin typeface="+mj-lt"/>
+              </a:rPr>
+              <a:t>Maximum Mean Discrepancy (MMD) tests</a:t>
+            </a:r>
+          </a:p>
+        </p:txBody>
+      </p:sp>
+      <p:sp>
+        <p:nvSpPr>
+          <p:cNvPr id="8" name="Title 7">
+            <a:extLst>
+              <a:ext uri="{FF2B5EF4-FFF2-40B4-BE49-F238E27FC236}">
+                <a16:creationId xmlns:a16="http://schemas.microsoft.com/office/drawing/2014/main" id="{2D524572-780A-6ECC-9628-170D00AF59E9}"/>
+              </a:ext>
+            </a:extLst>
+          </p:cNvPr>
+          <p:cNvSpPr>
+            <a:spLocks noGrp="1"/>
+          </p:cNvSpPr>
+          <p:nvPr>
+            <p:ph type="title"/>
+          </p:nvPr>
+        </p:nvSpPr>
+        <p:spPr/>
+        <p:txBody>
+          <a:bodyPr>
+            <a:normAutofit/>
+          </a:bodyPr>
+          <a:lstStyle/>
+          <a:p>
+            <a:r>
+              <a:rPr lang="en-US" dirty="0"/>
+              <a:t>3.2	Methodology</a:t>
+            </a:r>
+            <a:br>
+              <a:rPr lang="en-US" dirty="0"/>
+            </a:br>
+            <a:r>
+              <a:rPr lang="en-US" sz="2400" b="0" i="1" dirty="0"/>
+              <a:t>Statistical comparison</a:t>
+            </a:r>
+            <a:endParaRPr lang="en-GB" sz="2400" b="0" i="1" dirty="0"/>
+          </a:p>
+        </p:txBody>
+      </p:sp>
+      <p:sp>
+        <p:nvSpPr>
+          <p:cNvPr id="5" name="Date Placeholder 4">
+            <a:extLst>
+              <a:ext uri="{FF2B5EF4-FFF2-40B4-BE49-F238E27FC236}">
+                <a16:creationId xmlns:a16="http://schemas.microsoft.com/office/drawing/2014/main" id="{FBF05FBE-E3FA-D38B-EEF2-D2C76D3F0BCD}"/>
+              </a:ext>
+            </a:extLst>
+          </p:cNvPr>
+          <p:cNvSpPr>
+            <a:spLocks noGrp="1"/>
+          </p:cNvSpPr>
+          <p:nvPr>
+            <p:ph type="dt" sz="half" idx="10"/>
+          </p:nvPr>
+        </p:nvSpPr>
+        <p:spPr/>
+        <p:txBody>
+          <a:bodyPr/>
+          <a:lstStyle/>
+          <a:p>
+            <a:r>
+              <a:rPr lang="en-US" sz="600" dirty="0">
+                <a:latin typeface="+mj-lt"/>
+              </a:rPr>
+              <a:t>EDIC PhD Private Defense / Scalable Methods for Knowledge Graph Reasoning and Generation</a:t>
+            </a:r>
+          </a:p>
+        </p:txBody>
+      </p:sp>
+      <p:sp>
+        <p:nvSpPr>
+          <p:cNvPr id="6" name="Footer Placeholder 5">
+            <a:extLst>
+              <a:ext uri="{FF2B5EF4-FFF2-40B4-BE49-F238E27FC236}">
+                <a16:creationId xmlns:a16="http://schemas.microsoft.com/office/drawing/2014/main" id="{43E8AB6A-6623-3ABD-B569-A22208FAA894}"/>
+              </a:ext>
+            </a:extLst>
+          </p:cNvPr>
+          <p:cNvSpPr>
+            <a:spLocks noGrp="1"/>
+          </p:cNvSpPr>
+          <p:nvPr>
+            <p:ph type="ftr" sz="quarter" idx="11"/>
+          </p:nvPr>
+        </p:nvSpPr>
+        <p:spPr/>
+        <p:txBody>
+          <a:bodyPr/>
+          <a:lstStyle/>
+          <a:p>
+            <a:r>
+              <a:rPr lang="fr-FR" dirty="0">
+                <a:latin typeface="+mj-lt"/>
+              </a:rPr>
+              <a:t>Andrej Janchevski, EPFL STI IEM LIONS, Lausanne, </a:t>
+            </a:r>
+            <a:r>
+              <a:rPr lang="fr-FR" dirty="0" err="1">
+                <a:latin typeface="+mj-lt"/>
+              </a:rPr>
+              <a:t>Switzerland</a:t>
+            </a:r>
+            <a:r>
+              <a:rPr lang="fr-FR" dirty="0">
+                <a:latin typeface="+mj-lt"/>
+              </a:rPr>
+              <a:t> </a:t>
+            </a:r>
+          </a:p>
+        </p:txBody>
+      </p:sp>
+      <p:sp>
+        <p:nvSpPr>
+          <p:cNvPr id="7" name="Slide Number Placeholder 6">
+            <a:extLst>
+              <a:ext uri="{FF2B5EF4-FFF2-40B4-BE49-F238E27FC236}">
+                <a16:creationId xmlns:a16="http://schemas.microsoft.com/office/drawing/2014/main" id="{A5EF99C6-6BB7-514A-689C-3AC5CAC80B8A}"/>
+              </a:ext>
+            </a:extLst>
+          </p:cNvPr>
+          <p:cNvSpPr>
+            <a:spLocks noGrp="1"/>
+          </p:cNvSpPr>
+          <p:nvPr>
+            <p:ph type="sldNum" sz="quarter" idx="12"/>
+          </p:nvPr>
+        </p:nvSpPr>
+        <p:spPr/>
+        <p:txBody>
+          <a:bodyPr/>
+          <a:lstStyle/>
+          <a:p>
+            <a:fld id="{E1E1CD7C-2161-7D43-862E-CE4C333CD873}" type="slidenum">
+              <a:rPr lang="fr-FR" smtClean="0"/>
+              <a:pPr/>
+              <a:t>30</a:t>
+            </a:fld>
+            <a:endParaRPr lang="fr-FR" dirty="0"/>
+          </a:p>
+        </p:txBody>
+      </p:sp>
+    </p:spTree>
+    <p:extLst>
+      <p:ext uri="{BB962C8B-B14F-4D97-AF65-F5344CB8AC3E}">
+        <p14:creationId xmlns:p14="http://schemas.microsoft.com/office/powerpoint/2010/main" val="1431504271"/>
+      </p:ext>
+    </p:extLst>
+  </p:cSld>
+  <p:clrMapOvr>
+    <a:masterClrMapping/>
+  </p:clrMapOvr>
+  <p:timing>
+    <p:tnLst>
+      <p:par>
+        <p:cTn id="1" dur="indefinite" restart="never" nodeType="tmRoot">
+          <p:childTnLst>
+            <p:seq concurrent="1" nextAc="seek">
+              <p:cTn id="2" dur="indefinite" nodeType="mainSeq">
+                <p:childTnLst>
+                  <p:par>
+                    <p:cTn id="3" fill="hold">
+                      <p:stCondLst>
+                        <p:cond delay="indefinite"/>
+                      </p:stCondLst>
+                      <p:childTnLst>
+                        <p:par>
+                          <p:cTn id="4" fill="hold">
+                            <p:stCondLst>
+                              <p:cond delay="0"/>
+                            </p:stCondLst>
+                            <p:childTnLst>
+                              <p:par>
+                                <p:cTn id="5" presetID="14" presetClass="entr" presetSubtype="10" fill="hold" nodeType="clickEffect">
+                                  <p:stCondLst>
+                                    <p:cond delay="0"/>
+                                  </p:stCondLst>
+                                  <p:childTnLst>
+                                    <p:set>
+                                      <p:cBhvr>
+                                        <p:cTn id="6" dur="1" fill="hold">
+                                          <p:stCondLst>
+                                            <p:cond delay="0"/>
+                                          </p:stCondLst>
+                                        </p:cTn>
+                                        <p:tgtEl>
+                                          <p:spTgt spid="9">
+                                            <p:txEl>
+                                              <p:pRg st="0" end="0"/>
+                                            </p:txEl>
+                                          </p:spTgt>
+                                        </p:tgtEl>
+                                        <p:attrNameLst>
+                                          <p:attrName>style.visibility</p:attrName>
+                                        </p:attrNameLst>
+                                      </p:cBhvr>
+                                      <p:to>
+                                        <p:strVal val="visible"/>
+                                      </p:to>
+                                    </p:set>
+                                    <p:animEffect transition="in" filter="randombar(horizontal)">
+                                      <p:cBhvr>
+                                        <p:cTn id="7" dur="500"/>
+                                        <p:tgtEl>
+                                          <p:spTgt spid="9">
+                                            <p:txEl>
+                                              <p:pRg st="0" end="0"/>
+                                            </p:txEl>
+                                          </p:spTgt>
+                                        </p:tgtEl>
+                                      </p:cBhvr>
+                                    </p:animEffect>
+                                  </p:childTnLst>
+                                </p:cTn>
+                              </p:par>
+                              <p:par>
+                                <p:cTn id="8" presetID="14" presetClass="entr" presetSubtype="10" fill="hold" nodeType="withEffect">
+                                  <p:stCondLst>
+                                    <p:cond delay="0"/>
+                                  </p:stCondLst>
+                                  <p:childTnLst>
+                                    <p:set>
+                                      <p:cBhvr>
+                                        <p:cTn id="9" dur="1" fill="hold">
+                                          <p:stCondLst>
+                                            <p:cond delay="0"/>
+                                          </p:stCondLst>
+                                        </p:cTn>
+                                        <p:tgtEl>
+                                          <p:spTgt spid="9">
+                                            <p:txEl>
+                                              <p:pRg st="1" end="1"/>
+                                            </p:txEl>
+                                          </p:spTgt>
+                                        </p:tgtEl>
+                                        <p:attrNameLst>
+                                          <p:attrName>style.visibility</p:attrName>
+                                        </p:attrNameLst>
+                                      </p:cBhvr>
+                                      <p:to>
+                                        <p:strVal val="visible"/>
+                                      </p:to>
+                                    </p:set>
+                                    <p:animEffect transition="in" filter="randombar(horizontal)">
+                                      <p:cBhvr>
+                                        <p:cTn id="10" dur="500"/>
+                                        <p:tgtEl>
+                                          <p:spTgt spid="9">
+                                            <p:txEl>
+                                              <p:pRg st="1" end="1"/>
+                                            </p:txEl>
+                                          </p:spTgt>
+                                        </p:tgtEl>
+                                      </p:cBhvr>
+                                    </p:animEffect>
+                                  </p:childTnLst>
+                                </p:cTn>
+                              </p:par>
+                              <p:par>
+                                <p:cTn id="11" presetID="14" presetClass="entr" presetSubtype="10" fill="hold" nodeType="withEffect">
+                                  <p:stCondLst>
+                                    <p:cond delay="0"/>
+                                  </p:stCondLst>
+                                  <p:childTnLst>
+                                    <p:set>
+                                      <p:cBhvr>
+                                        <p:cTn id="12" dur="1" fill="hold">
+                                          <p:stCondLst>
+                                            <p:cond delay="0"/>
+                                          </p:stCondLst>
+                                        </p:cTn>
+                                        <p:tgtEl>
+                                          <p:spTgt spid="9">
+                                            <p:txEl>
+                                              <p:pRg st="2" end="2"/>
+                                            </p:txEl>
+                                          </p:spTgt>
+                                        </p:tgtEl>
+                                        <p:attrNameLst>
+                                          <p:attrName>style.visibility</p:attrName>
+                                        </p:attrNameLst>
+                                      </p:cBhvr>
+                                      <p:to>
+                                        <p:strVal val="visible"/>
+                                      </p:to>
+                                    </p:set>
+                                    <p:animEffect transition="in" filter="randombar(horizontal)">
+                                      <p:cBhvr>
+                                        <p:cTn id="13" dur="500"/>
+                                        <p:tgtEl>
+                                          <p:spTgt spid="9">
+                                            <p:txEl>
+                                              <p:pRg st="2" end="2"/>
+                                            </p:txEl>
+                                          </p:spTgt>
+                                        </p:tgtEl>
+                                      </p:cBhvr>
+                                    </p:animEffect>
+                                  </p:childTnLst>
+                                </p:cTn>
+                              </p:par>
+                              <p:par>
+                                <p:cTn id="14" presetID="14" presetClass="entr" presetSubtype="10" fill="hold" nodeType="withEffect">
+                                  <p:stCondLst>
+                                    <p:cond delay="0"/>
+                                  </p:stCondLst>
+                                  <p:childTnLst>
+                                    <p:set>
+                                      <p:cBhvr>
+                                        <p:cTn id="15" dur="1" fill="hold">
+                                          <p:stCondLst>
+                                            <p:cond delay="0"/>
+                                          </p:stCondLst>
+                                        </p:cTn>
+                                        <p:tgtEl>
+                                          <p:spTgt spid="9">
+                                            <p:txEl>
+                                              <p:pRg st="3" end="3"/>
+                                            </p:txEl>
+                                          </p:spTgt>
+                                        </p:tgtEl>
+                                        <p:attrNameLst>
+                                          <p:attrName>style.visibility</p:attrName>
+                                        </p:attrNameLst>
+                                      </p:cBhvr>
+                                      <p:to>
+                                        <p:strVal val="visible"/>
+                                      </p:to>
+                                    </p:set>
+                                    <p:animEffect transition="in" filter="randombar(horizontal)">
+                                      <p:cBhvr>
+                                        <p:cTn id="16" dur="500"/>
+                                        <p:tgtEl>
+                                          <p:spTgt spid="9">
+                                            <p:txEl>
+                                              <p:pRg st="3" end="3"/>
+                                            </p:txEl>
+                                          </p:spTgt>
+                                        </p:tgtEl>
+                                      </p:cBhvr>
+                                    </p:animEffect>
+                                  </p:childTnLst>
+                                </p:cTn>
+                              </p:par>
+                              <p:par>
+                                <p:cTn id="17" presetID="14" presetClass="entr" presetSubtype="10" fill="hold" nodeType="withEffect">
+                                  <p:stCondLst>
+                                    <p:cond delay="0"/>
+                                  </p:stCondLst>
+                                  <p:childTnLst>
+                                    <p:set>
+                                      <p:cBhvr>
+                                        <p:cTn id="18" dur="1" fill="hold">
+                                          <p:stCondLst>
+                                            <p:cond delay="0"/>
+                                          </p:stCondLst>
+                                        </p:cTn>
+                                        <p:tgtEl>
+                                          <p:spTgt spid="9">
+                                            <p:txEl>
+                                              <p:pRg st="4" end="4"/>
+                                            </p:txEl>
+                                          </p:spTgt>
+                                        </p:tgtEl>
+                                        <p:attrNameLst>
+                                          <p:attrName>style.visibility</p:attrName>
+                                        </p:attrNameLst>
+                                      </p:cBhvr>
+                                      <p:to>
+                                        <p:strVal val="visible"/>
+                                      </p:to>
+                                    </p:set>
+                                    <p:animEffect transition="in" filter="randombar(horizontal)">
+                                      <p:cBhvr>
+                                        <p:cTn id="19" dur="500"/>
+                                        <p:tgtEl>
+                                          <p:spTgt spid="9">
+                                            <p:txEl>
+                                              <p:pRg st="4" end="4"/>
+                                            </p:txEl>
+                                          </p:spTgt>
+                                        </p:tgtEl>
+                                      </p:cBhvr>
+                                    </p:animEffect>
+                                  </p:childTnLst>
+                                </p:cTn>
+                              </p:par>
+                            </p:childTnLst>
+                          </p:cTn>
+                        </p:par>
+                      </p:childTnLst>
+                    </p:cTn>
+                  </p:par>
+                  <p:par>
+                    <p:cTn id="20" fill="hold">
+                      <p:stCondLst>
+                        <p:cond delay="indefinite"/>
+                      </p:stCondLst>
+                      <p:childTnLst>
+                        <p:par>
+                          <p:cTn id="21" fill="hold">
+                            <p:stCondLst>
+                              <p:cond delay="0"/>
+                            </p:stCondLst>
+                            <p:childTnLst>
+                              <p:par>
+                                <p:cTn id="22" presetID="14" presetClass="entr" presetSubtype="10" fill="hold" nodeType="clickEffect">
+                                  <p:stCondLst>
+                                    <p:cond delay="0"/>
+                                  </p:stCondLst>
+                                  <p:childTnLst>
+                                    <p:set>
+                                      <p:cBhvr>
+                                        <p:cTn id="23" dur="1" fill="hold">
+                                          <p:stCondLst>
+                                            <p:cond delay="0"/>
+                                          </p:stCondLst>
+                                        </p:cTn>
+                                        <p:tgtEl>
+                                          <p:spTgt spid="9">
+                                            <p:txEl>
+                                              <p:pRg st="5" end="5"/>
+                                            </p:txEl>
+                                          </p:spTgt>
+                                        </p:tgtEl>
+                                        <p:attrNameLst>
+                                          <p:attrName>style.visibility</p:attrName>
+                                        </p:attrNameLst>
+                                      </p:cBhvr>
+                                      <p:to>
+                                        <p:strVal val="visible"/>
+                                      </p:to>
+                                    </p:set>
+                                    <p:animEffect transition="in" filter="randombar(horizontal)">
+                                      <p:cBhvr>
+                                        <p:cTn id="24" dur="500"/>
+                                        <p:tgtEl>
+                                          <p:spTgt spid="9">
+                                            <p:txEl>
+                                              <p:pRg st="5" end="5"/>
+                                            </p:txEl>
+                                          </p:spTgt>
+                                        </p:tgtEl>
+                                      </p:cBhvr>
+                                    </p:animEffect>
+                                  </p:childTnLst>
+                                </p:cTn>
+                              </p:par>
+                              <p:par>
+                                <p:cTn id="25" presetID="14" presetClass="entr" presetSubtype="10" fill="hold" nodeType="withEffect">
+                                  <p:stCondLst>
+                                    <p:cond delay="0"/>
+                                  </p:stCondLst>
+                                  <p:childTnLst>
+                                    <p:set>
+                                      <p:cBhvr>
+                                        <p:cTn id="26" dur="1" fill="hold">
+                                          <p:stCondLst>
+                                            <p:cond delay="0"/>
+                                          </p:stCondLst>
+                                        </p:cTn>
+                                        <p:tgtEl>
+                                          <p:spTgt spid="9">
+                                            <p:txEl>
+                                              <p:pRg st="6" end="6"/>
+                                            </p:txEl>
+                                          </p:spTgt>
+                                        </p:tgtEl>
+                                        <p:attrNameLst>
+                                          <p:attrName>style.visibility</p:attrName>
+                                        </p:attrNameLst>
+                                      </p:cBhvr>
+                                      <p:to>
+                                        <p:strVal val="visible"/>
+                                      </p:to>
+                                    </p:set>
+                                    <p:animEffect transition="in" filter="randombar(horizontal)">
+                                      <p:cBhvr>
+                                        <p:cTn id="27" dur="500"/>
+                                        <p:tgtEl>
+                                          <p:spTgt spid="9">
+                                            <p:txEl>
+                                              <p:pRg st="6" end="6"/>
+                                            </p:txEl>
+                                          </p:spTgt>
+                                        </p:tgtEl>
+                                      </p:cBhvr>
+                                    </p:animEffect>
+                                  </p:childTnLst>
+                                </p:cTn>
+                              </p:par>
+                              <p:par>
+                                <p:cTn id="28" presetID="14" presetClass="entr" presetSubtype="10" fill="hold" nodeType="withEffect">
+                                  <p:stCondLst>
+                                    <p:cond delay="0"/>
+                                  </p:stCondLst>
+                                  <p:childTnLst>
+                                    <p:set>
+                                      <p:cBhvr>
+                                        <p:cTn id="29" dur="1" fill="hold">
+                                          <p:stCondLst>
+                                            <p:cond delay="0"/>
+                                          </p:stCondLst>
+                                        </p:cTn>
+                                        <p:tgtEl>
+                                          <p:spTgt spid="9">
+                                            <p:txEl>
+                                              <p:pRg st="7" end="7"/>
+                                            </p:txEl>
+                                          </p:spTgt>
+                                        </p:tgtEl>
+                                        <p:attrNameLst>
+                                          <p:attrName>style.visibility</p:attrName>
+                                        </p:attrNameLst>
+                                      </p:cBhvr>
+                                      <p:to>
+                                        <p:strVal val="visible"/>
+                                      </p:to>
+                                    </p:set>
+                                    <p:animEffect transition="in" filter="randombar(horizontal)">
+                                      <p:cBhvr>
+                                        <p:cTn id="30" dur="500"/>
+                                        <p:tgtEl>
+                                          <p:spTgt spid="9">
+                                            <p:txEl>
+                                              <p:pRg st="7" end="7"/>
+                                            </p:txEl>
+                                          </p:spTgt>
+                                        </p:tgtEl>
+                                      </p:cBhvr>
+                                    </p:animEffect>
+                                  </p:childTnLst>
+                                </p:cTn>
+                              </p:par>
+                            </p:childTnLst>
+                          </p:cTn>
+                        </p:par>
+                      </p:childTnLst>
+                    </p:cTn>
+                  </p:par>
+                  <p:par>
+                    <p:cTn id="31" fill="hold">
+                      <p:stCondLst>
+                        <p:cond delay="indefinite"/>
+                      </p:stCondLst>
+                      <p:childTnLst>
+                        <p:par>
+                          <p:cTn id="32" fill="hold">
+                            <p:stCondLst>
+                              <p:cond delay="0"/>
+                            </p:stCondLst>
+                            <p:childTnLst>
+                              <p:par>
+                                <p:cTn id="33" presetID="14" presetClass="entr" presetSubtype="10" fill="hold" nodeType="clickEffect">
+                                  <p:stCondLst>
+                                    <p:cond delay="0"/>
+                                  </p:stCondLst>
+                                  <p:childTnLst>
+                                    <p:set>
+                                      <p:cBhvr>
+                                        <p:cTn id="34" dur="1" fill="hold">
+                                          <p:stCondLst>
+                                            <p:cond delay="0"/>
+                                          </p:stCondLst>
+                                        </p:cTn>
+                                        <p:tgtEl>
+                                          <p:spTgt spid="9">
+                                            <p:txEl>
+                                              <p:pRg st="8" end="8"/>
+                                            </p:txEl>
+                                          </p:spTgt>
+                                        </p:tgtEl>
+                                        <p:attrNameLst>
+                                          <p:attrName>style.visibility</p:attrName>
+                                        </p:attrNameLst>
+                                      </p:cBhvr>
+                                      <p:to>
+                                        <p:strVal val="visible"/>
+                                      </p:to>
+                                    </p:set>
+                                    <p:animEffect transition="in" filter="randombar(horizontal)">
+                                      <p:cBhvr>
+                                        <p:cTn id="35" dur="500"/>
+                                        <p:tgtEl>
+                                          <p:spTgt spid="9">
+                                            <p:txEl>
+                                              <p:pRg st="8" end="8"/>
+                                            </p:txEl>
+                                          </p:spTgt>
+                                        </p:tgtEl>
+                                      </p:cBhvr>
+                                    </p:animEffect>
+                                  </p:childTnLst>
+                                </p:cTn>
+                              </p:par>
+                              <p:par>
+                                <p:cTn id="36" presetID="14" presetClass="entr" presetSubtype="10" fill="hold" nodeType="withEffect">
+                                  <p:stCondLst>
+                                    <p:cond delay="0"/>
+                                  </p:stCondLst>
+                                  <p:childTnLst>
+                                    <p:set>
+                                      <p:cBhvr>
+                                        <p:cTn id="37" dur="1" fill="hold">
+                                          <p:stCondLst>
+                                            <p:cond delay="0"/>
+                                          </p:stCondLst>
+                                        </p:cTn>
+                                        <p:tgtEl>
+                                          <p:spTgt spid="9">
+                                            <p:txEl>
+                                              <p:pRg st="9" end="9"/>
+                                            </p:txEl>
+                                          </p:spTgt>
+                                        </p:tgtEl>
+                                        <p:attrNameLst>
+                                          <p:attrName>style.visibility</p:attrName>
+                                        </p:attrNameLst>
+                                      </p:cBhvr>
+                                      <p:to>
+                                        <p:strVal val="visible"/>
+                                      </p:to>
+                                    </p:set>
+                                    <p:animEffect transition="in" filter="randombar(horizontal)">
+                                      <p:cBhvr>
+                                        <p:cTn id="38" dur="500"/>
+                                        <p:tgtEl>
+                                          <p:spTgt spid="9">
+                                            <p:txEl>
+                                              <p:pRg st="9" end="9"/>
+                                            </p:txEl>
+                                          </p:spTgt>
+                                        </p:tgtEl>
+                                      </p:cBhvr>
+                                    </p:animEffect>
+                                  </p:childTnLst>
+                                </p:cTn>
+                              </p:par>
+                              <p:par>
+                                <p:cTn id="39" presetID="14" presetClass="entr" presetSubtype="10" fill="hold" nodeType="withEffect">
+                                  <p:stCondLst>
+                                    <p:cond delay="0"/>
+                                  </p:stCondLst>
+                                  <p:childTnLst>
+                                    <p:set>
+                                      <p:cBhvr>
+                                        <p:cTn id="40" dur="1" fill="hold">
+                                          <p:stCondLst>
+                                            <p:cond delay="0"/>
+                                          </p:stCondLst>
+                                        </p:cTn>
+                                        <p:tgtEl>
+                                          <p:spTgt spid="9">
+                                            <p:txEl>
+                                              <p:pRg st="10" end="10"/>
+                                            </p:txEl>
+                                          </p:spTgt>
+                                        </p:tgtEl>
+                                        <p:attrNameLst>
+                                          <p:attrName>style.visibility</p:attrName>
+                                        </p:attrNameLst>
+                                      </p:cBhvr>
+                                      <p:to>
+                                        <p:strVal val="visible"/>
+                                      </p:to>
+                                    </p:set>
+                                    <p:animEffect transition="in" filter="randombar(horizontal)">
+                                      <p:cBhvr>
+                                        <p:cTn id="41" dur="500"/>
+                                        <p:tgtEl>
+                                          <p:spTgt spid="9">
+                                            <p:txEl>
+                                              <p:pRg st="10" end="10"/>
+                                            </p:txEl>
+                                          </p:spTgt>
+                                        </p:tgtEl>
+                                      </p:cBhvr>
+                                    </p:animEffect>
+                                  </p:childTnLst>
+                                </p:cTn>
+                              </p:par>
+                            </p:childTnLst>
+                          </p:cTn>
+                        </p:par>
+                      </p:childTnLst>
+                    </p:cTn>
+                  </p:par>
+                </p:childTnLst>
+              </p:cTn>
+              <p:prevCondLst>
+                <p:cond evt="onPrev" delay="0">
+                  <p:tgtEl>
+                    <p:sldTgt/>
+                  </p:tgtEl>
+                </p:cond>
+              </p:prevCondLst>
+              <p:nextCondLst>
+                <p:cond evt="onNext" delay="0">
+                  <p:tgtEl>
+                    <p:sldTgt/>
+                  </p:tgtEl>
+                </p:cond>
+              </p:nextCondLst>
+            </p:seq>
+          </p:childTnLst>
+        </p:cTn>
+      </p:par>
+    </p:tnLst>
+  </p:timing>
+</p:sld>
+</file>
+
+<file path=ppt/slides/slide31.xml><?xml version="1.0" encoding="utf-8"?>
+<p:sld xmlns:a="http://schemas.openxmlformats.org/drawingml/2006/main" xmlns:r="http://schemas.openxmlformats.org/officeDocument/2006/relationships" xmlns:p="http://schemas.openxmlformats.org/presentationml/2006/main">
+  <p:cSld>
+    <p:spTree>
+      <p:nvGrpSpPr>
+        <p:cNvPr id="1" name="">
+          <a:extLst>
+            <a:ext uri="{FF2B5EF4-FFF2-40B4-BE49-F238E27FC236}">
+              <a16:creationId xmlns:a16="http://schemas.microsoft.com/office/drawing/2014/main" id="{96CFB051-BEFB-2AEF-419E-BBEBED2918D4}"/>
+            </a:ext>
+          </a:extLst>
+        </p:cNvPr>
+        <p:cNvGrpSpPr/>
+        <p:nvPr/>
+      </p:nvGrpSpPr>
+      <p:grpSpPr>
+        <a:xfrm>
+          <a:off x="0" y="0"/>
+          <a:ext cx="0" cy="0"/>
+          <a:chOff x="0" y="0"/>
+          <a:chExt cx="0" cy="0"/>
+        </a:xfrm>
+      </p:grpSpPr>
+      <p:sp>
+        <p:nvSpPr>
+          <p:cNvPr id="9" name="Content Placeholder 8">
+            <a:extLst>
+              <a:ext uri="{FF2B5EF4-FFF2-40B4-BE49-F238E27FC236}">
+                <a16:creationId xmlns:a16="http://schemas.microsoft.com/office/drawing/2014/main" id="{E633FC14-39C3-0866-278F-E84499F617E7}"/>
+              </a:ext>
+            </a:extLst>
+          </p:cNvPr>
+          <p:cNvSpPr>
+            <a:spLocks noGrp="1"/>
+          </p:cNvSpPr>
+          <p:nvPr>
+            <p:ph idx="1"/>
+          </p:nvPr>
+        </p:nvSpPr>
+        <p:spPr/>
+        <p:txBody>
+          <a:bodyPr/>
+          <a:lstStyle/>
+          <a:p>
+            <a:r>
+              <a:rPr lang="en-US" dirty="0">
+                <a:latin typeface="+mj-lt"/>
+              </a:rPr>
+              <a:t>Features</a:t>
+            </a:r>
+          </a:p>
+          <a:p>
+            <a:pPr lvl="1"/>
+            <a:r>
+              <a:rPr lang="en-US" dirty="0">
+                <a:latin typeface="+mj-lt"/>
+              </a:rPr>
+              <a:t>Almost no label </a:t>
+            </a:r>
+            <a:r>
+              <a:rPr lang="en-US" dirty="0" err="1">
+                <a:latin typeface="+mj-lt"/>
+              </a:rPr>
+              <a:t>assortativity</a:t>
+            </a:r>
+            <a:endParaRPr lang="en-US" dirty="0">
+              <a:latin typeface="+mj-lt"/>
+            </a:endParaRPr>
+          </a:p>
+          <a:p>
+            <a:pPr lvl="1"/>
+            <a:r>
+              <a:rPr lang="en-US" dirty="0">
+                <a:latin typeface="+mj-lt"/>
+              </a:rPr>
+              <a:t>Sparsest knowledge graph, weekly but not strongly connected, short paths and small diameter, weak clustering (all by design)</a:t>
+            </a:r>
+          </a:p>
+          <a:p>
+            <a:pPr lvl="1"/>
+            <a:r>
+              <a:rPr lang="en-US" dirty="0">
+                <a:latin typeface="+mj-lt"/>
+              </a:rPr>
+              <a:t>Clearly identifiable hubs and authorities</a:t>
+            </a:r>
+          </a:p>
+          <a:p>
+            <a:pPr lvl="1"/>
+            <a:r>
+              <a:rPr lang="en-US" dirty="0">
+                <a:latin typeface="+mj-lt"/>
+              </a:rPr>
+              <a:t>Biggest feature: </a:t>
+            </a:r>
+            <a:r>
+              <a:rPr lang="en-US" i="1" dirty="0">
+                <a:latin typeface="+mj-lt"/>
+              </a:rPr>
+              <a:t>community structure with &gt;99% Leiden modularity</a:t>
+            </a:r>
+          </a:p>
+          <a:p>
+            <a:pPr lvl="1"/>
+            <a:r>
+              <a:rPr lang="en-US" dirty="0">
+                <a:latin typeface="+mj-lt"/>
+              </a:rPr>
+              <a:t>Association rules reverse-engineer schema</a:t>
+            </a:r>
+          </a:p>
+          <a:p>
+            <a:r>
+              <a:rPr lang="en-US" dirty="0">
+                <a:latin typeface="+mj-lt"/>
+              </a:rPr>
+              <a:t>Metric distributions</a:t>
+            </a:r>
+          </a:p>
+          <a:p>
+            <a:pPr lvl="1"/>
+            <a:r>
+              <a:rPr lang="en-US" dirty="0">
+                <a:latin typeface="+mj-lt"/>
+              </a:rPr>
+              <a:t>Heavy-tailed label frequencies and motifs, uniformity across subgraphs</a:t>
+            </a:r>
+          </a:p>
+          <a:p>
+            <a:pPr lvl="1"/>
+            <a:r>
+              <a:rPr lang="en-US" dirty="0">
+                <a:latin typeface="+mj-lt"/>
+              </a:rPr>
+              <a:t>Most similar to WordNet and transport networks (i.e., unlike random networks)</a:t>
+            </a:r>
+          </a:p>
+          <a:p>
+            <a:r>
+              <a:rPr lang="en-US" dirty="0">
+                <a:latin typeface="+mj-lt"/>
+              </a:rPr>
+              <a:t>Summary: </a:t>
+            </a:r>
+            <a:r>
+              <a:rPr lang="en-US" i="1" dirty="0">
+                <a:latin typeface="+mj-lt"/>
+              </a:rPr>
+              <a:t>Monty is the easiest dataset for COINs, need to ablate to generalize</a:t>
+            </a:r>
+          </a:p>
+          <a:p>
+            <a:endParaRPr lang="en-GB" dirty="0">
+              <a:latin typeface="+mj-lt"/>
+            </a:endParaRPr>
+          </a:p>
+        </p:txBody>
+      </p:sp>
+      <p:sp>
+        <p:nvSpPr>
+          <p:cNvPr id="8" name="Title 7">
+            <a:extLst>
+              <a:ext uri="{FF2B5EF4-FFF2-40B4-BE49-F238E27FC236}">
+                <a16:creationId xmlns:a16="http://schemas.microsoft.com/office/drawing/2014/main" id="{2631A99C-0D48-914A-3B8E-87F8AB75C07E}"/>
+              </a:ext>
+            </a:extLst>
+          </p:cNvPr>
+          <p:cNvSpPr>
+            <a:spLocks noGrp="1"/>
+          </p:cNvSpPr>
+          <p:nvPr>
+            <p:ph type="title"/>
+          </p:nvPr>
+        </p:nvSpPr>
+        <p:spPr/>
+        <p:txBody>
+          <a:bodyPr>
+            <a:normAutofit/>
+          </a:bodyPr>
+          <a:lstStyle/>
+          <a:p>
+            <a:r>
+              <a:rPr lang="en-US" dirty="0"/>
+              <a:t>3.2	Results</a:t>
+            </a:r>
+            <a:br>
+              <a:rPr lang="en-US" dirty="0"/>
+            </a:br>
+            <a:r>
+              <a:rPr lang="en-US" sz="2400" b="0" i="1" dirty="0"/>
+              <a:t>Swisscom vs. the world</a:t>
+            </a:r>
+            <a:endParaRPr lang="en-GB" sz="2400" b="0" i="1" dirty="0"/>
+          </a:p>
+        </p:txBody>
+      </p:sp>
+      <p:sp>
+        <p:nvSpPr>
+          <p:cNvPr id="5" name="Date Placeholder 4">
+            <a:extLst>
+              <a:ext uri="{FF2B5EF4-FFF2-40B4-BE49-F238E27FC236}">
+                <a16:creationId xmlns:a16="http://schemas.microsoft.com/office/drawing/2014/main" id="{0133011F-4AF1-BA72-B366-E096C306E2CC}"/>
+              </a:ext>
+            </a:extLst>
+          </p:cNvPr>
+          <p:cNvSpPr>
+            <a:spLocks noGrp="1"/>
+          </p:cNvSpPr>
+          <p:nvPr>
+            <p:ph type="dt" sz="half" idx="10"/>
+          </p:nvPr>
+        </p:nvSpPr>
+        <p:spPr/>
+        <p:txBody>
+          <a:bodyPr/>
+          <a:lstStyle/>
+          <a:p>
+            <a:r>
+              <a:rPr lang="en-US" sz="600" dirty="0">
+                <a:latin typeface="+mj-lt"/>
+              </a:rPr>
+              <a:t>EDIC PhD Private Defense / Scalable Methods for Knowledge Graph Reasoning and Generation</a:t>
+            </a:r>
+          </a:p>
+        </p:txBody>
+      </p:sp>
+      <p:sp>
+        <p:nvSpPr>
+          <p:cNvPr id="6" name="Footer Placeholder 5">
+            <a:extLst>
+              <a:ext uri="{FF2B5EF4-FFF2-40B4-BE49-F238E27FC236}">
+                <a16:creationId xmlns:a16="http://schemas.microsoft.com/office/drawing/2014/main" id="{63A43BAB-B802-70B3-4DE8-6FF1CE863522}"/>
+              </a:ext>
+            </a:extLst>
+          </p:cNvPr>
+          <p:cNvSpPr>
+            <a:spLocks noGrp="1"/>
+          </p:cNvSpPr>
+          <p:nvPr>
+            <p:ph type="ftr" sz="quarter" idx="11"/>
+          </p:nvPr>
+        </p:nvSpPr>
+        <p:spPr/>
+        <p:txBody>
+          <a:bodyPr/>
+          <a:lstStyle/>
+          <a:p>
+            <a:r>
+              <a:rPr lang="fr-FR" dirty="0">
+                <a:latin typeface="+mj-lt"/>
+              </a:rPr>
+              <a:t>Andrej Janchevski, EPFL STI IEM LIONS, Lausanne, </a:t>
+            </a:r>
+            <a:r>
+              <a:rPr lang="fr-FR" dirty="0" err="1">
+                <a:latin typeface="+mj-lt"/>
+              </a:rPr>
+              <a:t>Switzerland</a:t>
+            </a:r>
+            <a:r>
+              <a:rPr lang="fr-FR" dirty="0">
+                <a:latin typeface="+mj-lt"/>
+              </a:rPr>
+              <a:t> </a:t>
+            </a:r>
+          </a:p>
+        </p:txBody>
+      </p:sp>
+      <p:sp>
+        <p:nvSpPr>
+          <p:cNvPr id="7" name="Slide Number Placeholder 6">
+            <a:extLst>
+              <a:ext uri="{FF2B5EF4-FFF2-40B4-BE49-F238E27FC236}">
+                <a16:creationId xmlns:a16="http://schemas.microsoft.com/office/drawing/2014/main" id="{EB171B61-B5C3-BFE1-0C00-4851D4FDFCCA}"/>
+              </a:ext>
+            </a:extLst>
+          </p:cNvPr>
+          <p:cNvSpPr>
+            <a:spLocks noGrp="1"/>
+          </p:cNvSpPr>
+          <p:nvPr>
+            <p:ph type="sldNum" sz="quarter" idx="12"/>
+          </p:nvPr>
+        </p:nvSpPr>
+        <p:spPr/>
+        <p:txBody>
+          <a:bodyPr/>
+          <a:lstStyle/>
+          <a:p>
+            <a:fld id="{E1E1CD7C-2161-7D43-862E-CE4C333CD873}" type="slidenum">
+              <a:rPr lang="fr-FR" smtClean="0"/>
+              <a:pPr/>
+              <a:t>31</a:t>
+            </a:fld>
+            <a:endParaRPr lang="fr-FR" dirty="0"/>
+          </a:p>
+        </p:txBody>
+      </p:sp>
+    </p:spTree>
+    <p:extLst>
+      <p:ext uri="{BB962C8B-B14F-4D97-AF65-F5344CB8AC3E}">
+        <p14:creationId xmlns:p14="http://schemas.microsoft.com/office/powerpoint/2010/main" val="463120908"/>
+      </p:ext>
+    </p:extLst>
+  </p:cSld>
+  <p:clrMapOvr>
+    <a:masterClrMapping/>
+  </p:clrMapOvr>
+  <p:timing>
+    <p:tnLst>
+      <p:par>
+        <p:cTn id="1" dur="indefinite" restart="never" nodeType="tmRoot">
+          <p:childTnLst>
+            <p:seq concurrent="1" nextAc="seek">
+              <p:cTn id="2" dur="indefinite" nodeType="mainSeq">
+                <p:childTnLst>
+                  <p:par>
+                    <p:cTn id="3" fill="hold">
+                      <p:stCondLst>
+                        <p:cond delay="indefinite"/>
+                      </p:stCondLst>
+                      <p:childTnLst>
+                        <p:par>
+                          <p:cTn id="4" fill="hold">
+                            <p:stCondLst>
+                              <p:cond delay="0"/>
+                            </p:stCondLst>
+                            <p:childTnLst>
+                              <p:par>
+                                <p:cTn id="5" presetID="14" presetClass="entr" presetSubtype="10" fill="hold" nodeType="clickEffect">
+                                  <p:stCondLst>
+                                    <p:cond delay="0"/>
+                                  </p:stCondLst>
+                                  <p:childTnLst>
+                                    <p:set>
+                                      <p:cBhvr>
+                                        <p:cTn id="6" dur="1" fill="hold">
+                                          <p:stCondLst>
+                                            <p:cond delay="0"/>
+                                          </p:stCondLst>
+                                        </p:cTn>
+                                        <p:tgtEl>
+                                          <p:spTgt spid="9">
+                                            <p:txEl>
+                                              <p:pRg st="0" end="0"/>
+                                            </p:txEl>
+                                          </p:spTgt>
+                                        </p:tgtEl>
+                                        <p:attrNameLst>
+                                          <p:attrName>style.visibility</p:attrName>
+                                        </p:attrNameLst>
+                                      </p:cBhvr>
+                                      <p:to>
+                                        <p:strVal val="visible"/>
+                                      </p:to>
+                                    </p:set>
+                                    <p:animEffect transition="in" filter="randombar(horizontal)">
+                                      <p:cBhvr>
+                                        <p:cTn id="7" dur="500"/>
+                                        <p:tgtEl>
+                                          <p:spTgt spid="9">
+                                            <p:txEl>
+                                              <p:pRg st="0" end="0"/>
+                                            </p:txEl>
+                                          </p:spTgt>
+                                        </p:tgtEl>
+                                      </p:cBhvr>
+                                    </p:animEffect>
+                                  </p:childTnLst>
+                                </p:cTn>
+                              </p:par>
+                              <p:par>
+                                <p:cTn id="8" presetID="14" presetClass="entr" presetSubtype="10" fill="hold" nodeType="withEffect">
+                                  <p:stCondLst>
+                                    <p:cond delay="0"/>
+                                  </p:stCondLst>
+                                  <p:childTnLst>
+                                    <p:set>
+                                      <p:cBhvr>
+                                        <p:cTn id="9" dur="1" fill="hold">
+                                          <p:stCondLst>
+                                            <p:cond delay="0"/>
+                                          </p:stCondLst>
+                                        </p:cTn>
+                                        <p:tgtEl>
+                                          <p:spTgt spid="9">
+                                            <p:txEl>
+                                              <p:pRg st="1" end="1"/>
+                                            </p:txEl>
+                                          </p:spTgt>
+                                        </p:tgtEl>
+                                        <p:attrNameLst>
+                                          <p:attrName>style.visibility</p:attrName>
+                                        </p:attrNameLst>
+                                      </p:cBhvr>
+                                      <p:to>
+                                        <p:strVal val="visible"/>
+                                      </p:to>
+                                    </p:set>
+                                    <p:animEffect transition="in" filter="randombar(horizontal)">
+                                      <p:cBhvr>
+                                        <p:cTn id="10" dur="500"/>
+                                        <p:tgtEl>
+                                          <p:spTgt spid="9">
+                                            <p:txEl>
+                                              <p:pRg st="1" end="1"/>
+                                            </p:txEl>
+                                          </p:spTgt>
+                                        </p:tgtEl>
+                                      </p:cBhvr>
+                                    </p:animEffect>
+                                  </p:childTnLst>
+                                </p:cTn>
+                              </p:par>
+                              <p:par>
+                                <p:cTn id="11" presetID="14" presetClass="entr" presetSubtype="10" fill="hold" nodeType="withEffect">
+                                  <p:stCondLst>
+                                    <p:cond delay="0"/>
+                                  </p:stCondLst>
+                                  <p:childTnLst>
+                                    <p:set>
+                                      <p:cBhvr>
+                                        <p:cTn id="12" dur="1" fill="hold">
+                                          <p:stCondLst>
+                                            <p:cond delay="0"/>
+                                          </p:stCondLst>
+                                        </p:cTn>
+                                        <p:tgtEl>
+                                          <p:spTgt spid="9">
+                                            <p:txEl>
+                                              <p:pRg st="2" end="2"/>
+                                            </p:txEl>
+                                          </p:spTgt>
+                                        </p:tgtEl>
+                                        <p:attrNameLst>
+                                          <p:attrName>style.visibility</p:attrName>
+                                        </p:attrNameLst>
+                                      </p:cBhvr>
+                                      <p:to>
+                                        <p:strVal val="visible"/>
+                                      </p:to>
+                                    </p:set>
+                                    <p:animEffect transition="in" filter="randombar(horizontal)">
+                                      <p:cBhvr>
+                                        <p:cTn id="13" dur="500"/>
+                                        <p:tgtEl>
+                                          <p:spTgt spid="9">
+                                            <p:txEl>
+                                              <p:pRg st="2" end="2"/>
+                                            </p:txEl>
+                                          </p:spTgt>
+                                        </p:tgtEl>
+                                      </p:cBhvr>
+                                    </p:animEffect>
+                                  </p:childTnLst>
+                                </p:cTn>
+                              </p:par>
+                              <p:par>
+                                <p:cTn id="14" presetID="14" presetClass="entr" presetSubtype="10" fill="hold" nodeType="withEffect">
+                                  <p:stCondLst>
+                                    <p:cond delay="0"/>
+                                  </p:stCondLst>
+                                  <p:childTnLst>
+                                    <p:set>
+                                      <p:cBhvr>
+                                        <p:cTn id="15" dur="1" fill="hold">
+                                          <p:stCondLst>
+                                            <p:cond delay="0"/>
+                                          </p:stCondLst>
+                                        </p:cTn>
+                                        <p:tgtEl>
+                                          <p:spTgt spid="9">
+                                            <p:txEl>
+                                              <p:pRg st="3" end="3"/>
+                                            </p:txEl>
+                                          </p:spTgt>
+                                        </p:tgtEl>
+                                        <p:attrNameLst>
+                                          <p:attrName>style.visibility</p:attrName>
+                                        </p:attrNameLst>
+                                      </p:cBhvr>
+                                      <p:to>
+                                        <p:strVal val="visible"/>
+                                      </p:to>
+                                    </p:set>
+                                    <p:animEffect transition="in" filter="randombar(horizontal)">
+                                      <p:cBhvr>
+                                        <p:cTn id="16" dur="500"/>
+                                        <p:tgtEl>
+                                          <p:spTgt spid="9">
+                                            <p:txEl>
+                                              <p:pRg st="3" end="3"/>
+                                            </p:txEl>
+                                          </p:spTgt>
+                                        </p:tgtEl>
+                                      </p:cBhvr>
+                                    </p:animEffect>
+                                  </p:childTnLst>
+                                </p:cTn>
+                              </p:par>
+                              <p:par>
+                                <p:cTn id="17" presetID="14" presetClass="entr" presetSubtype="10" fill="hold" nodeType="withEffect">
+                                  <p:stCondLst>
+                                    <p:cond delay="0"/>
+                                  </p:stCondLst>
+                                  <p:childTnLst>
+                                    <p:set>
+                                      <p:cBhvr>
+                                        <p:cTn id="18" dur="1" fill="hold">
+                                          <p:stCondLst>
+                                            <p:cond delay="0"/>
+                                          </p:stCondLst>
+                                        </p:cTn>
+                                        <p:tgtEl>
+                                          <p:spTgt spid="9">
+                                            <p:txEl>
+                                              <p:pRg st="4" end="4"/>
+                                            </p:txEl>
+                                          </p:spTgt>
+                                        </p:tgtEl>
+                                        <p:attrNameLst>
+                                          <p:attrName>style.visibility</p:attrName>
+                                        </p:attrNameLst>
+                                      </p:cBhvr>
+                                      <p:to>
+                                        <p:strVal val="visible"/>
+                                      </p:to>
+                                    </p:set>
+                                    <p:animEffect transition="in" filter="randombar(horizontal)">
+                                      <p:cBhvr>
+                                        <p:cTn id="19" dur="500"/>
+                                        <p:tgtEl>
+                                          <p:spTgt spid="9">
+                                            <p:txEl>
+                                              <p:pRg st="4" end="4"/>
+                                            </p:txEl>
+                                          </p:spTgt>
+                                        </p:tgtEl>
+                                      </p:cBhvr>
+                                    </p:animEffect>
+                                  </p:childTnLst>
+                                </p:cTn>
+                              </p:par>
+                              <p:par>
+                                <p:cTn id="20" presetID="14" presetClass="entr" presetSubtype="10" fill="hold" nodeType="withEffect">
+                                  <p:stCondLst>
+                                    <p:cond delay="0"/>
+                                  </p:stCondLst>
+                                  <p:childTnLst>
+                                    <p:set>
+                                      <p:cBhvr>
+                                        <p:cTn id="21" dur="1" fill="hold">
+                                          <p:stCondLst>
+                                            <p:cond delay="0"/>
+                                          </p:stCondLst>
+                                        </p:cTn>
+                                        <p:tgtEl>
+                                          <p:spTgt spid="9">
+                                            <p:txEl>
+                                              <p:pRg st="5" end="5"/>
+                                            </p:txEl>
+                                          </p:spTgt>
+                                        </p:tgtEl>
+                                        <p:attrNameLst>
+                                          <p:attrName>style.visibility</p:attrName>
+                                        </p:attrNameLst>
+                                      </p:cBhvr>
+                                      <p:to>
+                                        <p:strVal val="visible"/>
+                                      </p:to>
+                                    </p:set>
+                                    <p:animEffect transition="in" filter="randombar(horizontal)">
+                                      <p:cBhvr>
+                                        <p:cTn id="22" dur="500"/>
+                                        <p:tgtEl>
+                                          <p:spTgt spid="9">
+                                            <p:txEl>
+                                              <p:pRg st="5" end="5"/>
+                                            </p:txEl>
+                                          </p:spTgt>
+                                        </p:tgtEl>
+                                      </p:cBhvr>
+                                    </p:animEffect>
+                                  </p:childTnLst>
+                                </p:cTn>
+                              </p:par>
+                            </p:childTnLst>
+                          </p:cTn>
+                        </p:par>
+                      </p:childTnLst>
+                    </p:cTn>
+                  </p:par>
+                  <p:par>
+                    <p:cTn id="23" fill="hold">
+                      <p:stCondLst>
+                        <p:cond delay="indefinite"/>
+                      </p:stCondLst>
+                      <p:childTnLst>
+                        <p:par>
+                          <p:cTn id="24" fill="hold">
+                            <p:stCondLst>
+                              <p:cond delay="0"/>
+                            </p:stCondLst>
+                            <p:childTnLst>
+                              <p:par>
+                                <p:cTn id="25" presetID="14" presetClass="entr" presetSubtype="10" fill="hold" nodeType="clickEffect">
+                                  <p:stCondLst>
+                                    <p:cond delay="0"/>
+                                  </p:stCondLst>
+                                  <p:childTnLst>
+                                    <p:set>
+                                      <p:cBhvr>
+                                        <p:cTn id="26" dur="1" fill="hold">
+                                          <p:stCondLst>
+                                            <p:cond delay="0"/>
+                                          </p:stCondLst>
+                                        </p:cTn>
+                                        <p:tgtEl>
+                                          <p:spTgt spid="9">
+                                            <p:txEl>
+                                              <p:pRg st="6" end="6"/>
+                                            </p:txEl>
+                                          </p:spTgt>
+                                        </p:tgtEl>
+                                        <p:attrNameLst>
+                                          <p:attrName>style.visibility</p:attrName>
+                                        </p:attrNameLst>
+                                      </p:cBhvr>
+                                      <p:to>
+                                        <p:strVal val="visible"/>
+                                      </p:to>
+                                    </p:set>
+                                    <p:animEffect transition="in" filter="randombar(horizontal)">
+                                      <p:cBhvr>
+                                        <p:cTn id="27" dur="500"/>
+                                        <p:tgtEl>
+                                          <p:spTgt spid="9">
+                                            <p:txEl>
+                                              <p:pRg st="6" end="6"/>
+                                            </p:txEl>
+                                          </p:spTgt>
+                                        </p:tgtEl>
+                                      </p:cBhvr>
+                                    </p:animEffect>
+                                  </p:childTnLst>
+                                </p:cTn>
+                              </p:par>
+                              <p:par>
+                                <p:cTn id="28" presetID="14" presetClass="entr" presetSubtype="10" fill="hold" nodeType="withEffect">
+                                  <p:stCondLst>
+                                    <p:cond delay="0"/>
+                                  </p:stCondLst>
+                                  <p:childTnLst>
+                                    <p:set>
+                                      <p:cBhvr>
+                                        <p:cTn id="29" dur="1" fill="hold">
+                                          <p:stCondLst>
+                                            <p:cond delay="0"/>
+                                          </p:stCondLst>
+                                        </p:cTn>
+                                        <p:tgtEl>
+                                          <p:spTgt spid="9">
+                                            <p:txEl>
+                                              <p:pRg st="7" end="7"/>
+                                            </p:txEl>
+                                          </p:spTgt>
+                                        </p:tgtEl>
+                                        <p:attrNameLst>
+                                          <p:attrName>style.visibility</p:attrName>
+                                        </p:attrNameLst>
+                                      </p:cBhvr>
+                                      <p:to>
+                                        <p:strVal val="visible"/>
+                                      </p:to>
+                                    </p:set>
+                                    <p:animEffect transition="in" filter="randombar(horizontal)">
+                                      <p:cBhvr>
+                                        <p:cTn id="30" dur="500"/>
+                                        <p:tgtEl>
+                                          <p:spTgt spid="9">
+                                            <p:txEl>
+                                              <p:pRg st="7" end="7"/>
+                                            </p:txEl>
+                                          </p:spTgt>
+                                        </p:tgtEl>
+                                      </p:cBhvr>
+                                    </p:animEffect>
+                                  </p:childTnLst>
+                                </p:cTn>
+                              </p:par>
+                              <p:par>
+                                <p:cTn id="31" presetID="14" presetClass="entr" presetSubtype="10" fill="hold" nodeType="withEffect">
+                                  <p:stCondLst>
+                                    <p:cond delay="0"/>
+                                  </p:stCondLst>
+                                  <p:childTnLst>
+                                    <p:set>
+                                      <p:cBhvr>
+                                        <p:cTn id="32" dur="1" fill="hold">
+                                          <p:stCondLst>
+                                            <p:cond delay="0"/>
+                                          </p:stCondLst>
+                                        </p:cTn>
+                                        <p:tgtEl>
+                                          <p:spTgt spid="9">
+                                            <p:txEl>
+                                              <p:pRg st="8" end="8"/>
+                                            </p:txEl>
+                                          </p:spTgt>
+                                        </p:tgtEl>
+                                        <p:attrNameLst>
+                                          <p:attrName>style.visibility</p:attrName>
+                                        </p:attrNameLst>
+                                      </p:cBhvr>
+                                      <p:to>
+                                        <p:strVal val="visible"/>
+                                      </p:to>
+                                    </p:set>
+                                    <p:animEffect transition="in" filter="randombar(horizontal)">
+                                      <p:cBhvr>
+                                        <p:cTn id="33" dur="500"/>
+                                        <p:tgtEl>
+                                          <p:spTgt spid="9">
+                                            <p:txEl>
+                                              <p:pRg st="8" end="8"/>
+                                            </p:txEl>
+                                          </p:spTgt>
+                                        </p:tgtEl>
+                                      </p:cBhvr>
+                                    </p:animEffect>
+                                  </p:childTnLst>
+                                </p:cTn>
+                              </p:par>
+                            </p:childTnLst>
+                          </p:cTn>
+                        </p:par>
+                      </p:childTnLst>
+                    </p:cTn>
+                  </p:par>
+                  <p:par>
+                    <p:cTn id="34" fill="hold">
+                      <p:stCondLst>
+                        <p:cond delay="indefinite"/>
+                      </p:stCondLst>
+                      <p:childTnLst>
+                        <p:par>
+                          <p:cTn id="35" fill="hold">
+                            <p:stCondLst>
+                              <p:cond delay="0"/>
+                            </p:stCondLst>
+                            <p:childTnLst>
+                              <p:par>
+                                <p:cTn id="36" presetID="14" presetClass="entr" presetSubtype="10" fill="hold" nodeType="clickEffect">
+                                  <p:stCondLst>
+                                    <p:cond delay="0"/>
+                                  </p:stCondLst>
+                                  <p:childTnLst>
+                                    <p:set>
+                                      <p:cBhvr>
+                                        <p:cTn id="37" dur="1" fill="hold">
+                                          <p:stCondLst>
+                                            <p:cond delay="0"/>
+                                          </p:stCondLst>
+                                        </p:cTn>
+                                        <p:tgtEl>
+                                          <p:spTgt spid="9">
+                                            <p:txEl>
+                                              <p:pRg st="9" end="9"/>
+                                            </p:txEl>
+                                          </p:spTgt>
+                                        </p:tgtEl>
+                                        <p:attrNameLst>
+                                          <p:attrName>style.visibility</p:attrName>
+                                        </p:attrNameLst>
+                                      </p:cBhvr>
+                                      <p:to>
+                                        <p:strVal val="visible"/>
+                                      </p:to>
+                                    </p:set>
+                                    <p:animEffect transition="in" filter="randombar(horizontal)">
+                                      <p:cBhvr>
+                                        <p:cTn id="38" dur="500"/>
+                                        <p:tgtEl>
+                                          <p:spTgt spid="9">
+                                            <p:txEl>
+                                              <p:pRg st="9" end="9"/>
+                                            </p:txEl>
+                                          </p:spTgt>
+                                        </p:tgtEl>
+                                      </p:cBhvr>
+                                    </p:animEffect>
+                                  </p:childTnLst>
+                                </p:cTn>
+                              </p:par>
+                            </p:childTnLst>
+                          </p:cTn>
+                        </p:par>
+                      </p:childTnLst>
+                    </p:cTn>
+                  </p:par>
+                </p:childTnLst>
+              </p:cTn>
+              <p:prevCondLst>
+                <p:cond evt="onPrev" delay="0">
+                  <p:tgtEl>
+                    <p:sldTgt/>
+                  </p:tgtEl>
+                </p:cond>
+              </p:prevCondLst>
+              <p:nextCondLst>
+                <p:cond evt="onNext" delay="0">
+                  <p:tgtEl>
+                    <p:sldTgt/>
+                  </p:tgtEl>
+                </p:cond>
+              </p:nextCondLst>
+            </p:seq>
+          </p:childTnLst>
+        </p:cTn>
+      </p:par>
+    </p:tnLst>
+  </p:timing>
+</p:sld>
+</file>
+
+<file path=ppt/slides/slide32.xml><?xml version="1.0" encoding="utf-8"?>
+<p:sld xmlns:a="http://schemas.openxmlformats.org/drawingml/2006/main" xmlns:r="http://schemas.openxmlformats.org/officeDocument/2006/relationships" xmlns:p="http://schemas.openxmlformats.org/presentationml/2006/main">
+  <p:cSld>
+    <p:spTree>
+      <p:nvGrpSpPr>
+        <p:cNvPr id="1" name="">
+          <a:extLst>
+            <a:ext uri="{FF2B5EF4-FFF2-40B4-BE49-F238E27FC236}">
+              <a16:creationId xmlns:a16="http://schemas.microsoft.com/office/drawing/2014/main" id="{381C2602-AC78-017D-7260-2A70AB0908DE}"/>
+            </a:ext>
+          </a:extLst>
+        </p:cNvPr>
+        <p:cNvGrpSpPr/>
+        <p:nvPr/>
+      </p:nvGrpSpPr>
+      <p:grpSpPr>
+        <a:xfrm>
+          <a:off x="0" y="0"/>
+          <a:ext cx="0" cy="0"/>
+          <a:chOff x="0" y="0"/>
+          <a:chExt cx="0" cy="0"/>
+        </a:xfrm>
+      </p:grpSpPr>
+      <p:pic>
+        <p:nvPicPr>
+          <p:cNvPr id="3" name="Content Placeholder 2" descr="A table with numbers and text&#10;&#10;AI-generated content may be incorrect.">
+            <a:extLst>
+              <a:ext uri="{FF2B5EF4-FFF2-40B4-BE49-F238E27FC236}">
+                <a16:creationId xmlns:a16="http://schemas.microsoft.com/office/drawing/2014/main" id="{5AF16C2B-5DE3-2B7F-19CC-E992FFD201B7}"/>
+              </a:ext>
+            </a:extLst>
+          </p:cNvPr>
+          <p:cNvPicPr>
+            <a:picLocks noGrp="1" noChangeAspect="1"/>
+          </p:cNvPicPr>
+          <p:nvPr>
+            <p:ph idx="1"/>
+          </p:nvPr>
+        </p:nvPicPr>
+        <p:blipFill>
+          <a:blip r:embed="rId3"/>
+          <a:stretch>
+            <a:fillRect/>
+          </a:stretch>
+        </p:blipFill>
+        <p:spPr>
+          <a:xfrm>
+            <a:off x="904875" y="1973544"/>
+            <a:ext cx="7726363" cy="2566425"/>
+          </a:xfrm>
+        </p:spPr>
+      </p:pic>
+      <p:sp>
+        <p:nvSpPr>
+          <p:cNvPr id="8" name="Title 7">
+            <a:extLst>
+              <a:ext uri="{FF2B5EF4-FFF2-40B4-BE49-F238E27FC236}">
+                <a16:creationId xmlns:a16="http://schemas.microsoft.com/office/drawing/2014/main" id="{C693EE83-165E-E4D0-8F53-7E585DF6A34E}"/>
+              </a:ext>
+            </a:extLst>
+          </p:cNvPr>
+          <p:cNvSpPr>
+            <a:spLocks noGrp="1"/>
+          </p:cNvSpPr>
+          <p:nvPr>
+            <p:ph type="title"/>
+          </p:nvPr>
+        </p:nvSpPr>
+        <p:spPr>
+          <a:xfrm>
+            <a:off x="904875" y="131032"/>
+            <a:ext cx="7726363" cy="1072753"/>
+          </a:xfrm>
+        </p:spPr>
+        <p:txBody>
+          <a:bodyPr>
+            <a:normAutofit/>
+          </a:bodyPr>
+          <a:lstStyle/>
+          <a:p>
+            <a:r>
+              <a:rPr lang="en-US" dirty="0"/>
+              <a:t>3.2	Results</a:t>
+            </a:r>
+            <a:br>
+              <a:rPr lang="en-US" dirty="0"/>
+            </a:br>
+            <a:r>
+              <a:rPr lang="en-US" sz="2400" b="0" i="1" dirty="0"/>
+              <a:t>Re-evaluation on Monty after ablation</a:t>
+            </a:r>
+            <a:endParaRPr lang="en-GB" sz="2400" b="0" i="1" dirty="0"/>
+          </a:p>
+        </p:txBody>
+      </p:sp>
+      <p:sp>
+        <p:nvSpPr>
+          <p:cNvPr id="5" name="Date Placeholder 4">
+            <a:extLst>
+              <a:ext uri="{FF2B5EF4-FFF2-40B4-BE49-F238E27FC236}">
+                <a16:creationId xmlns:a16="http://schemas.microsoft.com/office/drawing/2014/main" id="{454B3474-BC5A-14D1-1B9C-FA68656C11BA}"/>
+              </a:ext>
+            </a:extLst>
+          </p:cNvPr>
+          <p:cNvSpPr>
+            <a:spLocks noGrp="1"/>
+          </p:cNvSpPr>
+          <p:nvPr>
+            <p:ph type="dt" sz="half" idx="10"/>
+          </p:nvPr>
+        </p:nvSpPr>
+        <p:spPr/>
+        <p:txBody>
+          <a:bodyPr/>
+          <a:lstStyle/>
+          <a:p>
+            <a:r>
+              <a:rPr lang="en-US" sz="600" dirty="0">
+                <a:latin typeface="+mj-lt"/>
+              </a:rPr>
+              <a:t>EDIC PhD Private Defense / Scalable Methods for Knowledge Graph Reasoning and Generation</a:t>
+            </a:r>
+          </a:p>
+        </p:txBody>
+      </p:sp>
+      <p:sp>
+        <p:nvSpPr>
+          <p:cNvPr id="6" name="Footer Placeholder 5">
+            <a:extLst>
+              <a:ext uri="{FF2B5EF4-FFF2-40B4-BE49-F238E27FC236}">
+                <a16:creationId xmlns:a16="http://schemas.microsoft.com/office/drawing/2014/main" id="{41BDD46E-7B25-E7D0-B5E9-715EE55E8A01}"/>
+              </a:ext>
+            </a:extLst>
+          </p:cNvPr>
+          <p:cNvSpPr>
+            <a:spLocks noGrp="1"/>
+          </p:cNvSpPr>
+          <p:nvPr>
+            <p:ph type="ftr" sz="quarter" idx="11"/>
+          </p:nvPr>
+        </p:nvSpPr>
+        <p:spPr/>
+        <p:txBody>
+          <a:bodyPr/>
+          <a:lstStyle/>
+          <a:p>
+            <a:r>
+              <a:rPr lang="fr-FR" dirty="0">
+                <a:latin typeface="+mj-lt"/>
+              </a:rPr>
+              <a:t>Andrej Janchevski, EPFL STI IEM LIONS, Lausanne, </a:t>
+            </a:r>
+            <a:r>
+              <a:rPr lang="fr-FR" dirty="0" err="1">
+                <a:latin typeface="+mj-lt"/>
+              </a:rPr>
+              <a:t>Switzerland</a:t>
+            </a:r>
+            <a:r>
+              <a:rPr lang="fr-FR" dirty="0">
+                <a:latin typeface="+mj-lt"/>
+              </a:rPr>
+              <a:t> </a:t>
+            </a:r>
+          </a:p>
+        </p:txBody>
+      </p:sp>
+      <p:sp>
+        <p:nvSpPr>
+          <p:cNvPr id="7" name="Slide Number Placeholder 6">
+            <a:extLst>
+              <a:ext uri="{FF2B5EF4-FFF2-40B4-BE49-F238E27FC236}">
+                <a16:creationId xmlns:a16="http://schemas.microsoft.com/office/drawing/2014/main" id="{657BB1F8-B000-2B16-FE4D-FCF2117A3DAB}"/>
+              </a:ext>
+            </a:extLst>
+          </p:cNvPr>
+          <p:cNvSpPr>
+            <a:spLocks noGrp="1"/>
+          </p:cNvSpPr>
+          <p:nvPr>
+            <p:ph type="sldNum" sz="quarter" idx="12"/>
+          </p:nvPr>
+        </p:nvSpPr>
+        <p:spPr/>
+        <p:txBody>
+          <a:bodyPr/>
+          <a:lstStyle/>
+          <a:p>
+            <a:fld id="{E1E1CD7C-2161-7D43-862E-CE4C333CD873}" type="slidenum">
+              <a:rPr lang="fr-FR" smtClean="0"/>
+              <a:pPr/>
+              <a:t>32</a:t>
+            </a:fld>
+            <a:endParaRPr lang="fr-FR" dirty="0"/>
+          </a:p>
+        </p:txBody>
+      </p:sp>
+    </p:spTree>
+    <p:extLst>
+      <p:ext uri="{BB962C8B-B14F-4D97-AF65-F5344CB8AC3E}">
+        <p14:creationId xmlns:p14="http://schemas.microsoft.com/office/powerpoint/2010/main" val="955769528"/>
+      </p:ext>
+    </p:extLst>
+  </p:cSld>
+  <p:clrMapOvr>
+    <a:masterClrMapping/>
+  </p:clrMapOvr>
+  <p:timing>
+    <p:tnLst>
+      <p:par>
+        <p:cTn id="1" dur="indefinite" restart="never" nodeType="tmRoot">
+          <p:childTnLst>
+            <p:seq concurrent="1" nextAc="seek">
+              <p:cTn id="2" dur="indefinite" nodeType="mainSeq">
+                <p:childTnLst>
+                  <p:par>
+                    <p:cTn id="3" fill="hold">
+                      <p:stCondLst>
+                        <p:cond delay="indefinite"/>
+                      </p:stCondLst>
+                      <p:childTnLst>
+                        <p:par>
+                          <p:cTn id="4" fill="hold">
+                            <p:stCondLst>
+                              <p:cond delay="0"/>
+                            </p:stCondLst>
+                            <p:childTnLst>
+                              <p:par>
+                                <p:cTn id="5" presetID="14" presetClass="entr" presetSubtype="10" fill="hold" nodeType="clickEffect">
+                                  <p:stCondLst>
+                                    <p:cond delay="0"/>
+                                  </p:stCondLst>
+                                  <p:childTnLst>
+                                    <p:set>
+                                      <p:cBhvr>
+                                        <p:cTn id="6" dur="1" fill="hold">
+                                          <p:stCondLst>
+                                            <p:cond delay="0"/>
+                                          </p:stCondLst>
+                                        </p:cTn>
+                                        <p:tgtEl>
+                                          <p:spTgt spid="3"/>
+                                        </p:tgtEl>
+                                        <p:attrNameLst>
+                                          <p:attrName>style.visibility</p:attrName>
+                                        </p:attrNameLst>
+                                      </p:cBhvr>
+                                      <p:to>
+                                        <p:strVal val="visible"/>
+                                      </p:to>
+                                    </p:set>
+                                    <p:animEffect transition="in" filter="randombar(horizontal)">
+                                      <p:cBhvr>
+                                        <p:cTn id="7" dur="500"/>
+                                        <p:tgtEl>
+                                          <p:spTgt spid="3"/>
+                                        </p:tgtEl>
+                                      </p:cBhvr>
+                                    </p:animEffect>
+                                  </p:childTnLst>
+                                </p:cTn>
+                              </p:par>
+                            </p:childTnLst>
+                          </p:cTn>
+                        </p:par>
+                      </p:childTnLst>
+                    </p:cTn>
+                  </p:par>
+                </p:childTnLst>
+              </p:cTn>
+              <p:prevCondLst>
+                <p:cond evt="onPrev" delay="0">
+                  <p:tgtEl>
+                    <p:sldTgt/>
+                  </p:tgtEl>
+                </p:cond>
+              </p:prevCondLst>
+              <p:nextCondLst>
+                <p:cond evt="onNext" delay="0">
+                  <p:tgtEl>
+                    <p:sldTgt/>
+                  </p:tgtEl>
+                </p:cond>
+              </p:nextCondLst>
+            </p:seq>
+          </p:childTnLst>
+        </p:cTn>
+      </p:par>
+    </p:tnLst>
+  </p:timing>
+</p:sld>
+</file>
+
+<file path=ppt/slides/slide33.xml><?xml version="1.0" encoding="utf-8"?>
+<p:sld xmlns:a="http://schemas.openxmlformats.org/drawingml/2006/main" xmlns:r="http://schemas.openxmlformats.org/officeDocument/2006/relationships" xmlns:p="http://schemas.openxmlformats.org/presentationml/2006/main">
+  <p:cSld>
+    <p:spTree>
+      <p:nvGrpSpPr>
+        <p:cNvPr id="1" name="">
+          <a:extLst>
+            <a:ext uri="{FF2B5EF4-FFF2-40B4-BE49-F238E27FC236}">
               <a16:creationId xmlns:a16="http://schemas.microsoft.com/office/drawing/2014/main" id="{E591C77E-5A3B-873C-A193-98CDCCDE81A6}"/>
             </a:ext>
           </a:extLst>
@@ -22973,7 +31118,7 @@
             <a:fld id="{E1E1CD7C-2161-7D43-862E-CE4C333CD873}" type="slidenum">
               <a:rPr lang="fr-FR" smtClean="0"/>
               <a:pPr/>
-              <a:t>25</a:t>
+              <a:t>33</a:t>
             </a:fld>
             <a:endParaRPr lang="fr-FR" dirty="0"/>
           </a:p>
@@ -23041,7 +31186,7 @@
 </p:sld>
 </file>
 
-<file path=ppt/slides/slide26.xml><?xml version="1.0" encoding="utf-8"?>
+<file path=ppt/slides/slide34.xml><?xml version="1.0" encoding="utf-8"?>
 <p:sld xmlns:a="http://schemas.openxmlformats.org/drawingml/2006/main" xmlns:r="http://schemas.openxmlformats.org/officeDocument/2006/relationships" xmlns:p="http://schemas.openxmlformats.org/presentationml/2006/main">
   <p:cSld>
     <p:spTree>
@@ -23235,7 +31380,7 @@
             <a:fld id="{E1E1CD7C-2161-7D43-862E-CE4C333CD873}" type="slidenum">
               <a:rPr lang="fr-FR" smtClean="0"/>
               <a:pPr/>
-              <a:t>26</a:t>
+              <a:t>34</a:t>
             </a:fld>
             <a:endParaRPr lang="fr-FR" dirty="0"/>
           </a:p>
@@ -23303,7 +31448,7 @@
 </p:sld>
 </file>
 
-<file path=ppt/slides/slide27.xml><?xml version="1.0" encoding="utf-8"?>
+<file path=ppt/slides/slide35.xml><?xml version="1.0" encoding="utf-8"?>
 <p:sld xmlns:a="http://schemas.openxmlformats.org/drawingml/2006/main" xmlns:r="http://schemas.openxmlformats.org/officeDocument/2006/relationships" xmlns:p="http://schemas.openxmlformats.org/presentationml/2006/main">
   <p:cSld>
     <p:spTree>
@@ -23495,7 +31640,7 @@
             <a:fld id="{E1E1CD7C-2161-7D43-862E-CE4C333CD873}" type="slidenum">
               <a:rPr lang="fr-FR" smtClean="0"/>
               <a:pPr/>
-              <a:t>27</a:t>
+              <a:t>35</a:t>
             </a:fld>
             <a:endParaRPr lang="fr-FR" dirty="0"/>
           </a:p>
@@ -23550,262 +31695,6 @@
     <p:extLst>
       <p:ext uri="{BB962C8B-B14F-4D97-AF65-F5344CB8AC3E}">
         <p14:creationId xmlns:p14="http://schemas.microsoft.com/office/powerpoint/2010/main" val="3820843079"/>
-      </p:ext>
-    </p:extLst>
-  </p:cSld>
-  <p:clrMapOvr>
-    <a:masterClrMapping/>
-  </p:clrMapOvr>
-</p:sld>
-</file>
-
-<file path=ppt/slides/slide3.xml><?xml version="1.0" encoding="utf-8"?>
-<p:sld xmlns:a="http://schemas.openxmlformats.org/drawingml/2006/main" xmlns:r="http://schemas.openxmlformats.org/officeDocument/2006/relationships" xmlns:p="http://schemas.openxmlformats.org/presentationml/2006/main">
-  <p:cSld>
-    <p:spTree>
-      <p:nvGrpSpPr>
-        <p:cNvPr id="1" name=""/>
-        <p:cNvGrpSpPr/>
-        <p:nvPr/>
-      </p:nvGrpSpPr>
-      <p:grpSpPr>
-        <a:xfrm>
-          <a:off x="0" y="0"/>
-          <a:ext cx="0" cy="0"/>
-          <a:chOff x="0" y="0"/>
-          <a:chExt cx="0" cy="0"/>
-        </a:xfrm>
-      </p:grpSpPr>
-      <p:sp>
-        <p:nvSpPr>
-          <p:cNvPr id="7" name="Title 6">
-            <a:extLst>
-              <a:ext uri="{FF2B5EF4-FFF2-40B4-BE49-F238E27FC236}">
-                <a16:creationId xmlns:a16="http://schemas.microsoft.com/office/drawing/2014/main" id="{579054AB-E69B-49BD-6443-39E9AED0207C}"/>
-              </a:ext>
-            </a:extLst>
-          </p:cNvPr>
-          <p:cNvSpPr>
-            <a:spLocks noGrp="1"/>
-          </p:cNvSpPr>
-          <p:nvPr>
-            <p:ph type="title"/>
-          </p:nvPr>
-        </p:nvSpPr>
-        <p:spPr/>
-        <p:txBody>
-          <a:bodyPr/>
-          <a:lstStyle/>
-          <a:p>
-            <a:r>
-              <a:rPr lang="en-US" dirty="0"/>
-              <a:t>Introduction</a:t>
-            </a:r>
-            <a:endParaRPr lang="en-GB" dirty="0"/>
-          </a:p>
-        </p:txBody>
-      </p:sp>
-      <p:sp>
-        <p:nvSpPr>
-          <p:cNvPr id="8" name="Text Placeholder 7">
-            <a:extLst>
-              <a:ext uri="{FF2B5EF4-FFF2-40B4-BE49-F238E27FC236}">
-                <a16:creationId xmlns:a16="http://schemas.microsoft.com/office/drawing/2014/main" id="{762427C8-5173-2FAE-16A3-AA708901905A}"/>
-              </a:ext>
-            </a:extLst>
-          </p:cNvPr>
-          <p:cNvSpPr>
-            <a:spLocks noGrp="1"/>
-          </p:cNvSpPr>
-          <p:nvPr>
-            <p:ph type="body" idx="1"/>
-          </p:nvPr>
-        </p:nvSpPr>
-        <p:spPr/>
-        <p:txBody>
-          <a:bodyPr>
-            <a:normAutofit/>
-          </a:bodyPr>
-          <a:lstStyle/>
-          <a:p>
-            <a:r>
-              <a:rPr lang="en-US" sz="2400" dirty="0">
-                <a:latin typeface="+mj-lt"/>
-              </a:rPr>
-              <a:t>Chapter 1</a:t>
-            </a:r>
-            <a:endParaRPr lang="en-GB" sz="2400" dirty="0">
-              <a:latin typeface="+mj-lt"/>
-            </a:endParaRPr>
-          </a:p>
-        </p:txBody>
-      </p:sp>
-      <p:sp>
-        <p:nvSpPr>
-          <p:cNvPr id="4" name="Date Placeholder 3">
-            <a:extLst>
-              <a:ext uri="{FF2B5EF4-FFF2-40B4-BE49-F238E27FC236}">
-                <a16:creationId xmlns:a16="http://schemas.microsoft.com/office/drawing/2014/main" id="{5751FED3-C36F-426D-39B0-F93F3B412C3D}"/>
-              </a:ext>
-            </a:extLst>
-          </p:cNvPr>
-          <p:cNvSpPr>
-            <a:spLocks noGrp="1"/>
-          </p:cNvSpPr>
-          <p:nvPr>
-            <p:ph type="dt" sz="half" idx="14"/>
-          </p:nvPr>
-        </p:nvSpPr>
-        <p:spPr/>
-        <p:txBody>
-          <a:bodyPr/>
-          <a:lstStyle/>
-          <a:p>
-            <a:r>
-              <a:rPr lang="en-US" sz="600" dirty="0">
-                <a:latin typeface="+mj-lt"/>
-              </a:rPr>
-              <a:t>EDIC PhD Private Defense / Scalable Methods for Knowledge Graph Reasoning and Generation</a:t>
-            </a:r>
-          </a:p>
-        </p:txBody>
-      </p:sp>
-      <p:sp>
-        <p:nvSpPr>
-          <p:cNvPr id="5" name="Footer Placeholder 4">
-            <a:extLst>
-              <a:ext uri="{FF2B5EF4-FFF2-40B4-BE49-F238E27FC236}">
-                <a16:creationId xmlns:a16="http://schemas.microsoft.com/office/drawing/2014/main" id="{01436E2B-6C6B-2BBB-CDDF-4BFF19B93179}"/>
-              </a:ext>
-            </a:extLst>
-          </p:cNvPr>
-          <p:cNvSpPr>
-            <a:spLocks noGrp="1"/>
-          </p:cNvSpPr>
-          <p:nvPr>
-            <p:ph type="ftr" sz="quarter" idx="15"/>
-          </p:nvPr>
-        </p:nvSpPr>
-        <p:spPr/>
-        <p:txBody>
-          <a:bodyPr/>
-          <a:lstStyle/>
-          <a:p>
-            <a:endParaRPr lang="fr-FR" dirty="0">
-              <a:latin typeface="+mj-lt"/>
-            </a:endParaRPr>
-          </a:p>
-          <a:p>
-            <a:r>
-              <a:rPr lang="fr-FR" dirty="0">
-                <a:latin typeface="+mj-lt"/>
-              </a:rPr>
-              <a:t>Andrej Janchevski, EPFL STI IEM LIONS, Lausanne, </a:t>
-            </a:r>
-            <a:r>
-              <a:rPr lang="fr-FR" dirty="0" err="1">
-                <a:latin typeface="+mj-lt"/>
-              </a:rPr>
-              <a:t>Switzerland</a:t>
-            </a:r>
-            <a:r>
-              <a:rPr lang="fr-FR" dirty="0">
-                <a:latin typeface="+mj-lt"/>
-              </a:rPr>
-              <a:t> </a:t>
-            </a:r>
-          </a:p>
-          <a:p>
-            <a:r>
-              <a:rPr lang="fr-FR" dirty="0"/>
-              <a:t> </a:t>
-            </a:r>
-          </a:p>
-        </p:txBody>
-      </p:sp>
-      <p:sp>
-        <p:nvSpPr>
-          <p:cNvPr id="6" name="Slide Number Placeholder 5">
-            <a:extLst>
-              <a:ext uri="{FF2B5EF4-FFF2-40B4-BE49-F238E27FC236}">
-                <a16:creationId xmlns:a16="http://schemas.microsoft.com/office/drawing/2014/main" id="{1CECEE65-7D03-DBD2-DD71-1F87BF9F8775}"/>
-              </a:ext>
-            </a:extLst>
-          </p:cNvPr>
-          <p:cNvSpPr>
-            <a:spLocks noGrp="1"/>
-          </p:cNvSpPr>
-          <p:nvPr>
-            <p:ph type="sldNum" sz="quarter" idx="16"/>
-          </p:nvPr>
-        </p:nvSpPr>
-        <p:spPr/>
-        <p:txBody>
-          <a:bodyPr/>
-          <a:lstStyle/>
-          <a:p>
-            <a:fld id="{E1E1CD7C-2161-7D43-862E-CE4C333CD873}" type="slidenum">
-              <a:rPr lang="fr-FR" smtClean="0"/>
-              <a:pPr/>
-              <a:t>3</a:t>
-            </a:fld>
-            <a:endParaRPr lang="fr-FR" dirty="0"/>
-          </a:p>
-        </p:txBody>
-      </p:sp>
-      <p:pic>
-        <p:nvPicPr>
-          <p:cNvPr id="10" name="Picture Placeholder 11" descr="A city next to the water&#10;&#10;AI-generated content may be incorrect.">
-            <a:extLst>
-              <a:ext uri="{FF2B5EF4-FFF2-40B4-BE49-F238E27FC236}">
-                <a16:creationId xmlns:a16="http://schemas.microsoft.com/office/drawing/2014/main" id="{7D023253-089C-DCAE-E050-516180635769}"/>
-              </a:ext>
-            </a:extLst>
-          </p:cNvPr>
-          <p:cNvPicPr>
-            <a:picLocks noGrp="1" noChangeAspect="1"/>
-          </p:cNvPicPr>
-          <p:nvPr>
-            <p:ph type="pic" sz="quarter" idx="13"/>
-          </p:nvPr>
-        </p:nvPicPr>
-        <p:blipFill>
-          <a:blip r:embed="rId3">
-            <a:extLst>
-              <a:ext uri="{837473B0-CC2E-450A-ABE3-18F120FF3D39}">
-                <a1611:picAttrSrcUrl xmlns:a1611="http://schemas.microsoft.com/office/drawing/2016/11/main" r:id="rId4"/>
-              </a:ext>
-            </a:extLst>
-          </a:blip>
-          <a:srcRect l="26235" r="26235"/>
-          <a:stretch>
-            <a:fillRect/>
-          </a:stretch>
-        </p:blipFill>
-        <p:spPr bwMode="auto">
-          <a:xfrm>
-            <a:off x="904875" y="0"/>
-            <a:ext cx="3667125" cy="5143500"/>
-          </a:xfrm>
-          <a:prstGeom prst="rect">
-            <a:avLst/>
-          </a:prstGeom>
-          <a:noFill/>
-          <a:extLst>
-            <a:ext uri="{909E8E84-426E-40DD-AFC4-6F175D3DCCD1}">
-              <a14:hiddenFill xmlns:a14="http://schemas.microsoft.com/office/drawing/2010/main">
-                <a:solidFill>
-                  <a:srgbClr val="FFFFFF"/>
-                </a:solidFill>
-              </a14:hiddenFill>
-            </a:ext>
-          </a:extLst>
-        </p:spPr>
-      </p:pic>
-    </p:spTree>
-    <p:extLst>
-      <p:ext uri="{BB962C8B-B14F-4D97-AF65-F5344CB8AC3E}">
-        <p14:creationId xmlns:p14="http://schemas.microsoft.com/office/powerpoint/2010/main" val="2310135826"/>
       </p:ext>
     </p:extLst>
   </p:cSld>
@@ -25291,8 +33180,8 @@
           <a:chExt cx="0" cy="0"/>
         </a:xfrm>
       </p:grpSpPr>
-      <mc:AlternateContent xmlns:mc="http://schemas.openxmlformats.org/markup-compatibility/2006">
-        <mc:Choice xmlns:a14="http://schemas.microsoft.com/office/drawing/2010/main" Requires="a14">
+      <mc:AlternateContent xmlns:mc="http://schemas.openxmlformats.org/markup-compatibility/2006" xmlns:a14="http://schemas.microsoft.com/office/drawing/2010/main">
+        <mc:Choice Requires="a14">
           <p:sp>
             <p:nvSpPr>
               <p:cNvPr id="2" name="Content Placeholder 1">
@@ -25347,13 +33236,13 @@
                   <m:oMath xmlns:m="http://schemas.openxmlformats.org/officeDocument/2006/math">
                     <m:r>
                       <a:rPr lang="en-US" b="0" i="1" smtClean="0">
-                        <a:latin typeface="+mj-lt"/>
+                        <a:latin typeface="Cambria Math" panose="02040503050406030204" pitchFamily="18" charset="0"/>
                       </a:rPr>
                       <m:t>𝐺</m:t>
                     </m:r>
                     <m:r>
                       <a:rPr lang="en-US" b="0" i="1" smtClean="0">
-                        <a:latin typeface="+mj-lt"/>
+                        <a:latin typeface="Cambria Math" panose="02040503050406030204" pitchFamily="18" charset="0"/>
                       </a:rPr>
                       <m:t>=</m:t>
                     </m:r>
@@ -25361,26 +33250,26 @@
                       <m:dPr>
                         <m:ctrlPr>
                           <a:rPr lang="en-US" b="0" i="1" smtClean="0">
-                            <a:latin typeface="+mj-lt"/>
+                            <a:latin typeface="Cambria Math" panose="02040503050406030204" pitchFamily="18" charset="0"/>
                           </a:rPr>
                         </m:ctrlPr>
                       </m:dPr>
                       <m:e>
                         <m:r>
                           <a:rPr lang="en-US" b="0" i="1" smtClean="0">
-                            <a:latin typeface="+mj-lt"/>
+                            <a:latin typeface="Cambria Math" panose="02040503050406030204" pitchFamily="18" charset="0"/>
                           </a:rPr>
                           <m:t>𝑉</m:t>
                         </m:r>
                         <m:r>
                           <a:rPr lang="en-US" b="0" i="1" smtClean="0">
-                            <a:latin typeface="+mj-lt"/>
+                            <a:latin typeface="Cambria Math" panose="02040503050406030204" pitchFamily="18" charset="0"/>
                           </a:rPr>
                           <m:t>,</m:t>
                         </m:r>
                         <m:r>
                           <a:rPr lang="en-US" b="0" i="1" smtClean="0">
-                            <a:latin typeface="+mj-lt"/>
+                            <a:latin typeface="Cambria Math" panose="02040503050406030204" pitchFamily="18" charset="0"/>
                           </a:rPr>
                           <m:t>𝐸</m:t>
                         </m:r>
@@ -25527,7 +33416,7 @@
             </p:txBody>
           </p:sp>
         </mc:Choice>
-        <mc:Fallback>
+        <mc:Fallback xmlns="">
           <p:sp>
             <p:nvSpPr>
               <p:cNvPr id="2" name="Content Placeholder 1">
@@ -29238,21 +37127,6 @@
 </file>
 
 <file path=customXml/item1.xml><?xml version="1.0" encoding="utf-8"?>
-<?mso-contentType ?>
-<FormTemplates xmlns="http://schemas.microsoft.com/sharepoint/v3/contenttype/forms">
-  <Display>DocumentLibraryForm</Display>
-  <Edit>DocumentLibraryForm</Edit>
-  <New>DocumentLibraryForm</New>
-</FormTemplates>
-</file>
-
-<file path=customXml/item2.xml><?xml version="1.0" encoding="utf-8"?>
-<p:properties xmlns:p="http://schemas.microsoft.com/office/2006/metadata/properties" xmlns:xsi="http://www.w3.org/2001/XMLSchema-instance" xmlns:pc="http://schemas.microsoft.com/office/infopath/2007/PartnerControls">
-  <documentManagement/>
-</p:properties>
-</file>
-
-<file path=customXml/item3.xml><?xml version="1.0" encoding="utf-8"?>
 <ct:contentTypeSchema xmlns:ct="http://schemas.microsoft.com/office/2006/metadata/contentType" xmlns:ma="http://schemas.microsoft.com/office/2006/metadata/properties/metaAttributes" ct:_="" ma:_="" ma:contentTypeName="Document" ma:contentTypeID="0x0101001BFC127AB4946248A5685C1F92D54FFE" ma:contentTypeVersion="0" ma:contentTypeDescription="Crée un document." ma:contentTypeScope="" ma:versionID="ef3ff242486930b75c69099c0dd02c57">
   <xsd:schema xmlns:xsd="http://www.w3.org/2001/XMLSchema" xmlns:xs="http://www.w3.org/2001/XMLSchema" xmlns:p="http://schemas.microsoft.com/office/2006/metadata/properties" targetNamespace="http://schemas.microsoft.com/office/2006/metadata/properties" ma:root="true" ma:fieldsID="ab09c1ba23edfaa45a5e9d385267c9b5">
     <xsd:element name="properties">
@@ -29366,10 +37240,33 @@
 </ct:contentTypeSchema>
 </file>
 
+<file path=customXml/item2.xml><?xml version="1.0" encoding="utf-8"?>
+<p:properties xmlns:p="http://schemas.microsoft.com/office/2006/metadata/properties" xmlns:xsi="http://www.w3.org/2001/XMLSchema-instance" xmlns:pc="http://schemas.microsoft.com/office/infopath/2007/PartnerControls">
+  <documentManagement/>
+</p:properties>
+</file>
+
+<file path=customXml/item3.xml><?xml version="1.0" encoding="utf-8"?>
+<?mso-contentType ?>
+<FormTemplates xmlns="http://schemas.microsoft.com/sharepoint/v3/contenttype/forms">
+  <Display>DocumentLibraryForm</Display>
+  <Edit>DocumentLibraryForm</Edit>
+  <New>DocumentLibraryForm</New>
+</FormTemplates>
+</file>
+
 <file path=customXml/itemProps1.xml><?xml version="1.0" encoding="utf-8"?>
-<ds:datastoreItem xmlns:ds="http://schemas.openxmlformats.org/officeDocument/2006/customXml" ds:itemID="{266205E9-12FC-4D6C-B0C7-1E9025EEB158}">
+<ds:datastoreItem xmlns:ds="http://schemas.openxmlformats.org/officeDocument/2006/customXml" ds:itemID="{8F8CE09B-89B1-4B5D-BED2-87C84F077711}">
   <ds:schemaRefs>
-    <ds:schemaRef ds:uri="http://schemas.microsoft.com/sharepoint/v3/contenttype/forms"/>
+    <ds:schemaRef ds:uri="http://schemas.microsoft.com/office/2006/metadata/contentType"/>
+    <ds:schemaRef ds:uri="http://schemas.microsoft.com/office/2006/metadata/properties/metaAttributes"/>
+    <ds:schemaRef ds:uri="http://www.w3.org/2001/XMLSchema"/>
+    <ds:schemaRef ds:uri="http://schemas.microsoft.com/office/2006/metadata/properties"/>
+    <ds:schemaRef ds:uri="http://schemas.openxmlformats.org/package/2006/metadata/core-properties"/>
+    <ds:schemaRef ds:uri="http://purl.org/dc/elements/1.1/"/>
+    <ds:schemaRef ds:uri="http://purl.org/dc/terms/"/>
+    <ds:schemaRef ds:uri="http://schemas.microsoft.com/internal/obd"/>
+    <ds:schemaRef ds:uri="http://schemas.microsoft.com/office/infopath/2007/PartnerControls"/>
   </ds:schemaRefs>
 </ds:datastoreItem>
 </file>
@@ -29390,17 +37287,9 @@
 </file>
 
 <file path=customXml/itemProps3.xml><?xml version="1.0" encoding="utf-8"?>
-<ds:datastoreItem xmlns:ds="http://schemas.openxmlformats.org/officeDocument/2006/customXml" ds:itemID="{8F8CE09B-89B1-4B5D-BED2-87C84F077711}">
+<ds:datastoreItem xmlns:ds="http://schemas.openxmlformats.org/officeDocument/2006/customXml" ds:itemID="{266205E9-12FC-4D6C-B0C7-1E9025EEB158}">
   <ds:schemaRefs>
-    <ds:schemaRef ds:uri="http://schemas.microsoft.com/office/2006/metadata/contentType"/>
-    <ds:schemaRef ds:uri="http://schemas.microsoft.com/office/2006/metadata/properties/metaAttributes"/>
-    <ds:schemaRef ds:uri="http://www.w3.org/2001/XMLSchema"/>
-    <ds:schemaRef ds:uri="http://schemas.microsoft.com/office/2006/metadata/properties"/>
-    <ds:schemaRef ds:uri="http://schemas.openxmlformats.org/package/2006/metadata/core-properties"/>
-    <ds:schemaRef ds:uri="http://purl.org/dc/elements/1.1/"/>
-    <ds:schemaRef ds:uri="http://purl.org/dc/terms/"/>
-    <ds:schemaRef ds:uri="http://schemas.microsoft.com/internal/obd"/>
-    <ds:schemaRef ds:uri="http://schemas.microsoft.com/office/infopath/2007/PartnerControls"/>
+    <ds:schemaRef ds:uri="http://schemas.microsoft.com/sharepoint/v3/contenttype/forms"/>
   </ds:schemaRefs>
 </ds:datastoreItem>
 </file>